--- a/Caso_09_UCP.pptx
+++ b/Caso_09_UCP.pptx
@@ -3362,7 +3362,7 @@
                 </a:solidFill>
                 <a:latin typeface="Montserrat"/>
               </a:rPr>
-              <a:t>Caso 09: dolor abdominal y lesión pancreática</a:t>
+              <a:t>Caso clínico 09: enfoque integral de la pancreatitis aguda</a:t>
             </a:r>
           </a:p>
         </p:txBody>
@@ -3550,7 +3550,7 @@
                 </a:solidFill>
                 <a:latin typeface="Montserrat"/>
               </a:rPr>
-              <a:t>MICROFOTOGRAFÍA OFICIAL H&amp;E</a:t>
+              <a:t>MICROSCOPÍA EN H&amp;E</a:t>
             </a:r>
           </a:p>
         </p:txBody>
@@ -3592,7 +3592,7 @@
                 </a:solidFill>
                 <a:latin typeface="Montserrat"/>
               </a:rPr>
-              <a:t>El calcio marca los adipocitos lesionados</a:t>
+              <a:t>Esteatonecrosis pancreática en la microfotografía H&amp;E</a:t>
             </a:r>
           </a:p>
         </p:txBody>
@@ -3896,7 +3896,7 @@
                 </a:solidFill>
                 <a:latin typeface="Montserrat"/>
               </a:rPr>
-              <a:t>H&amp;E: adipocitos necróticos y depósitos basófilos de calcio; correlacionar con acinos y vasos.</a:t>
+              <a:t>H&amp;E (hematoxilina-eosina): adipocitos necróticos y depósitos basófilos de calcio.</a:t>
             </a:r>
           </a:p>
         </p:txBody>
@@ -3998,7 +3998,7 @@
                 </a:solidFill>
                 <a:latin typeface="Montserrat"/>
               </a:rPr>
-              <a:t>CORRELACIÓN MORFOLÓGICA</a:t>
+              <a:t>PATRONES MORFOLÓGICOS</a:t>
             </a:r>
           </a:p>
         </p:txBody>
@@ -4040,7 +4040,7 @@
                 </a:solidFill>
                 <a:latin typeface="Montserrat"/>
               </a:rPr>
-              <a:t>Edema intersticial y necrosis no son el mismo patrón</a:t>
+              <a:t>Pancreatitis intersticial y necrotizante: diferencias morfológicas</a:t>
             </a:r>
           </a:p>
         </p:txBody>
@@ -4844,7 +4844,7 @@
                 </a:solidFill>
                 <a:latin typeface="Montserrat"/>
               </a:rPr>
-              <a:t>SELECCIÓN DE ESTUDIO</a:t>
+              <a:t>ESTUDIOS DE IMAGEN</a:t>
             </a:r>
           </a:p>
         </p:txBody>
@@ -4886,7 +4886,7 @@
                 </a:solidFill>
                 <a:latin typeface="Montserrat"/>
               </a:rPr>
-              <a:t>Cada ventana responde una pregunta distinta</a:t>
+              <a:t>Estudios de imagen: qué aporta cada modalidad y cuándo usarla</a:t>
             </a:r>
           </a:p>
         </p:txBody>
@@ -5980,7 +5980,7 @@
                 </a:solidFill>
                 <a:latin typeface="Montserrat"/>
               </a:rPr>
-              <a:t>Índice tomográfico</a:t>
+              <a:t>Índice CTSI de Balthazar</a:t>
             </a:r>
           </a:p>
           <a:p>
@@ -6134,7 +6134,7 @@
                 </a:solidFill>
                 <a:latin typeface="Montserrat"/>
               </a:rPr>
-              <a:t>CTSI = grado A–E (0–4) + necrosis (0; &lt;30%=2; 30–50%=4; &gt;50%=6) = 0–10. No sustituye Atlanta.</a:t>
+              <a:t>CTSI (índice de gravedad por TC): grado A–E (0–4) + necrosis (0; &lt;30%=2; 30–50%=4; &gt;50%=6) = 0–10.</a:t>
             </a:r>
           </a:p>
         </p:txBody>
@@ -6194,7 +6194,7 @@
                 </a:solidFill>
                 <a:latin typeface="Montserrat"/>
               </a:rPr>
-              <a:t>SEMIÓTICA ECOGRÁFICA</a:t>
+              <a:t>ECOGRAFÍA BILIAR</a:t>
             </a:r>
           </a:p>
         </p:txBody>
@@ -6236,7 +6236,7 @@
                 </a:solidFill>
                 <a:latin typeface="Montserrat"/>
               </a:rPr>
-              <a:t>La ecografía distingue cálculos de imitadores</a:t>
+              <a:t>Ecografía biliar: cálculo, barro y pólipo</a:t>
             </a:r>
           </a:p>
         </p:txBody>
@@ -7132,7 +7132,7 @@
                 </a:solidFill>
                 <a:latin typeface="Montserrat"/>
               </a:rPr>
-              <a:t>SOPORTE AGUDO</a:t>
+              <a:t>TRATAMIENTO INICIAL</a:t>
             </a:r>
           </a:p>
         </p:txBody>
@@ -7174,7 +7174,7 @@
                 </a:solidFill>
                 <a:latin typeface="Montserrat"/>
               </a:rPr>
-              <a:t>Tratar la fisiología, no perseguir profilaxis antibiótica</a:t>
+              <a:t>Manejo inicial: hidratación, analgesia, antibióticos y nutrición</a:t>
             </a:r>
           </a:p>
         </p:txBody>
@@ -7756,7 +7756,7 @@
                 </a:solidFill>
                 <a:latin typeface="Montserrat"/>
               </a:rPr>
-              <a:t>La carga alta de Cl⁻ puede causar acidosis hiperclorémica; el efecto del pH sobre zimógenos es experimental, no causalidad clínica probada.</a:t>
+              <a:t>El exceso de cloruro (Cl⁻) puede causar acidosis hiperclorémica; el efecto del pH sobre zimógenos es experimental, no causalidad clínica probada.</a:t>
             </a:r>
           </a:p>
         </p:txBody>
@@ -8371,7 +8371,7 @@
                 </a:solidFill>
                 <a:latin typeface="Montserrat"/>
               </a:rPr>
-              <a:t>Alimentación oral temprana si se tolera. CPRE ante colangitis u obstrucción persistente, no de rutina sin colangitis.</a:t>
+              <a:t>Alimentación oral temprana si se tolera. CPRE (colangiopancreatografía retrógrada endoscópica) ante colangitis u obstrucción biliar persistente.</a:t>
             </a:r>
           </a:p>
         </p:txBody>
@@ -8413,7 +8413,7 @@
                 </a:solidFill>
                 <a:latin typeface="Montserrat"/>
               </a:rPr>
-              <a:t>ACG 2024: hidratación moderada individualizada, analgesia, nutrición temprana y antibióticos solo ante infección.</a:t>
+              <a:t>ACG 2024: hidratación moderada, analgesia y nutrición temprana; antibióticos solo ante infección.</a:t>
             </a:r>
           </a:p>
         </p:txBody>
@@ -8473,7 +8473,7 @@
                 </a:solidFill>
                 <a:latin typeface="Montserrat"/>
               </a:rPr>
-              <a:t>PREVENCIÓN DE NUEVA LESIÓN BILIAR</a:t>
+              <a:t>PREVENCIÓN SECUNDARIA</a:t>
             </a:r>
           </a:p>
         </p:txBody>
@@ -8515,7 +8515,7 @@
                 </a:solidFill>
                 <a:latin typeface="Montserrat"/>
               </a:rPr>
-              <a:t>La colecistectomía oportuna cierra el ciclo causal</a:t>
+              <a:t>Prevención de recurrencia: colecistectomía en pancreatitis biliar</a:t>
             </a:r>
           </a:p>
         </p:txBody>
@@ -8905,7 +8905,7 @@
                 </a:solidFill>
                 <a:latin typeface="Montserrat"/>
               </a:rPr>
-              <a:t>Evento biliar compuesto: cirugía diferida frente a la misma hospitalización (PONCHO; 6 meses)</a:t>
+              <a:t>Desenlace compuesto: reingreso por complicación biliar o muerte; cirugía diferida vs mismo ingreso (6 meses).</a:t>
             </a:r>
           </a:p>
         </p:txBody>
@@ -9382,7 +9382,7 @@
                 </a:solidFill>
                 <a:latin typeface="Montserrat"/>
               </a:rPr>
-              <a:t>No afirmar 30% en 3 meses sin fuente primaria. PONCHO informó 17% vs 5% de eventos compuestos con estrategia diferida vs misma admisión.</a:t>
+              <a:t>No afirmar «30 % en 3 meses» sin fuente. PONCHO: reingreso por complicación biliar o muerte, 17 % diferida vs 5 % en el mismo ingreso a 6 meses.</a:t>
             </a:r>
           </a:p>
         </p:txBody>
@@ -9484,7 +9484,7 @@
                 </a:solidFill>
                 <a:latin typeface="Montserrat"/>
               </a:rPr>
-              <a:t>SALIDA Y REPARACIÓN</a:t>
+              <a:t>SEGUIMIENTO TRAS EL ALTA</a:t>
             </a:r>
           </a:p>
         </p:txBody>
@@ -9526,7 +9526,7 @@
                 </a:solidFill>
                 <a:latin typeface="Montserrat"/>
               </a:rPr>
-              <a:t>El seguimiento busca síntomas persistentes, no una imagen automática</a:t>
+              <a:t>Seguimiento tras el alta: síntomas y colecciones pancreáticas</a:t>
             </a:r>
           </a:p>
         </p:txBody>
@@ -10599,7 +10599,7 @@
                 </a:solidFill>
                 <a:latin typeface="Montserrat"/>
               </a:rPr>
-              <a:t>Pseudoquiste tras pancreatitis intersticial; necrosis encapsulada si hay detritos.</a:t>
+              <a:t>Pseudoquiste: colección encapsulada sin detritos; necrosis encapsulada: contiene detritos.</a:t>
             </a:r>
           </a:p>
         </p:txBody>
@@ -10972,7 +10972,7 @@
                 </a:solidFill>
                 <a:latin typeface="Montserrat"/>
               </a:rPr>
-              <a:t>FUENTES · DIAGNÓSTICO, MECANISMOS Y MANEJO</a:t>
+              <a:t>BIBLIOGRAFÍA CLÍNICA COMPLEMENTARIA</a:t>
             </a:r>
           </a:p>
         </p:txBody>
@@ -11014,7 +11014,7 @@
                 </a:solidFill>
                 <a:latin typeface="Montserrat"/>
               </a:rPr>
-              <a:t>Fuentes que sustentan el diagnóstico y el manejo</a:t>
+              <a:t>Fuentes complementarias: diagnóstico y manejo</a:t>
             </a:r>
           </a:p>
         </p:txBody>
@@ -11880,7 +11880,7 @@
                 </a:solidFill>
                 <a:latin typeface="Montserrat"/>
               </a:rPr>
-              <a:t>FUENTES · ANATOMÍA, MORFOLOGÍA E IMAGEN</a:t>
+              <a:t>BIBLIOGRAFÍA DE ANATOMÍA E IMAGEN</a:t>
             </a:r>
           </a:p>
         </p:txBody>
@@ -11922,7 +11922,7 @@
                 </a:solidFill>
                 <a:latin typeface="Montserrat"/>
               </a:rPr>
-              <a:t>Fuentes que sostienen la anatomía y la morfología</a:t>
+              <a:t>Fuentes complementarias: anatomía, patología e imagen</a:t>
             </a:r>
           </a:p>
         </p:txBody>
@@ -13264,7 +13264,7 @@
                 </a:solidFill>
                 <a:latin typeface="Montserrat"/>
               </a:rPr>
-              <a:t>EQUIPO Y RESPONSABILIDADES</a:t>
+              <a:t>ORGANIZACIÓN DE LA EXPOSICIÓN</a:t>
             </a:r>
           </a:p>
         </p:txBody>
@@ -13306,7 +13306,7 @@
                 </a:solidFill>
                 <a:latin typeface="Montserrat"/>
               </a:rPr>
-              <a:t>Una defensa común, cuatro tramos</a:t>
+              <a:t>Organización del equipo y orden de exposición</a:t>
             </a:r>
           </a:p>
         </p:txBody>
@@ -14470,7 +14470,7 @@
                 </a:solidFill>
                 <a:latin typeface="Montserrat"/>
               </a:rPr>
-              <a:t>INGRESO Y SECUENCIA TEMPORAL</a:t>
+              <a:t>HISTORIA CLÍNICA</a:t>
             </a:r>
           </a:p>
         </p:txBody>
@@ -14512,7 +14512,7 @@
                 </a:solidFill>
                 <a:latin typeface="Montserrat"/>
               </a:rPr>
-              <a:t>El dolor ordena la anamnesis</a:t>
+              <a:t>Historia clínica: cronología del dolor y antecedentes</a:t>
             </a:r>
           </a:p>
         </p:txBody>
@@ -15440,7 +15440,7 @@
                 </a:solidFill>
                 <a:latin typeface="Montserrat"/>
               </a:rPr>
-              <a:t>DECISIÓN EN URGENCIAS</a:t>
+              <a:t>DIAGNÓSTICO Y GRAVEDAD</a:t>
             </a:r>
           </a:p>
         </p:txBody>
@@ -15482,7 +15482,7 @@
                 </a:solidFill>
                 <a:latin typeface="Montserrat"/>
               </a:rPr>
-              <a:t>Dos de tres criterios sostienen el diagnóstico</a:t>
+              <a:t>Diagnóstico de pancreatitis y clasificación de gravedad</a:t>
             </a:r>
           </a:p>
         </p:txBody>
@@ -15832,7 +15832,7 @@
                 </a:solidFill>
                 <a:latin typeface="Montserrat"/>
               </a:rPr>
-              <a:t>≥2/3: dolor típico; lipasa o amilasa ≥3× LSN; imagen característica.</a:t>
+              <a:t>≥2 de 3: dolor típico; lipasa o amilasa ≥3 veces el límite superior normal (LSN); o imagen característica.</a:t>
             </a:r>
           </a:p>
         </p:txBody>
@@ -16468,7 +16468,7 @@
                 </a:solidFill>
                 <a:latin typeface="Montserrat"/>
               </a:rPr>
-              <a:t>OBSTRUCCIÓN Y ETIOLOGÍA BILIAR</a:t>
+              <a:t>MECANISMO BILIAR PROPUESTO</a:t>
             </a:r>
           </a:p>
         </p:txBody>
@@ -16510,7 +16510,7 @@
                 </a:solidFill>
                 <a:latin typeface="Montserrat"/>
               </a:rPr>
-              <a:t>La teoría de Opie vincula obstrucción y lesión acinar</a:t>
+              <a:t>Etiología biliar: mecanismo de obstrucción propuesto por Opie</a:t>
             </a:r>
           </a:p>
         </p:txBody>
@@ -17818,7 +17818,7 @@
                 </a:solidFill>
                 <a:latin typeface="Montserrat"/>
               </a:rPr>
-              <a:t>UMBRAL DE DAÑO CELULAR</a:t>
+              <a:t>LESIÓN DEL ACINO PANCREÁTICO</a:t>
             </a:r>
           </a:p>
         </p:txBody>
@@ -17860,7 +17860,7 @@
                 </a:solidFill>
                 <a:latin typeface="Montserrat"/>
               </a:rPr>
-              <a:t>La tumefacción puede revertir; la ruptura de membrana no</a:t>
+              <a:t>Lesión celular: cambios reversibles e irreversibles</a:t>
             </a:r>
           </a:p>
         </p:txBody>
@@ -18664,7 +18664,7 @@
                 </a:solidFill>
                 <a:latin typeface="Montserrat"/>
               </a:rPr>
-              <a:t>LESIÓN ACINAR Y MEDIADORES</a:t>
+              <a:t>ACTIVACIÓN ENZIMÁTICA E INFLAMACIÓN</a:t>
             </a:r>
           </a:p>
         </p:txBody>
@@ -18706,7 +18706,7 @@
                 </a:solidFill>
                 <a:latin typeface="Montserrat"/>
               </a:rPr>
-              <a:t>La activación precoz amplifica el daño local y sistémico</a:t>
+              <a:t>Activación de enzimas e inflamación pancreática</a:t>
             </a:r>
           </a:p>
         </p:txBody>
@@ -19822,7 +19822,7 @@
                 </a:solidFill>
                 <a:latin typeface="Montserrat"/>
               </a:rPr>
-              <a:t>Histamina actúa rápido; TNF-α, IL-1/IL-6 y eicosanoides amplifican inflamación.</a:t>
+              <a:t>Histamina actúa rápido; TNF-α e interleucinas 1 y 6 (IL-1/IL-6) amplifican la inflamación.</a:t>
             </a:r>
           </a:p>
         </p:txBody>
@@ -20014,7 +20014,7 @@
                 </a:solidFill>
                 <a:latin typeface="Montserrat"/>
               </a:rPr>
-              <a:t>TRADUCCIÓN AL EXAMEN CLÍNICO</a:t>
+              <a:t>MANIFESTACIONES CLÍNICAS</a:t>
             </a:r>
           </a:p>
         </p:txBody>
@@ -20056,7 +20056,7 @@
                 </a:solidFill>
                 <a:latin typeface="Montserrat"/>
               </a:rPr>
-              <a:t>El plexo explica la irradiación; los signos cutáneos no descartan</a:t>
+              <a:t>Manifestaciones clínicas: dolor referido, íleo y equimosis</a:t>
             </a:r>
           </a:p>
         </p:txBody>
@@ -20494,7 +20494,7 @@
                 </a:solidFill>
                 <a:latin typeface="Montserrat"/>
               </a:rPr>
-              <a:t>CELSO / GALENO</a:t>
+              <a:t>SIGNOS DE CELSO Y GALENO</a:t>
             </a:r>
           </a:p>
         </p:txBody>
@@ -20584,7 +20584,7 @@
                 </a:solidFill>
                 <a:latin typeface="Montserrat"/>
               </a:rPr>
-              <a:t>Tétrada: rubor, calor, tumor, dolor. Péntada: añade functio laesa (pérdida de función).</a:t>
+              <a:t>Tétrada de Celso: rubor, calor, tumor, dolor. Galeno añade functio laesa (pérdida de función).</a:t>
             </a:r>
           </a:p>
         </p:txBody>
@@ -21220,7 +21220,7 @@
                 </a:solidFill>
                 <a:latin typeface="Montserrat"/>
               </a:rPr>
-              <a:t>PIEZA MACROSCÓPICA</a:t>
+              <a:t>PATOLOGÍA MACROSCÓPICA</a:t>
             </a:r>
           </a:p>
         </p:txBody>
@@ -21262,7 +21262,7 @@
                 </a:solidFill>
                 <a:latin typeface="Montserrat"/>
               </a:rPr>
-              <a:t>La saponificación dibuja gotas cerosas</a:t>
+              <a:t>Esteatonecrosis pancreática en la pieza macroscópica</a:t>
             </a:r>
           </a:p>
         </p:txBody>
@@ -21566,7 +21566,7 @@
                 </a:solidFill>
                 <a:latin typeface="Montserrat"/>
               </a:rPr>
-              <a:t>La lipasa libera ácidos grasos; con Ca²⁺ forman jabones insolubles visibles como focos blancos cerosos.</a:t>
+              <a:t>La lipasa libera ácidos grasos que se unen al calcio (Ca²⁺) y forman jabones insolubles blancos.</a:t>
             </a:r>
           </a:p>
         </p:txBody>

--- a/Caso_09_UCP.pptx
+++ b/Caso_09_UCP.pptx
@@ -3630,7 +3630,7 @@
                 </a:solidFill>
                 <a:latin typeface="Montserrat"/>
               </a:rPr>
-              <a:t>Cada modalidad responde una pregunta clínica diferente</a:t>
+              <a:t>Elegir el estudio de imagen según la pregunta clínica</a:t>
             </a:r>
           </a:p>
         </p:txBody>
@@ -3815,8 +3815,140 @@
         </p:nvSpPr>
         <p:spPr>
           <a:xfrm>
-            <a:off x="594360" y="1508760"/>
-            <a:ext cx="2503170" cy="3291840"/>
+            <a:off x="594360" y="1417319"/>
+            <a:ext cx="822960" cy="1021842"/>
+          </a:xfrm>
+          <a:prstGeom prst="roundRect">
+            <a:avLst>
+              <a:gd name="adj" fmla="val 4000"/>
+            </a:avLst>
+          </a:prstGeom>
+          <a:solidFill>
+            <a:srgbClr val="3854CC"/>
+          </a:solidFill>
+          <a:ln>
+            <a:noFill/>
+          </a:ln>
+          <a:effectLst/>
+        </p:spPr>
+        <p:style>
+          <a:lnRef idx="1">
+            <a:schemeClr val="accent1"/>
+          </a:lnRef>
+          <a:fillRef idx="3">
+            <a:schemeClr val="accent1"/>
+          </a:fillRef>
+          <a:effectRef idx="2">
+            <a:schemeClr val="accent1"/>
+          </a:effectRef>
+          <a:fontRef idx="minor">
+            <a:schemeClr val="lt1"/>
+          </a:fontRef>
+        </p:style>
+        <p:txBody>
+          <a:bodyPr rtlCol="0" anchor="ctr"/>
+          <a:lstStyle/>
+          <a:p>
+            <a:pPr algn="ctr"/>
+          </a:p>
+        </p:txBody>
+      </p:sp>
+      <p:sp>
+        <p:nvSpPr>
+          <p:cNvPr id="9" name="TextBox 8"/>
+          <p:cNvSpPr txBox="1"/>
+          <p:nvPr/>
+        </p:nvSpPr>
+        <p:spPr>
+          <a:xfrm>
+            <a:off x="594360" y="1417319"/>
+            <a:ext cx="822960" cy="1021842"/>
+          </a:xfrm>
+          <a:prstGeom prst="rect">
+            <a:avLst/>
+          </a:prstGeom>
+          <a:noFill/>
+        </p:spPr>
+        <p:txBody>
+          <a:bodyPr wrap="square" anchor="ctr" lIns="0" rIns="0" tIns="0" bIns="0">
+            <a:spAutoFit/>
+          </a:bodyPr>
+          <a:lstStyle/>
+          <a:p>
+            <a:pPr algn="ctr">
+              <a:lnSpc>
+                <a:spcPct val="108000"/>
+              </a:lnSpc>
+              <a:spcAft>
+                <a:spcPts val="300"/>
+              </a:spcAft>
+            </a:pPr>
+            <a:r>
+              <a:rPr sz="1600" b="1" i="0">
+                <a:solidFill>
+                  <a:srgbClr val="FFFFFF"/>
+                </a:solidFill>
+                <a:latin typeface="Montserrat"/>
+              </a:rPr>
+              <a:t>01</a:t>
+            </a:r>
+          </a:p>
+        </p:txBody>
+      </p:sp>
+      <p:sp>
+        <p:nvSpPr>
+          <p:cNvPr id="10" name="Rectangle 9"/>
+          <p:cNvSpPr/>
+          <p:nvPr/>
+        </p:nvSpPr>
+        <p:spPr>
+          <a:xfrm>
+            <a:off x="996696" y="2439161"/>
+            <a:ext cx="18288" cy="146304"/>
+          </a:xfrm>
+          <a:prstGeom prst="rect">
+            <a:avLst/>
+          </a:prstGeom>
+          <a:solidFill>
+            <a:srgbClr val="D9DDF2"/>
+          </a:solidFill>
+          <a:ln>
+            <a:noFill/>
+          </a:ln>
+          <a:effectLst/>
+        </p:spPr>
+        <p:style>
+          <a:lnRef idx="1">
+            <a:schemeClr val="accent1"/>
+          </a:lnRef>
+          <a:fillRef idx="3">
+            <a:schemeClr val="accent1"/>
+          </a:fillRef>
+          <a:effectRef idx="2">
+            <a:schemeClr val="accent1"/>
+          </a:effectRef>
+          <a:fontRef idx="minor">
+            <a:schemeClr val="lt1"/>
+          </a:fontRef>
+        </p:style>
+        <p:txBody>
+          <a:bodyPr rtlCol="0" anchor="ctr"/>
+          <a:lstStyle/>
+          <a:p>
+            <a:pPr algn="ctr"/>
+          </a:p>
+        </p:txBody>
+      </p:sp>
+      <p:sp>
+        <p:nvSpPr>
+          <p:cNvPr id="11" name="Rounded Rectangle 10"/>
+          <p:cNvSpPr/>
+          <p:nvPr/>
+        </p:nvSpPr>
+        <p:spPr>
+          <a:xfrm>
+            <a:off x="1554480" y="1417319"/>
+            <a:ext cx="10012680" cy="1021842"/>
           </a:xfrm>
           <a:prstGeom prst="roundRect">
             <a:avLst>
@@ -3857,22 +3989,89 @@
       </p:sp>
       <p:sp>
         <p:nvSpPr>
-          <p:cNvPr id="9" name="Rounded Rectangle 8"/>
+          <p:cNvPr id="12" name="TextBox 11"/>
+          <p:cNvSpPr txBox="1"/>
+          <p:nvPr/>
+        </p:nvSpPr>
+        <p:spPr>
+          <a:xfrm>
+            <a:off x="1783080" y="1490471"/>
+            <a:ext cx="9509760" cy="875538"/>
+          </a:xfrm>
+          <a:prstGeom prst="rect">
+            <a:avLst/>
+          </a:prstGeom>
+          <a:noFill/>
+        </p:spPr>
+        <p:txBody>
+          <a:bodyPr wrap="square" anchor="ctr" lIns="0" rIns="0" tIns="0" bIns="0">
+            <a:spAutoFit/>
+          </a:bodyPr>
+          <a:lstStyle/>
+          <a:p>
+            <a:pPr algn="l">
+              <a:lnSpc>
+                <a:spcPct val="108000"/>
+              </a:lnSpc>
+              <a:spcBef>
+                <a:spcPts val="0"/>
+              </a:spcBef>
+              <a:spcAft>
+                <a:spcPts val="200"/>
+              </a:spcAft>
+            </a:pPr>
+            <a:r>
+              <a:rPr sz="1250" b="1" i="0">
+                <a:solidFill>
+                  <a:srgbClr val="3854CC"/>
+                </a:solidFill>
+                <a:latin typeface="Montserrat"/>
+              </a:rPr>
+              <a:t>Radiografía simple</a:t>
+            </a:r>
+          </a:p>
+          <a:p>
+            <a:pPr algn="l">
+              <a:lnSpc>
+                <a:spcPct val="105000"/>
+              </a:lnSpc>
+              <a:spcBef>
+                <a:spcPts val="0"/>
+              </a:spcBef>
+              <a:spcAft>
+                <a:spcPts val="300"/>
+              </a:spcAft>
+            </a:pPr>
+            <a:r>
+              <a:rPr sz="1080" b="0" i="0">
+                <a:solidFill>
+                  <a:srgbClr val="2B2C4A"/>
+                </a:solidFill>
+                <a:latin typeface="Montserrat"/>
+              </a:rPr>
+              <a:t>Ante sospecha de aire libre; en el caso no se observó, aunque se describió edema de tejidos blandos.</a:t>
+            </a:r>
+          </a:p>
+        </p:txBody>
+      </p:sp>
+      <p:sp>
+        <p:nvSpPr>
+          <p:cNvPr id="13" name="Rounded Rectangle 12"/>
           <p:cNvSpPr/>
           <p:nvPr/>
         </p:nvSpPr>
         <p:spPr>
           <a:xfrm>
-            <a:off x="758952" y="1673351"/>
-            <a:ext cx="731520" cy="256032"/>
+            <a:off x="594360" y="2585465"/>
+            <a:ext cx="822960" cy="1021842"/>
           </a:xfrm>
           <a:prstGeom prst="roundRect">
             <a:avLst>
-              <a:gd name="adj" fmla="val 8000"/>
+              <a:gd name="adj" fmla="val 4000"/>
             </a:avLst>
           </a:prstGeom>
           <a:solidFill>
-            <a:srgbClr val="EEF0FF"/>
+            <a:srgbClr val="3854CC"/>
           </a:solidFill>
           <a:ln>
             <a:noFill/>
@@ -3903,14 +4102,14 @@
       </p:sp>
       <p:sp>
         <p:nvSpPr>
-          <p:cNvPr id="10" name="TextBox 9"/>
+          <p:cNvPr id="14" name="TextBox 13"/>
           <p:cNvSpPr txBox="1"/>
           <p:nvPr/>
         </p:nvSpPr>
         <p:spPr>
           <a:xfrm>
-            <a:off x="758952" y="1673351"/>
-            <a:ext cx="731520" cy="256032"/>
+            <a:off x="594360" y="2585465"/>
+            <a:ext cx="822960" cy="1021842"/>
           </a:xfrm>
           <a:prstGeom prst="rect">
             <a:avLst/>
@@ -3918,7 +4117,7 @@
           <a:noFill/>
         </p:spPr>
         <p:txBody>
-          <a:bodyPr wrap="square" anchor="t" lIns="0" rIns="0" tIns="0" bIns="0">
+          <a:bodyPr wrap="square" anchor="ctr" lIns="0" rIns="0" tIns="0" bIns="0">
             <a:spAutoFit/>
           </a:bodyPr>
           <a:lstStyle/>
@@ -3932,100 +4131,33 @@
               </a:spcAft>
             </a:pPr>
             <a:r>
-              <a:rPr sz="900" b="1" i="0">
-                <a:solidFill>
-                  <a:srgbClr val="3854CC"/>
-                </a:solidFill>
-                <a:latin typeface="Montserrat"/>
-              </a:rPr>
-              <a:t>AIRE LIBRE</a:t>
-            </a:r>
-          </a:p>
-        </p:txBody>
-      </p:sp>
-      <p:sp>
-        <p:nvSpPr>
-          <p:cNvPr id="11" name="TextBox 10"/>
-          <p:cNvSpPr txBox="1"/>
-          <p:nvPr/>
-        </p:nvSpPr>
-        <p:spPr>
-          <a:xfrm>
-            <a:off x="777240" y="2039112"/>
-            <a:ext cx="2137410" cy="2606040"/>
-          </a:xfrm>
-          <a:prstGeom prst="rect">
-            <a:avLst/>
-          </a:prstGeom>
-          <a:noFill/>
-        </p:spPr>
-        <p:txBody>
-          <a:bodyPr wrap="square" anchor="t" lIns="0" rIns="0" tIns="0" bIns="0">
-            <a:spAutoFit/>
-          </a:bodyPr>
-          <a:lstStyle/>
-          <a:p>
-            <a:pPr algn="l">
-              <a:lnSpc>
-                <a:spcPct val="108000"/>
-              </a:lnSpc>
-              <a:spcBef>
-                <a:spcPts val="0"/>
-              </a:spcBef>
-              <a:spcAft>
-                <a:spcPts val="600"/>
-              </a:spcAft>
-            </a:pPr>
-            <a:r>
-              <a:rPr sz="1350" b="1" i="0">
-                <a:solidFill>
-                  <a:srgbClr val="3854CC"/>
-                </a:solidFill>
-                <a:latin typeface="Montserrat"/>
-              </a:rPr>
-              <a:t>Radiografía simple</a:t>
-            </a:r>
-          </a:p>
-          <a:p>
-            <a:pPr algn="l">
-              <a:lnSpc>
-                <a:spcPct val="110000"/>
-              </a:lnSpc>
-              <a:spcBef>
-                <a:spcPts val="0"/>
-              </a:spcBef>
-              <a:spcAft>
-                <a:spcPts val="300"/>
-              </a:spcAft>
-            </a:pPr>
-            <a:r>
-              <a:rPr sz="1100" b="0" i="0">
-                <a:solidFill>
-                  <a:srgbClr val="2B2C4A"/>
-                </a:solidFill>
-                <a:latin typeface="Montserrat"/>
-              </a:rPr>
-              <a:t>Caso 09: no se observó aire libre; se describió edema de tejidos blandos.</a:t>
-            </a:r>
-          </a:p>
-        </p:txBody>
-      </p:sp>
-      <p:sp>
-        <p:nvSpPr>
-          <p:cNvPr id="12" name="Right Arrow 11"/>
+              <a:rPr sz="1600" b="1" i="0">
+                <a:solidFill>
+                  <a:srgbClr val="FFFFFF"/>
+                </a:solidFill>
+                <a:latin typeface="Montserrat"/>
+              </a:rPr>
+              <a:t>02</a:t>
+            </a:r>
+          </a:p>
+        </p:txBody>
+      </p:sp>
+      <p:sp>
+        <p:nvSpPr>
+          <p:cNvPr id="15" name="Rectangle 14"/>
           <p:cNvSpPr/>
           <p:nvPr/>
         </p:nvSpPr>
         <p:spPr>
           <a:xfrm>
-            <a:off x="3143249" y="3044952"/>
-            <a:ext cx="228599" cy="219456"/>
-          </a:xfrm>
-          <a:prstGeom prst="rightArrow">
+            <a:off x="996696" y="3607308"/>
+            <a:ext cx="18288" cy="146304"/>
+          </a:xfrm>
+          <a:prstGeom prst="rect">
             <a:avLst/>
           </a:prstGeom>
           <a:solidFill>
-            <a:srgbClr val="D92A2B"/>
+            <a:srgbClr val="D9DDF2"/>
           </a:solidFill>
           <a:ln>
             <a:noFill/>
@@ -4056,14 +4188,14 @@
       </p:sp>
       <p:sp>
         <p:nvSpPr>
-          <p:cNvPr id="13" name="Rounded Rectangle 12"/>
+          <p:cNvPr id="16" name="Rounded Rectangle 15"/>
           <p:cNvSpPr/>
           <p:nvPr/>
         </p:nvSpPr>
         <p:spPr>
           <a:xfrm>
-            <a:off x="3417570" y="1508760"/>
-            <a:ext cx="2503170" cy="3291840"/>
+            <a:off x="1554480" y="2585465"/>
+            <a:ext cx="10012680" cy="1021842"/>
           </a:xfrm>
           <a:prstGeom prst="roundRect">
             <a:avLst>
@@ -4104,60 +4236,14 @@
       </p:sp>
       <p:sp>
         <p:nvSpPr>
-          <p:cNvPr id="14" name="Rounded Rectangle 13"/>
-          <p:cNvSpPr/>
-          <p:nvPr/>
-        </p:nvSpPr>
-        <p:spPr>
-          <a:xfrm>
-            <a:off x="3582162" y="1673351"/>
-            <a:ext cx="731520" cy="256032"/>
-          </a:xfrm>
-          <a:prstGeom prst="roundRect">
-            <a:avLst>
-              <a:gd name="adj" fmla="val 8000"/>
-            </a:avLst>
-          </a:prstGeom>
-          <a:solidFill>
-            <a:srgbClr val="EEF0FF"/>
-          </a:solidFill>
-          <a:ln>
-            <a:noFill/>
-          </a:ln>
-          <a:effectLst/>
-        </p:spPr>
-        <p:style>
-          <a:lnRef idx="1">
-            <a:schemeClr val="accent1"/>
-          </a:lnRef>
-          <a:fillRef idx="3">
-            <a:schemeClr val="accent1"/>
-          </a:fillRef>
-          <a:effectRef idx="2">
-            <a:schemeClr val="accent1"/>
-          </a:effectRef>
-          <a:fontRef idx="minor">
-            <a:schemeClr val="lt1"/>
-          </a:fontRef>
-        </p:style>
-        <p:txBody>
-          <a:bodyPr rtlCol="0" anchor="ctr"/>
-          <a:lstStyle/>
-          <a:p>
-            <a:pPr algn="ctr"/>
-          </a:p>
-        </p:txBody>
-      </p:sp>
-      <p:sp>
-        <p:nvSpPr>
-          <p:cNvPr id="15" name="TextBox 14"/>
+          <p:cNvPr id="17" name="TextBox 16"/>
           <p:cNvSpPr txBox="1"/>
           <p:nvPr/>
         </p:nvSpPr>
         <p:spPr>
           <a:xfrm>
-            <a:off x="3582162" y="1673351"/>
-            <a:ext cx="731520" cy="256032"/>
+            <a:off x="1783080" y="2658618"/>
+            <a:ext cx="9509760" cy="875538"/>
           </a:xfrm>
           <a:prstGeom prst="rect">
             <a:avLst/>
@@ -4165,49 +4251,7 @@
           <a:noFill/>
         </p:spPr>
         <p:txBody>
-          <a:bodyPr wrap="square" anchor="t" lIns="0" rIns="0" tIns="0" bIns="0">
-            <a:spAutoFit/>
-          </a:bodyPr>
-          <a:lstStyle/>
-          <a:p>
-            <a:pPr algn="ctr">
-              <a:lnSpc>
-                <a:spcPct val="108000"/>
-              </a:lnSpc>
-              <a:spcAft>
-                <a:spcPts val="300"/>
-              </a:spcAft>
-            </a:pPr>
-            <a:r>
-              <a:rPr sz="900" b="1" i="0">
-                <a:solidFill>
-                  <a:srgbClr val="3854CC"/>
-                </a:solidFill>
-                <a:latin typeface="Montserrat"/>
-              </a:rPr>
-              <a:t>LITIASIS</a:t>
-            </a:r>
-          </a:p>
-        </p:txBody>
-      </p:sp>
-      <p:sp>
-        <p:nvSpPr>
-          <p:cNvPr id="16" name="TextBox 15"/>
-          <p:cNvSpPr txBox="1"/>
-          <p:nvPr/>
-        </p:nvSpPr>
-        <p:spPr>
-          <a:xfrm>
-            <a:off x="3600450" y="2039112"/>
-            <a:ext cx="2137410" cy="2606040"/>
-          </a:xfrm>
-          <a:prstGeom prst="rect">
-            <a:avLst/>
-          </a:prstGeom>
-          <a:noFill/>
-        </p:spPr>
-        <p:txBody>
-          <a:bodyPr wrap="square" anchor="t" lIns="0" rIns="0" tIns="0" bIns="0">
+          <a:bodyPr wrap="square" anchor="ctr" lIns="0" rIns="0" tIns="0" bIns="0">
             <a:spAutoFit/>
           </a:bodyPr>
           <a:lstStyle/>
@@ -4220,23 +4264,23 @@
                 <a:spcPts val="0"/>
               </a:spcBef>
               <a:spcAft>
-                <a:spcPts val="600"/>
-              </a:spcAft>
-            </a:pPr>
-            <a:r>
-              <a:rPr sz="1350" b="1" i="0">
+                <a:spcPts val="200"/>
+              </a:spcAft>
+            </a:pPr>
+            <a:r>
+              <a:rPr sz="1250" b="1" i="0">
                 <a:solidFill>
                   <a:srgbClr val="3854CC"/>
                 </a:solidFill>
                 <a:latin typeface="Montserrat"/>
               </a:rPr>
-              <a:t>Ecografía</a:t>
+              <a:t>Ecografía biliar</a:t>
             </a:r>
           </a:p>
           <a:p>
             <a:pPr algn="l">
               <a:lnSpc>
-                <a:spcPct val="110000"/>
+                <a:spcPct val="105000"/>
               </a:lnSpc>
               <a:spcBef>
                 <a:spcPts val="0"/>
@@ -4246,30 +4290,32 @@
               </a:spcAft>
             </a:pPr>
             <a:r>
-              <a:rPr sz="1100" b="0" i="0">
+              <a:rPr sz="1080" b="0" i="0">
                 <a:solidFill>
                   <a:srgbClr val="2B2C4A"/>
                 </a:solidFill>
                 <a:latin typeface="Montserrat"/>
               </a:rPr>
-              <a:t>Busca cálculos y dilatación biliar; no se informa ecografía en el caso.</a:t>
-            </a:r>
-          </a:p>
-        </p:txBody>
-      </p:sp>
-      <p:sp>
-        <p:nvSpPr>
-          <p:cNvPr id="17" name="Right Arrow 16"/>
+              <a:t>Buscar cálculos y dilatación de la vía biliar; no consta resultado en la transcripción.</a:t>
+            </a:r>
+          </a:p>
+        </p:txBody>
+      </p:sp>
+      <p:sp>
+        <p:nvSpPr>
+          <p:cNvPr id="18" name="Rounded Rectangle 17"/>
           <p:cNvSpPr/>
           <p:nvPr/>
         </p:nvSpPr>
         <p:spPr>
           <a:xfrm>
-            <a:off x="5966459" y="3044952"/>
-            <a:ext cx="228599" cy="219456"/>
-          </a:xfrm>
-          <a:prstGeom prst="rightArrow">
-            <a:avLst/>
+            <a:off x="594360" y="3753611"/>
+            <a:ext cx="822960" cy="1021842"/>
+          </a:xfrm>
+          <a:prstGeom prst="roundRect">
+            <a:avLst>
+              <a:gd name="adj" fmla="val 4000"/>
+            </a:avLst>
           </a:prstGeom>
           <a:solidFill>
             <a:srgbClr val="D92A2B"/>
@@ -4303,14 +4349,100 @@
       </p:sp>
       <p:sp>
         <p:nvSpPr>
-          <p:cNvPr id="18" name="Rounded Rectangle 17"/>
+          <p:cNvPr id="19" name="TextBox 18"/>
+          <p:cNvSpPr txBox="1"/>
+          <p:nvPr/>
+        </p:nvSpPr>
+        <p:spPr>
+          <a:xfrm>
+            <a:off x="594360" y="3753611"/>
+            <a:ext cx="822960" cy="1021842"/>
+          </a:xfrm>
+          <a:prstGeom prst="rect">
+            <a:avLst/>
+          </a:prstGeom>
+          <a:noFill/>
+        </p:spPr>
+        <p:txBody>
+          <a:bodyPr wrap="square" anchor="ctr" lIns="0" rIns="0" tIns="0" bIns="0">
+            <a:spAutoFit/>
+          </a:bodyPr>
+          <a:lstStyle/>
+          <a:p>
+            <a:pPr algn="ctr">
+              <a:lnSpc>
+                <a:spcPct val="108000"/>
+              </a:lnSpc>
+              <a:spcAft>
+                <a:spcPts val="300"/>
+              </a:spcAft>
+            </a:pPr>
+            <a:r>
+              <a:rPr sz="1600" b="1" i="0">
+                <a:solidFill>
+                  <a:srgbClr val="FFFFFF"/>
+                </a:solidFill>
+                <a:latin typeface="Montserrat"/>
+              </a:rPr>
+              <a:t>03</a:t>
+            </a:r>
+          </a:p>
+        </p:txBody>
+      </p:sp>
+      <p:sp>
+        <p:nvSpPr>
+          <p:cNvPr id="20" name="Rectangle 19"/>
           <p:cNvSpPr/>
           <p:nvPr/>
         </p:nvSpPr>
         <p:spPr>
           <a:xfrm>
-            <a:off x="6240780" y="1508760"/>
-            <a:ext cx="2503170" cy="3291840"/>
+            <a:off x="996696" y="4775454"/>
+            <a:ext cx="18288" cy="146304"/>
+          </a:xfrm>
+          <a:prstGeom prst="rect">
+            <a:avLst/>
+          </a:prstGeom>
+          <a:solidFill>
+            <a:srgbClr val="D9DDF2"/>
+          </a:solidFill>
+          <a:ln>
+            <a:noFill/>
+          </a:ln>
+          <a:effectLst/>
+        </p:spPr>
+        <p:style>
+          <a:lnRef idx="1">
+            <a:schemeClr val="accent1"/>
+          </a:lnRef>
+          <a:fillRef idx="3">
+            <a:schemeClr val="accent1"/>
+          </a:fillRef>
+          <a:effectRef idx="2">
+            <a:schemeClr val="accent1"/>
+          </a:effectRef>
+          <a:fontRef idx="minor">
+            <a:schemeClr val="lt1"/>
+          </a:fontRef>
+        </p:style>
+        <p:txBody>
+          <a:bodyPr rtlCol="0" anchor="ctr"/>
+          <a:lstStyle/>
+          <a:p>
+            <a:pPr algn="ctr"/>
+          </a:p>
+        </p:txBody>
+      </p:sp>
+      <p:sp>
+        <p:nvSpPr>
+          <p:cNvPr id="21" name="Rounded Rectangle 20"/>
+          <p:cNvSpPr/>
+          <p:nvPr/>
+        </p:nvSpPr>
+        <p:spPr>
+          <a:xfrm>
+            <a:off x="1554480" y="3753611"/>
+            <a:ext cx="10012680" cy="1021842"/>
           </a:xfrm>
           <a:prstGeom prst="roundRect">
             <a:avLst>
@@ -4318,7 +4450,7 @@
             </a:avLst>
           </a:prstGeom>
           <a:solidFill>
-            <a:srgbClr val="3854CC"/>
+            <a:srgbClr val="FFFFFF"/>
           </a:solidFill>
           <a:ln w="12700">
             <a:solidFill>
@@ -4351,22 +4483,89 @@
       </p:sp>
       <p:sp>
         <p:nvSpPr>
-          <p:cNvPr id="19" name="Rounded Rectangle 18"/>
+          <p:cNvPr id="22" name="TextBox 21"/>
+          <p:cNvSpPr txBox="1"/>
+          <p:nvPr/>
+        </p:nvSpPr>
+        <p:spPr>
+          <a:xfrm>
+            <a:off x="1783080" y="3826763"/>
+            <a:ext cx="9509760" cy="875538"/>
+          </a:xfrm>
+          <a:prstGeom prst="rect">
+            <a:avLst/>
+          </a:prstGeom>
+          <a:noFill/>
+        </p:spPr>
+        <p:txBody>
+          <a:bodyPr wrap="square" anchor="ctr" lIns="0" rIns="0" tIns="0" bIns="0">
+            <a:spAutoFit/>
+          </a:bodyPr>
+          <a:lstStyle/>
+          <a:p>
+            <a:pPr algn="l">
+              <a:lnSpc>
+                <a:spcPct val="108000"/>
+              </a:lnSpc>
+              <a:spcBef>
+                <a:spcPts val="0"/>
+              </a:spcBef>
+              <a:spcAft>
+                <a:spcPts val="200"/>
+              </a:spcAft>
+            </a:pPr>
+            <a:r>
+              <a:rPr sz="1250" b="1" i="0">
+                <a:solidFill>
+                  <a:srgbClr val="3854CC"/>
+                </a:solidFill>
+                <a:latin typeface="Montserrat"/>
+              </a:rPr>
+              <a:t>TC con contraste</a:t>
+            </a:r>
+          </a:p>
+          <a:p>
+            <a:pPr algn="l">
+              <a:lnSpc>
+                <a:spcPct val="105000"/>
+              </a:lnSpc>
+              <a:spcBef>
+                <a:spcPts val="0"/>
+              </a:spcBef>
+              <a:spcAft>
+                <a:spcPts val="300"/>
+              </a:spcAft>
+            </a:pPr>
+            <a:r>
+              <a:rPr sz="1080" b="0" i="0">
+                <a:solidFill>
+                  <a:srgbClr val="2B2C4A"/>
+                </a:solidFill>
+                <a:latin typeface="Montserrat"/>
+              </a:rPr>
+              <a:t>Valorar parénquima y complicaciones ante incertidumbre o deterioro; no es rutinaria al ingreso. Falta el informe del caso.</a:t>
+            </a:r>
+          </a:p>
+        </p:txBody>
+      </p:sp>
+      <p:sp>
+        <p:nvSpPr>
+          <p:cNvPr id="23" name="Rounded Rectangle 22"/>
           <p:cNvSpPr/>
           <p:nvPr/>
         </p:nvSpPr>
         <p:spPr>
           <a:xfrm>
-            <a:off x="6405372" y="1673351"/>
-            <a:ext cx="731520" cy="256032"/>
+            <a:off x="594360" y="4921758"/>
+            <a:ext cx="822960" cy="1021842"/>
           </a:xfrm>
           <a:prstGeom prst="roundRect">
             <a:avLst>
-              <a:gd name="adj" fmla="val 8000"/>
+              <a:gd name="adj" fmla="val 4000"/>
             </a:avLst>
           </a:prstGeom>
           <a:solidFill>
-            <a:srgbClr val="D92A2B"/>
+            <a:srgbClr val="3854CC"/>
           </a:solidFill>
           <a:ln>
             <a:noFill/>
@@ -4397,14 +4596,14 @@
       </p:sp>
       <p:sp>
         <p:nvSpPr>
-          <p:cNvPr id="20" name="TextBox 19"/>
+          <p:cNvPr id="24" name="TextBox 23"/>
           <p:cNvSpPr txBox="1"/>
           <p:nvPr/>
         </p:nvSpPr>
         <p:spPr>
           <a:xfrm>
-            <a:off x="6405372" y="1673351"/>
-            <a:ext cx="731520" cy="256032"/>
+            <a:off x="594360" y="4921758"/>
+            <a:ext cx="822960" cy="1021842"/>
           </a:xfrm>
           <a:prstGeom prst="rect">
             <a:avLst/>
@@ -4412,7 +4611,7 @@
           <a:noFill/>
         </p:spPr>
         <p:txBody>
-          <a:bodyPr wrap="square" anchor="t" lIns="0" rIns="0" tIns="0" bIns="0">
+          <a:bodyPr wrap="square" anchor="ctr" lIns="0" rIns="0" tIns="0" bIns="0">
             <a:spAutoFit/>
           </a:bodyPr>
           <a:lstStyle/>
@@ -4426,138 +4625,27 @@
               </a:spcAft>
             </a:pPr>
             <a:r>
-              <a:rPr sz="900" b="1" i="0">
+              <a:rPr sz="1600" b="1" i="0">
                 <a:solidFill>
                   <a:srgbClr val="FFFFFF"/>
                 </a:solidFill>
                 <a:latin typeface="Montserrat"/>
               </a:rPr>
-              <a:t>PÁNCREAS</a:t>
-            </a:r>
-          </a:p>
-        </p:txBody>
-      </p:sp>
-      <p:sp>
-        <p:nvSpPr>
-          <p:cNvPr id="21" name="TextBox 20"/>
-          <p:cNvSpPr txBox="1"/>
-          <p:nvPr/>
-        </p:nvSpPr>
-        <p:spPr>
-          <a:xfrm>
-            <a:off x="6423660" y="2039112"/>
-            <a:ext cx="2137410" cy="2606040"/>
-          </a:xfrm>
-          <a:prstGeom prst="rect">
-            <a:avLst/>
-          </a:prstGeom>
-          <a:noFill/>
-        </p:spPr>
-        <p:txBody>
-          <a:bodyPr wrap="square" anchor="t" lIns="0" rIns="0" tIns="0" bIns="0">
-            <a:spAutoFit/>
-          </a:bodyPr>
-          <a:lstStyle/>
-          <a:p>
-            <a:pPr algn="l">
-              <a:lnSpc>
-                <a:spcPct val="108000"/>
-              </a:lnSpc>
-              <a:spcBef>
-                <a:spcPts val="0"/>
-              </a:spcBef>
-              <a:spcAft>
-                <a:spcPts val="600"/>
-              </a:spcAft>
-            </a:pPr>
-            <a:r>
-              <a:rPr sz="1350" b="1" i="0">
-                <a:solidFill>
-                  <a:srgbClr val="FFFFFF"/>
-                </a:solidFill>
-                <a:latin typeface="Montserrat"/>
-              </a:rPr>
-              <a:t>TC con contraste</a:t>
-            </a:r>
-          </a:p>
-          <a:p>
-            <a:pPr algn="l">
-              <a:lnSpc>
-                <a:spcPct val="110000"/>
-              </a:lnSpc>
-              <a:spcBef>
-                <a:spcPts val="0"/>
-              </a:spcBef>
-              <a:spcAft>
-                <a:spcPts val="300"/>
-              </a:spcAft>
-            </a:pPr>
-            <a:r>
-              <a:rPr sz="1100" b="0" i="0">
-                <a:solidFill>
-                  <a:srgbClr val="E0E4FF"/>
-                </a:solidFill>
-                <a:latin typeface="Montserrat"/>
-              </a:rPr>
-              <a:t>Caso 09: menor atenuación y densidad líquida; falta el informe radiológico completo.</a:t>
-            </a:r>
-          </a:p>
-        </p:txBody>
-      </p:sp>
-      <p:sp>
-        <p:nvSpPr>
-          <p:cNvPr id="22" name="Right Arrow 21"/>
+              <a:t>04</a:t>
+            </a:r>
+          </a:p>
+        </p:txBody>
+      </p:sp>
+      <p:sp>
+        <p:nvSpPr>
+          <p:cNvPr id="25" name="Rounded Rectangle 24"/>
           <p:cNvSpPr/>
           <p:nvPr/>
         </p:nvSpPr>
         <p:spPr>
           <a:xfrm>
-            <a:off x="8789670" y="3044952"/>
-            <a:ext cx="228599" cy="219456"/>
-          </a:xfrm>
-          <a:prstGeom prst="rightArrow">
-            <a:avLst/>
-          </a:prstGeom>
-          <a:solidFill>
-            <a:srgbClr val="D92A2B"/>
-          </a:solidFill>
-          <a:ln>
-            <a:noFill/>
-          </a:ln>
-          <a:effectLst/>
-        </p:spPr>
-        <p:style>
-          <a:lnRef idx="1">
-            <a:schemeClr val="accent1"/>
-          </a:lnRef>
-          <a:fillRef idx="3">
-            <a:schemeClr val="accent1"/>
-          </a:fillRef>
-          <a:effectRef idx="2">
-            <a:schemeClr val="accent1"/>
-          </a:effectRef>
-          <a:fontRef idx="minor">
-            <a:schemeClr val="lt1"/>
-          </a:fontRef>
-        </p:style>
-        <p:txBody>
-          <a:bodyPr rtlCol="0" anchor="ctr"/>
-          <a:lstStyle/>
-          <a:p>
-            <a:pPr algn="ctr"/>
-          </a:p>
-        </p:txBody>
-      </p:sp>
-      <p:sp>
-        <p:nvSpPr>
-          <p:cNvPr id="23" name="Rounded Rectangle 22"/>
-          <p:cNvSpPr/>
-          <p:nvPr/>
-        </p:nvSpPr>
-        <p:spPr>
-          <a:xfrm>
-            <a:off x="9063990" y="1508760"/>
-            <a:ext cx="2503170" cy="3291840"/>
+            <a:off x="1554480" y="4921758"/>
+            <a:ext cx="10012680" cy="1021842"/>
           </a:xfrm>
           <a:prstGeom prst="roundRect">
             <a:avLst>
@@ -4598,60 +4686,81 @@
       </p:sp>
       <p:sp>
         <p:nvSpPr>
-          <p:cNvPr id="24" name="Rounded Rectangle 23"/>
-          <p:cNvSpPr/>
-          <p:nvPr/>
-        </p:nvSpPr>
-        <p:spPr>
-          <a:xfrm>
-            <a:off x="9228582" y="1673351"/>
-            <a:ext cx="731520" cy="256032"/>
-          </a:xfrm>
-          <a:prstGeom prst="roundRect">
-            <a:avLst>
-              <a:gd name="adj" fmla="val 8000"/>
-            </a:avLst>
-          </a:prstGeom>
-          <a:solidFill>
-            <a:srgbClr val="EEF0FF"/>
-          </a:solidFill>
-          <a:ln>
-            <a:noFill/>
-          </a:ln>
-          <a:effectLst/>
-        </p:spPr>
-        <p:style>
-          <a:lnRef idx="1">
-            <a:schemeClr val="accent1"/>
-          </a:lnRef>
-          <a:fillRef idx="3">
-            <a:schemeClr val="accent1"/>
-          </a:fillRef>
-          <a:effectRef idx="2">
-            <a:schemeClr val="accent1"/>
-          </a:effectRef>
-          <a:fontRef idx="minor">
-            <a:schemeClr val="lt1"/>
-          </a:fontRef>
-        </p:style>
-        <p:txBody>
-          <a:bodyPr rtlCol="0" anchor="ctr"/>
-          <a:lstStyle/>
-          <a:p>
-            <a:pPr algn="ctr"/>
-          </a:p>
-        </p:txBody>
-      </p:sp>
-      <p:sp>
-        <p:nvSpPr>
-          <p:cNvPr id="25" name="TextBox 24"/>
+          <p:cNvPr id="26" name="TextBox 25"/>
           <p:cNvSpPr txBox="1"/>
           <p:nvPr/>
         </p:nvSpPr>
         <p:spPr>
           <a:xfrm>
-            <a:off x="9228582" y="1673351"/>
-            <a:ext cx="731520" cy="256032"/>
+            <a:off x="1783080" y="4994910"/>
+            <a:ext cx="9509760" cy="875538"/>
+          </a:xfrm>
+          <a:prstGeom prst="rect">
+            <a:avLst/>
+          </a:prstGeom>
+          <a:noFill/>
+        </p:spPr>
+        <p:txBody>
+          <a:bodyPr wrap="square" anchor="ctr" lIns="0" rIns="0" tIns="0" bIns="0">
+            <a:spAutoFit/>
+          </a:bodyPr>
+          <a:lstStyle/>
+          <a:p>
+            <a:pPr algn="l">
+              <a:lnSpc>
+                <a:spcPct val="108000"/>
+              </a:lnSpc>
+              <a:spcBef>
+                <a:spcPts val="0"/>
+              </a:spcBef>
+              <a:spcAft>
+                <a:spcPts val="200"/>
+              </a:spcAft>
+            </a:pPr>
+            <a:r>
+              <a:rPr sz="1250" b="1" i="0">
+                <a:solidFill>
+                  <a:srgbClr val="3854CC"/>
+                </a:solidFill>
+                <a:latin typeface="Montserrat"/>
+              </a:rPr>
+              <a:t>CTSI de Balthazar</a:t>
+            </a:r>
+          </a:p>
+          <a:p>
+            <a:pPr algn="l">
+              <a:lnSpc>
+                <a:spcPct val="105000"/>
+              </a:lnSpc>
+              <a:spcBef>
+                <a:spcPts val="0"/>
+              </a:spcBef>
+              <a:spcAft>
+                <a:spcPts val="300"/>
+              </a:spcAft>
+            </a:pPr>
+            <a:r>
+              <a:rPr sz="1080" b="0" i="0">
+                <a:solidFill>
+                  <a:srgbClr val="2B2C4A"/>
+                </a:solidFill>
+                <a:latin typeface="Montserrat"/>
+              </a:rPr>
+              <a:t>CTSI: grado A–E (0–4) + necrosis (0 % = 0; &lt;30 % = 2; 30–50 % = 4; &gt;50 % = 6) = 0–10; complementa Atlanta.</a:t>
+            </a:r>
+          </a:p>
+        </p:txBody>
+      </p:sp>
+      <p:sp>
+        <p:nvSpPr>
+          <p:cNvPr id="27" name="TextBox 26"/>
+          <p:cNvSpPr txBox="1"/>
+          <p:nvPr/>
+        </p:nvSpPr>
+        <p:spPr>
+          <a:xfrm>
+            <a:off x="594360" y="6053328"/>
+            <a:ext cx="10972800" cy="256032"/>
           </a:xfrm>
           <a:prstGeom prst="rect">
             <a:avLst/>
@@ -4664,7 +4773,7 @@
           </a:bodyPr>
           <a:lstStyle/>
           <a:p>
-            <a:pPr algn="ctr">
+            <a:pPr algn="l">
               <a:lnSpc>
                 <a:spcPct val="108000"/>
               </a:lnSpc>
@@ -4673,212 +4782,13 @@
               </a:spcAft>
             </a:pPr>
             <a:r>
-              <a:rPr sz="900" b="1" i="0">
-                <a:solidFill>
-                  <a:srgbClr val="3854CC"/>
-                </a:solidFill>
-                <a:latin typeface="Montserrat"/>
-              </a:rPr>
-              <a:t>CTSI</a:t>
-            </a:r>
-          </a:p>
-        </p:txBody>
-      </p:sp>
-      <p:sp>
-        <p:nvSpPr>
-          <p:cNvPr id="26" name="TextBox 25"/>
-          <p:cNvSpPr txBox="1"/>
-          <p:nvPr/>
-        </p:nvSpPr>
-        <p:spPr>
-          <a:xfrm>
-            <a:off x="9246869" y="2039112"/>
-            <a:ext cx="2137410" cy="2606040"/>
-          </a:xfrm>
-          <a:prstGeom prst="rect">
-            <a:avLst/>
-          </a:prstGeom>
-          <a:noFill/>
-        </p:spPr>
-        <p:txBody>
-          <a:bodyPr wrap="square" anchor="t" lIns="0" rIns="0" tIns="0" bIns="0">
-            <a:spAutoFit/>
-          </a:bodyPr>
-          <a:lstStyle/>
-          <a:p>
-            <a:pPr algn="l">
-              <a:lnSpc>
-                <a:spcPct val="108000"/>
-              </a:lnSpc>
-              <a:spcBef>
-                <a:spcPts val="0"/>
-              </a:spcBef>
-              <a:spcAft>
-                <a:spcPts val="600"/>
-              </a:spcAft>
-            </a:pPr>
-            <a:r>
-              <a:rPr sz="1350" b="1" i="0">
-                <a:solidFill>
-                  <a:srgbClr val="3854CC"/>
-                </a:solidFill>
-                <a:latin typeface="Montserrat"/>
-              </a:rPr>
-              <a:t>Índice de Balthazar</a:t>
-            </a:r>
-          </a:p>
-          <a:p>
-            <a:pPr algn="l">
-              <a:lnSpc>
-                <a:spcPct val="110000"/>
-              </a:lnSpc>
-              <a:spcBef>
-                <a:spcPts val="0"/>
-              </a:spcBef>
-              <a:spcAft>
-                <a:spcPts val="300"/>
-              </a:spcAft>
-            </a:pPr>
-            <a:r>
-              <a:rPr sz="1100" b="0" i="0">
-                <a:solidFill>
-                  <a:srgbClr val="2B2C4A"/>
-                </a:solidFill>
-                <a:latin typeface="Montserrat"/>
-              </a:rPr>
-              <a:t>Puntaje morfológico 0–10; complementa y no reemplaza la gravedad de Atlanta.</a:t>
-            </a:r>
-          </a:p>
-        </p:txBody>
-      </p:sp>
-      <p:sp>
-        <p:nvSpPr>
-          <p:cNvPr id="27" name="Rounded Rectangle 26"/>
-          <p:cNvSpPr/>
-          <p:nvPr/>
-        </p:nvSpPr>
-        <p:spPr>
-          <a:xfrm>
-            <a:off x="594360" y="5029200"/>
-            <a:ext cx="10972800" cy="1005839"/>
-          </a:xfrm>
-          <a:prstGeom prst="roundRect">
-            <a:avLst>
-              <a:gd name="adj" fmla="val 4000"/>
-            </a:avLst>
-          </a:prstGeom>
-          <a:solidFill>
-            <a:srgbClr val="EEF0FF"/>
-          </a:solidFill>
-          <a:ln w="6350">
-            <a:solidFill>
-              <a:srgbClr val="D9DDF2"/>
-            </a:solidFill>
-          </a:ln>
-          <a:effectLst/>
-        </p:spPr>
-        <p:style>
-          <a:lnRef idx="1">
-            <a:schemeClr val="accent1"/>
-          </a:lnRef>
-          <a:fillRef idx="3">
-            <a:schemeClr val="accent1"/>
-          </a:fillRef>
-          <a:effectRef idx="2">
-            <a:schemeClr val="accent1"/>
-          </a:effectRef>
-          <a:fontRef idx="minor">
-            <a:schemeClr val="lt1"/>
-          </a:fontRef>
-        </p:style>
-        <p:txBody>
-          <a:bodyPr rtlCol="0" anchor="ctr"/>
-          <a:lstStyle/>
-          <a:p>
-            <a:pPr algn="ctr"/>
-          </a:p>
-        </p:txBody>
-      </p:sp>
-      <p:sp>
-        <p:nvSpPr>
-          <p:cNvPr id="28" name="TextBox 27"/>
-          <p:cNvSpPr txBox="1"/>
-          <p:nvPr/>
-        </p:nvSpPr>
-        <p:spPr>
-          <a:xfrm>
-            <a:off x="822960" y="5120640"/>
-            <a:ext cx="10515600" cy="822960"/>
-          </a:xfrm>
-          <a:prstGeom prst="rect">
-            <a:avLst/>
-          </a:prstGeom>
-          <a:noFill/>
-        </p:spPr>
-        <p:txBody>
-          <a:bodyPr wrap="square" anchor="ctr" lIns="0" rIns="0" tIns="0" bIns="0">
-            <a:spAutoFit/>
-          </a:bodyPr>
-          <a:lstStyle/>
-          <a:p>
-            <a:pPr algn="l">
-              <a:lnSpc>
-                <a:spcPct val="112000"/>
-              </a:lnSpc>
-              <a:spcAft>
-                <a:spcPts val="300"/>
-              </a:spcAft>
-            </a:pPr>
-            <a:r>
-              <a:rPr sz="1150" b="0" i="0">
-                <a:solidFill>
-                  <a:srgbClr val="2B2C4A"/>
-                </a:solidFill>
-                <a:latin typeface="Montserrat"/>
-              </a:rPr>
-              <a:t>La TC no se usa de rutina al ingreso para graduar gravedad. Si hay incertidumbre, deterioro o falta de mejoría, puede evaluar complicaciones; para necrosis suele ser más útil tras 48–72 h, según evolución.</a:t>
-            </a:r>
-          </a:p>
-        </p:txBody>
-      </p:sp>
-      <p:sp>
-        <p:nvSpPr>
-          <p:cNvPr id="29" name="TextBox 28"/>
-          <p:cNvSpPr txBox="1"/>
-          <p:nvPr/>
-        </p:nvSpPr>
-        <p:spPr>
-          <a:xfrm>
-            <a:off x="594360" y="6089904"/>
-            <a:ext cx="10972800" cy="256032"/>
-          </a:xfrm>
-          <a:prstGeom prst="rect">
-            <a:avLst/>
-          </a:prstGeom>
-          <a:noFill/>
-        </p:spPr>
-        <p:txBody>
-          <a:bodyPr wrap="square" anchor="t" lIns="0" rIns="0" tIns="0" bIns="0">
-            <a:spAutoFit/>
-          </a:bodyPr>
-          <a:lstStyle/>
-          <a:p>
-            <a:pPr algn="l">
-              <a:lnSpc>
-                <a:spcPct val="108000"/>
-              </a:lnSpc>
-              <a:spcAft>
-                <a:spcPts val="300"/>
-              </a:spcAft>
-            </a:pPr>
-            <a:r>
               <a:rPr sz="900" b="0" i="1">
                 <a:solidFill>
                   <a:srgbClr val="606383"/>
                 </a:solidFill>
                 <a:latin typeface="Montserrat"/>
               </a:rPr>
-              <a:t>CTSI (índice de gravedad por TC): grado A–E (0–4) + necrosis (0; &lt;30%=2; 30–50%=4; &gt;50%=6) = 0–10.</a:t>
+              <a:t>No TC de rutina si asintomático. Necrosis más visible 48–72 h; &gt;4 sem: pseudoquiste sin detritos; necrosis encapsulada con detritos [1,2].</a:t>
             </a:r>
           </a:p>
         </p:txBody>
@@ -7259,7 +7169,7 @@
                 </a:solidFill>
                 <a:latin typeface="Montserrat"/>
               </a:rPr>
-              <a:t>La evaluación biliar y la cirugía oportuna reducen recurrencias</a:t>
+              <a:t>PONCHO: colecistectomía en el ingreso para pancreatitis biliar leve</a:t>
             </a:r>
           </a:p>
         </p:txBody>
@@ -7444,8 +7354,8 @@
         </p:nvSpPr>
         <p:spPr>
           <a:xfrm>
-            <a:off x="594360" y="1417320"/>
-            <a:ext cx="4023360" cy="4526280"/>
+            <a:off x="594360" y="1371600"/>
+            <a:ext cx="10972800" cy="868680"/>
           </a:xfrm>
           <a:prstGeom prst="roundRect">
             <a:avLst>
@@ -7484,17 +7394,61 @@
       </p:sp>
       <p:sp>
         <p:nvSpPr>
-          <p:cNvPr id="9" name="Rectangle 8"/>
+          <p:cNvPr id="9" name="TextBox 8"/>
+          <p:cNvSpPr txBox="1"/>
+          <p:nvPr/>
+        </p:nvSpPr>
+        <p:spPr>
+          <a:xfrm>
+            <a:off x="868680" y="1481328"/>
+            <a:ext cx="8229600" cy="384048"/>
+          </a:xfrm>
+          <a:prstGeom prst="rect">
+            <a:avLst/>
+          </a:prstGeom>
+          <a:noFill/>
+        </p:spPr>
+        <p:txBody>
+          <a:bodyPr wrap="square" anchor="t" lIns="0" rIns="0" tIns="0" bIns="0">
+            <a:spAutoFit/>
+          </a:bodyPr>
+          <a:lstStyle/>
+          <a:p>
+            <a:pPr algn="l">
+              <a:lnSpc>
+                <a:spcPct val="108000"/>
+              </a:lnSpc>
+              <a:spcAft>
+                <a:spcPts val="300"/>
+              </a:spcAft>
+            </a:pPr>
+            <a:r>
+              <a:rPr sz="1700" b="1" i="0">
+                <a:solidFill>
+                  <a:srgbClr val="FFFFFF"/>
+                </a:solidFill>
+                <a:latin typeface="Montserrat"/>
+              </a:rPr>
+              <a:t>Ensayo PONCHO</a:t>
+            </a:r>
+          </a:p>
+        </p:txBody>
+      </p:sp>
+      <p:sp>
+        <p:nvSpPr>
+          <p:cNvPr id="10" name="Rounded Rectangle 9"/>
           <p:cNvSpPr/>
           <p:nvPr/>
         </p:nvSpPr>
         <p:spPr>
           <a:xfrm>
-            <a:off x="594360" y="1417320"/>
-            <a:ext cx="4023360" cy="54864"/>
-          </a:xfrm>
-          <a:prstGeom prst="rect">
-            <a:avLst/>
+            <a:off x="9921240" y="1499616"/>
+            <a:ext cx="1371600" cy="347472"/>
+          </a:xfrm>
+          <a:prstGeom prst="roundRect">
+            <a:avLst>
+              <a:gd name="adj" fmla="val 12000"/>
+            </a:avLst>
           </a:prstGeom>
           <a:solidFill>
             <a:srgbClr val="D92A2B"/>
@@ -7528,14 +7482,14 @@
       </p:sp>
       <p:sp>
         <p:nvSpPr>
-          <p:cNvPr id="10" name="TextBox 9"/>
+          <p:cNvPr id="11" name="TextBox 10"/>
           <p:cNvSpPr txBox="1"/>
           <p:nvPr/>
         </p:nvSpPr>
         <p:spPr>
           <a:xfrm>
-            <a:off x="777240" y="2011680"/>
-            <a:ext cx="3657600" cy="1463040"/>
+            <a:off x="9921240" y="1499616"/>
+            <a:ext cx="1371600" cy="347472"/>
           </a:xfrm>
           <a:prstGeom prst="rect">
             <a:avLst/>
@@ -7557,30 +7511,594 @@
               </a:spcAft>
             </a:pPr>
             <a:r>
-              <a:rPr sz="5200" b="1" i="0">
+              <a:rPr sz="1100" b="1" i="0">
                 <a:solidFill>
                   <a:srgbClr val="FFFFFF"/>
                 </a:solidFill>
                 <a:latin typeface="Montserrat"/>
               </a:rPr>
-              <a:t>17 % / 5 %</a:t>
-            </a:r>
-          </a:p>
-        </p:txBody>
-      </p:sp>
-      <p:sp>
-        <p:nvSpPr>
-          <p:cNvPr id="11" name="Rectangle 10"/>
+              <a:t>2015</a:t>
+            </a:r>
+          </a:p>
+        </p:txBody>
+      </p:sp>
+      <p:sp>
+        <p:nvSpPr>
+          <p:cNvPr id="12" name="TextBox 11"/>
+          <p:cNvSpPr txBox="1"/>
+          <p:nvPr/>
+        </p:nvSpPr>
+        <p:spPr>
+          <a:xfrm>
+            <a:off x="868680" y="1883664"/>
+            <a:ext cx="8778240" cy="274320"/>
+          </a:xfrm>
+          <a:prstGeom prst="rect">
+            <a:avLst/>
+          </a:prstGeom>
+          <a:noFill/>
+        </p:spPr>
+        <p:txBody>
+          <a:bodyPr wrap="square" anchor="t" lIns="0" rIns="0" tIns="0" bIns="0">
+            <a:spAutoFit/>
+          </a:bodyPr>
+          <a:lstStyle/>
+          <a:p>
+            <a:pPr algn="l">
+              <a:lnSpc>
+                <a:spcPct val="108000"/>
+              </a:lnSpc>
+              <a:spcAft>
+                <a:spcPts val="300"/>
+              </a:spcAft>
+            </a:pPr>
+            <a:r>
+              <a:rPr sz="950" b="1" i="0">
+                <a:solidFill>
+                  <a:srgbClr val="E0E4FF"/>
+                </a:solidFill>
+                <a:latin typeface="Montserrat"/>
+              </a:rPr>
+              <a:t>ENSAYO MULTICÉNTRICO ALEATORIZADO</a:t>
+            </a:r>
+          </a:p>
+        </p:txBody>
+      </p:sp>
+      <p:sp>
+        <p:nvSpPr>
+          <p:cNvPr id="13" name="Rounded Rectangle 12"/>
           <p:cNvSpPr/>
           <p:nvPr/>
         </p:nvSpPr>
         <p:spPr>
           <a:xfrm>
-            <a:off x="2057400" y="3657600"/>
-            <a:ext cx="1097280" cy="22860"/>
-          </a:xfrm>
-          <a:prstGeom prst="rect">
-            <a:avLst/>
+            <a:off x="594360" y="2423160"/>
+            <a:ext cx="502920" cy="502920"/>
+          </a:xfrm>
+          <a:prstGeom prst="roundRect">
+            <a:avLst>
+              <a:gd name="adj" fmla="val 15000"/>
+            </a:avLst>
+          </a:prstGeom>
+          <a:solidFill>
+            <a:srgbClr val="3854CC"/>
+          </a:solidFill>
+          <a:ln>
+            <a:noFill/>
+          </a:ln>
+          <a:effectLst/>
+        </p:spPr>
+        <p:style>
+          <a:lnRef idx="1">
+            <a:schemeClr val="accent1"/>
+          </a:lnRef>
+          <a:fillRef idx="3">
+            <a:schemeClr val="accent1"/>
+          </a:fillRef>
+          <a:effectRef idx="2">
+            <a:schemeClr val="accent1"/>
+          </a:effectRef>
+          <a:fontRef idx="minor">
+            <a:schemeClr val="lt1"/>
+          </a:fontRef>
+        </p:style>
+        <p:txBody>
+          <a:bodyPr rtlCol="0" anchor="ctr"/>
+          <a:lstStyle/>
+          <a:p>
+            <a:pPr algn="ctr"/>
+          </a:p>
+        </p:txBody>
+      </p:sp>
+      <p:sp>
+        <p:nvSpPr>
+          <p:cNvPr id="14" name="TextBox 13"/>
+          <p:cNvSpPr txBox="1"/>
+          <p:nvPr/>
+        </p:nvSpPr>
+        <p:spPr>
+          <a:xfrm>
+            <a:off x="594360" y="2423160"/>
+            <a:ext cx="502920" cy="502920"/>
+          </a:xfrm>
+          <a:prstGeom prst="rect">
+            <a:avLst/>
+          </a:prstGeom>
+          <a:noFill/>
+        </p:spPr>
+        <p:txBody>
+          <a:bodyPr wrap="square" anchor="ctr" lIns="0" rIns="0" tIns="0" bIns="0">
+            <a:spAutoFit/>
+          </a:bodyPr>
+          <a:lstStyle/>
+          <a:p>
+            <a:pPr algn="ctr">
+              <a:lnSpc>
+                <a:spcPct val="108000"/>
+              </a:lnSpc>
+              <a:spcAft>
+                <a:spcPts val="300"/>
+              </a:spcAft>
+            </a:pPr>
+            <a:r>
+              <a:rPr sz="1500" b="1" i="0">
+                <a:solidFill>
+                  <a:srgbClr val="FFFFFF"/>
+                </a:solidFill>
+                <a:latin typeface="Montserrat"/>
+              </a:rPr>
+              <a:t>P</a:t>
+            </a:r>
+          </a:p>
+        </p:txBody>
+      </p:sp>
+      <p:sp>
+        <p:nvSpPr>
+          <p:cNvPr id="15" name="TextBox 14"/>
+          <p:cNvSpPr txBox="1"/>
+          <p:nvPr/>
+        </p:nvSpPr>
+        <p:spPr>
+          <a:xfrm>
+            <a:off x="1234440" y="2423160"/>
+            <a:ext cx="5943600" cy="777240"/>
+          </a:xfrm>
+          <a:prstGeom prst="rect">
+            <a:avLst/>
+          </a:prstGeom>
+          <a:noFill/>
+        </p:spPr>
+        <p:txBody>
+          <a:bodyPr wrap="square" anchor="t" lIns="0" rIns="0" tIns="0" bIns="0">
+            <a:spAutoFit/>
+          </a:bodyPr>
+          <a:lstStyle/>
+          <a:p>
+            <a:pPr algn="l">
+              <a:lnSpc>
+                <a:spcPct val="110000"/>
+              </a:lnSpc>
+              <a:spcAft>
+                <a:spcPts val="300"/>
+              </a:spcAft>
+            </a:pPr>
+            <a:r>
+              <a:rPr sz="1100" b="0" i="0">
+                <a:solidFill>
+                  <a:srgbClr val="2B2C4A"/>
+                </a:solidFill>
+                <a:latin typeface="Montserrat"/>
+              </a:rPr>
+              <a:t>Pacientes aptos con pancreatitis biliar leve.</a:t>
+            </a:r>
+          </a:p>
+        </p:txBody>
+      </p:sp>
+      <p:sp>
+        <p:nvSpPr>
+          <p:cNvPr id="16" name="Rounded Rectangle 15"/>
+          <p:cNvSpPr/>
+          <p:nvPr/>
+        </p:nvSpPr>
+        <p:spPr>
+          <a:xfrm>
+            <a:off x="594360" y="3310128"/>
+            <a:ext cx="502920" cy="502920"/>
+          </a:xfrm>
+          <a:prstGeom prst="roundRect">
+            <a:avLst>
+              <a:gd name="adj" fmla="val 15000"/>
+            </a:avLst>
+          </a:prstGeom>
+          <a:solidFill>
+            <a:srgbClr val="3854CC"/>
+          </a:solidFill>
+          <a:ln>
+            <a:noFill/>
+          </a:ln>
+          <a:effectLst/>
+        </p:spPr>
+        <p:style>
+          <a:lnRef idx="1">
+            <a:schemeClr val="accent1"/>
+          </a:lnRef>
+          <a:fillRef idx="3">
+            <a:schemeClr val="accent1"/>
+          </a:fillRef>
+          <a:effectRef idx="2">
+            <a:schemeClr val="accent1"/>
+          </a:effectRef>
+          <a:fontRef idx="minor">
+            <a:schemeClr val="lt1"/>
+          </a:fontRef>
+        </p:style>
+        <p:txBody>
+          <a:bodyPr rtlCol="0" anchor="ctr"/>
+          <a:lstStyle/>
+          <a:p>
+            <a:pPr algn="ctr"/>
+          </a:p>
+        </p:txBody>
+      </p:sp>
+      <p:sp>
+        <p:nvSpPr>
+          <p:cNvPr id="17" name="TextBox 16"/>
+          <p:cNvSpPr txBox="1"/>
+          <p:nvPr/>
+        </p:nvSpPr>
+        <p:spPr>
+          <a:xfrm>
+            <a:off x="594360" y="3310128"/>
+            <a:ext cx="502920" cy="502920"/>
+          </a:xfrm>
+          <a:prstGeom prst="rect">
+            <a:avLst/>
+          </a:prstGeom>
+          <a:noFill/>
+        </p:spPr>
+        <p:txBody>
+          <a:bodyPr wrap="square" anchor="ctr" lIns="0" rIns="0" tIns="0" bIns="0">
+            <a:spAutoFit/>
+          </a:bodyPr>
+          <a:lstStyle/>
+          <a:p>
+            <a:pPr algn="ctr">
+              <a:lnSpc>
+                <a:spcPct val="108000"/>
+              </a:lnSpc>
+              <a:spcAft>
+                <a:spcPts val="300"/>
+              </a:spcAft>
+            </a:pPr>
+            <a:r>
+              <a:rPr sz="1500" b="1" i="0">
+                <a:solidFill>
+                  <a:srgbClr val="FFFFFF"/>
+                </a:solidFill>
+                <a:latin typeface="Montserrat"/>
+              </a:rPr>
+              <a:t>I</a:t>
+            </a:r>
+          </a:p>
+        </p:txBody>
+      </p:sp>
+      <p:sp>
+        <p:nvSpPr>
+          <p:cNvPr id="18" name="TextBox 17"/>
+          <p:cNvSpPr txBox="1"/>
+          <p:nvPr/>
+        </p:nvSpPr>
+        <p:spPr>
+          <a:xfrm>
+            <a:off x="1234440" y="3310128"/>
+            <a:ext cx="5943600" cy="777240"/>
+          </a:xfrm>
+          <a:prstGeom prst="rect">
+            <a:avLst/>
+          </a:prstGeom>
+          <a:noFill/>
+        </p:spPr>
+        <p:txBody>
+          <a:bodyPr wrap="square" anchor="t" lIns="0" rIns="0" tIns="0" bIns="0">
+            <a:spAutoFit/>
+          </a:bodyPr>
+          <a:lstStyle/>
+          <a:p>
+            <a:pPr algn="l">
+              <a:lnSpc>
+                <a:spcPct val="110000"/>
+              </a:lnSpc>
+              <a:spcAft>
+                <a:spcPts val="300"/>
+              </a:spcAft>
+            </a:pPr>
+            <a:r>
+              <a:rPr sz="1100" b="0" i="0">
+                <a:solidFill>
+                  <a:srgbClr val="2B2C4A"/>
+                </a:solidFill>
+                <a:latin typeface="Montserrat"/>
+              </a:rPr>
+              <a:t>Colecistectomía durante la hospitalización inicial.</a:t>
+            </a:r>
+          </a:p>
+        </p:txBody>
+      </p:sp>
+      <p:sp>
+        <p:nvSpPr>
+          <p:cNvPr id="19" name="Rounded Rectangle 18"/>
+          <p:cNvSpPr/>
+          <p:nvPr/>
+        </p:nvSpPr>
+        <p:spPr>
+          <a:xfrm>
+            <a:off x="594360" y="4197096"/>
+            <a:ext cx="502920" cy="502920"/>
+          </a:xfrm>
+          <a:prstGeom prst="roundRect">
+            <a:avLst>
+              <a:gd name="adj" fmla="val 15000"/>
+            </a:avLst>
+          </a:prstGeom>
+          <a:solidFill>
+            <a:srgbClr val="3854CC"/>
+          </a:solidFill>
+          <a:ln>
+            <a:noFill/>
+          </a:ln>
+          <a:effectLst/>
+        </p:spPr>
+        <p:style>
+          <a:lnRef idx="1">
+            <a:schemeClr val="accent1"/>
+          </a:lnRef>
+          <a:fillRef idx="3">
+            <a:schemeClr val="accent1"/>
+          </a:fillRef>
+          <a:effectRef idx="2">
+            <a:schemeClr val="accent1"/>
+          </a:effectRef>
+          <a:fontRef idx="minor">
+            <a:schemeClr val="lt1"/>
+          </a:fontRef>
+        </p:style>
+        <p:txBody>
+          <a:bodyPr rtlCol="0" anchor="ctr"/>
+          <a:lstStyle/>
+          <a:p>
+            <a:pPr algn="ctr"/>
+          </a:p>
+        </p:txBody>
+      </p:sp>
+      <p:sp>
+        <p:nvSpPr>
+          <p:cNvPr id="20" name="TextBox 19"/>
+          <p:cNvSpPr txBox="1"/>
+          <p:nvPr/>
+        </p:nvSpPr>
+        <p:spPr>
+          <a:xfrm>
+            <a:off x="594360" y="4197096"/>
+            <a:ext cx="502920" cy="502920"/>
+          </a:xfrm>
+          <a:prstGeom prst="rect">
+            <a:avLst/>
+          </a:prstGeom>
+          <a:noFill/>
+        </p:spPr>
+        <p:txBody>
+          <a:bodyPr wrap="square" anchor="ctr" lIns="0" rIns="0" tIns="0" bIns="0">
+            <a:spAutoFit/>
+          </a:bodyPr>
+          <a:lstStyle/>
+          <a:p>
+            <a:pPr algn="ctr">
+              <a:lnSpc>
+                <a:spcPct val="108000"/>
+              </a:lnSpc>
+              <a:spcAft>
+                <a:spcPts val="300"/>
+              </a:spcAft>
+            </a:pPr>
+            <a:r>
+              <a:rPr sz="1500" b="1" i="0">
+                <a:solidFill>
+                  <a:srgbClr val="FFFFFF"/>
+                </a:solidFill>
+                <a:latin typeface="Montserrat"/>
+              </a:rPr>
+              <a:t>C</a:t>
+            </a:r>
+          </a:p>
+        </p:txBody>
+      </p:sp>
+      <p:sp>
+        <p:nvSpPr>
+          <p:cNvPr id="21" name="TextBox 20"/>
+          <p:cNvSpPr txBox="1"/>
+          <p:nvPr/>
+        </p:nvSpPr>
+        <p:spPr>
+          <a:xfrm>
+            <a:off x="1234440" y="4197096"/>
+            <a:ext cx="5943600" cy="777240"/>
+          </a:xfrm>
+          <a:prstGeom prst="rect">
+            <a:avLst/>
+          </a:prstGeom>
+          <a:noFill/>
+        </p:spPr>
+        <p:txBody>
+          <a:bodyPr wrap="square" anchor="t" lIns="0" rIns="0" tIns="0" bIns="0">
+            <a:spAutoFit/>
+          </a:bodyPr>
+          <a:lstStyle/>
+          <a:p>
+            <a:pPr algn="l">
+              <a:lnSpc>
+                <a:spcPct val="110000"/>
+              </a:lnSpc>
+              <a:spcAft>
+                <a:spcPts val="300"/>
+              </a:spcAft>
+            </a:pPr>
+            <a:r>
+              <a:rPr sz="1100" b="0" i="0">
+                <a:solidFill>
+                  <a:srgbClr val="2B2C4A"/>
+                </a:solidFill>
+                <a:latin typeface="Montserrat"/>
+              </a:rPr>
+              <a:t>Colecistectomía diferida tras el alta.</a:t>
+            </a:r>
+          </a:p>
+        </p:txBody>
+      </p:sp>
+      <p:sp>
+        <p:nvSpPr>
+          <p:cNvPr id="22" name="Rounded Rectangle 21"/>
+          <p:cNvSpPr/>
+          <p:nvPr/>
+        </p:nvSpPr>
+        <p:spPr>
+          <a:xfrm>
+            <a:off x="594360" y="5084064"/>
+            <a:ext cx="502920" cy="502920"/>
+          </a:xfrm>
+          <a:prstGeom prst="roundRect">
+            <a:avLst>
+              <a:gd name="adj" fmla="val 15000"/>
+            </a:avLst>
+          </a:prstGeom>
+          <a:solidFill>
+            <a:srgbClr val="3854CC"/>
+          </a:solidFill>
+          <a:ln>
+            <a:noFill/>
+          </a:ln>
+          <a:effectLst/>
+        </p:spPr>
+        <p:style>
+          <a:lnRef idx="1">
+            <a:schemeClr val="accent1"/>
+          </a:lnRef>
+          <a:fillRef idx="3">
+            <a:schemeClr val="accent1"/>
+          </a:fillRef>
+          <a:effectRef idx="2">
+            <a:schemeClr val="accent1"/>
+          </a:effectRef>
+          <a:fontRef idx="minor">
+            <a:schemeClr val="lt1"/>
+          </a:fontRef>
+        </p:style>
+        <p:txBody>
+          <a:bodyPr rtlCol="0" anchor="ctr"/>
+          <a:lstStyle/>
+          <a:p>
+            <a:pPr algn="ctr"/>
+          </a:p>
+        </p:txBody>
+      </p:sp>
+      <p:sp>
+        <p:nvSpPr>
+          <p:cNvPr id="23" name="TextBox 22"/>
+          <p:cNvSpPr txBox="1"/>
+          <p:nvPr/>
+        </p:nvSpPr>
+        <p:spPr>
+          <a:xfrm>
+            <a:off x="594360" y="5084064"/>
+            <a:ext cx="502920" cy="502920"/>
+          </a:xfrm>
+          <a:prstGeom prst="rect">
+            <a:avLst/>
+          </a:prstGeom>
+          <a:noFill/>
+        </p:spPr>
+        <p:txBody>
+          <a:bodyPr wrap="square" anchor="ctr" lIns="0" rIns="0" tIns="0" bIns="0">
+            <a:spAutoFit/>
+          </a:bodyPr>
+          <a:lstStyle/>
+          <a:p>
+            <a:pPr algn="ctr">
+              <a:lnSpc>
+                <a:spcPct val="108000"/>
+              </a:lnSpc>
+              <a:spcAft>
+                <a:spcPts val="300"/>
+              </a:spcAft>
+            </a:pPr>
+            <a:r>
+              <a:rPr sz="1500" b="1" i="0">
+                <a:solidFill>
+                  <a:srgbClr val="FFFFFF"/>
+                </a:solidFill>
+                <a:latin typeface="Montserrat"/>
+              </a:rPr>
+              <a:t>O</a:t>
+            </a:r>
+          </a:p>
+        </p:txBody>
+      </p:sp>
+      <p:sp>
+        <p:nvSpPr>
+          <p:cNvPr id="24" name="TextBox 23"/>
+          <p:cNvSpPr txBox="1"/>
+          <p:nvPr/>
+        </p:nvSpPr>
+        <p:spPr>
+          <a:xfrm>
+            <a:off x="1234440" y="5084064"/>
+            <a:ext cx="5943600" cy="777240"/>
+          </a:xfrm>
+          <a:prstGeom prst="rect">
+            <a:avLst/>
+          </a:prstGeom>
+          <a:noFill/>
+        </p:spPr>
+        <p:txBody>
+          <a:bodyPr wrap="square" anchor="t" lIns="0" rIns="0" tIns="0" bIns="0">
+            <a:spAutoFit/>
+          </a:bodyPr>
+          <a:lstStyle/>
+          <a:p>
+            <a:pPr algn="l">
+              <a:lnSpc>
+                <a:spcPct val="110000"/>
+              </a:lnSpc>
+              <a:spcAft>
+                <a:spcPts val="300"/>
+              </a:spcAft>
+            </a:pPr>
+            <a:r>
+              <a:rPr sz="1100" b="0" i="0">
+                <a:solidFill>
+                  <a:srgbClr val="2B2C4A"/>
+                </a:solidFill>
+                <a:latin typeface="Montserrat"/>
+              </a:rPr>
+              <a:t>Reingreso por complicaciones biliares o muerte a seis meses.</a:t>
+            </a:r>
+          </a:p>
+        </p:txBody>
+      </p:sp>
+      <p:sp>
+        <p:nvSpPr>
+          <p:cNvPr id="25" name="Rounded Rectangle 24"/>
+          <p:cNvSpPr/>
+          <p:nvPr/>
+        </p:nvSpPr>
+        <p:spPr>
+          <a:xfrm>
+            <a:off x="7452360" y="2423160"/>
+            <a:ext cx="4114800" cy="1554480"/>
+          </a:xfrm>
+          <a:prstGeom prst="roundRect">
+            <a:avLst>
+              <a:gd name="adj" fmla="val 4000"/>
+            </a:avLst>
           </a:prstGeom>
           <a:solidFill>
             <a:srgbClr val="D92A2B"/>
@@ -7614,14 +8132,14 @@
       </p:sp>
       <p:sp>
         <p:nvSpPr>
-          <p:cNvPr id="12" name="TextBox 11"/>
+          <p:cNvPr id="26" name="TextBox 25"/>
           <p:cNvSpPr txBox="1"/>
           <p:nvPr/>
         </p:nvSpPr>
         <p:spPr>
           <a:xfrm>
-            <a:off x="822960" y="3886200"/>
-            <a:ext cx="3566160" cy="1645920"/>
+            <a:off x="7589520" y="2578608"/>
+            <a:ext cx="3840480" cy="822960"/>
           </a:xfrm>
           <a:prstGeom prst="rect">
             <a:avLst/>
@@ -7636,34 +8154,76 @@
           <a:p>
             <a:pPr algn="ctr">
               <a:lnSpc>
-                <a:spcPct val="115000"/>
+                <a:spcPct val="108000"/>
               </a:lnSpc>
               <a:spcAft>
                 <a:spcPts val="300"/>
               </a:spcAft>
             </a:pPr>
             <a:r>
-              <a:rPr sz="1350" b="0" i="0">
+              <a:rPr sz="3600" b="1" i="0">
                 <a:solidFill>
                   <a:srgbClr val="FFFFFF"/>
                 </a:solidFill>
                 <a:latin typeface="Montserrat"/>
               </a:rPr>
-              <a:t>PONCHO: reingreso por complicación biliar o muerte; cirugía diferida vs mismo ingreso (6 meses).</a:t>
-            </a:r>
-          </a:p>
-        </p:txBody>
-      </p:sp>
-      <p:sp>
-        <p:nvSpPr>
-          <p:cNvPr id="13" name="Rounded Rectangle 12"/>
+              <a:t>17 % / 5 %</a:t>
+            </a:r>
+          </a:p>
+        </p:txBody>
+      </p:sp>
+      <p:sp>
+        <p:nvSpPr>
+          <p:cNvPr id="27" name="TextBox 26"/>
+          <p:cNvSpPr txBox="1"/>
+          <p:nvPr/>
+        </p:nvSpPr>
+        <p:spPr>
+          <a:xfrm>
+            <a:off x="7635240" y="3456432"/>
+            <a:ext cx="3749039" cy="411480"/>
+          </a:xfrm>
+          <a:prstGeom prst="rect">
+            <a:avLst/>
+          </a:prstGeom>
+          <a:noFill/>
+        </p:spPr>
+        <p:txBody>
+          <a:bodyPr wrap="square" anchor="t" lIns="0" rIns="0" tIns="0" bIns="0">
+            <a:spAutoFit/>
+          </a:bodyPr>
+          <a:lstStyle/>
+          <a:p>
+            <a:pPr algn="ctr">
+              <a:lnSpc>
+                <a:spcPct val="105000"/>
+              </a:lnSpc>
+              <a:spcAft>
+                <a:spcPts val="300"/>
+              </a:spcAft>
+            </a:pPr>
+            <a:r>
+              <a:rPr sz="1050" b="0" i="0">
+                <a:solidFill>
+                  <a:srgbClr val="FFFFFF"/>
+                </a:solidFill>
+                <a:latin typeface="Montserrat"/>
+              </a:rPr>
+              <a:t>Cirugía diferida vs durante el mismo ingreso; desenlace compuesto.</a:t>
+            </a:r>
+          </a:p>
+        </p:txBody>
+      </p:sp>
+      <p:sp>
+        <p:nvSpPr>
+          <p:cNvPr id="28" name="Rounded Rectangle 27"/>
           <p:cNvSpPr/>
           <p:nvPr/>
         </p:nvSpPr>
         <p:spPr>
           <a:xfrm>
-            <a:off x="4892040" y="1417320"/>
-            <a:ext cx="6675120" cy="1386840"/>
+            <a:off x="7452360" y="4160520"/>
+            <a:ext cx="4114800" cy="1691640"/>
           </a:xfrm>
           <a:prstGeom prst="roundRect">
             <a:avLst>
@@ -7704,20 +8264,20 @@
       </p:sp>
       <p:sp>
         <p:nvSpPr>
-          <p:cNvPr id="14" name="Rectangle 13"/>
+          <p:cNvPr id="29" name="Rectangle 28"/>
           <p:cNvSpPr/>
           <p:nvPr/>
         </p:nvSpPr>
         <p:spPr>
           <a:xfrm>
-            <a:off x="4892040" y="1417320"/>
-            <a:ext cx="54864" cy="1386840"/>
+            <a:off x="7452360" y="4160520"/>
+            <a:ext cx="54864" cy="1691640"/>
           </a:xfrm>
           <a:prstGeom prst="rect">
             <a:avLst/>
           </a:prstGeom>
           <a:solidFill>
-            <a:srgbClr val="D92A2B"/>
+            <a:srgbClr val="B91C1C"/>
           </a:solidFill>
           <a:ln>
             <a:noFill/>
@@ -7748,399 +8308,14 @@
       </p:sp>
       <p:sp>
         <p:nvSpPr>
-          <p:cNvPr id="15" name="TextBox 14"/>
+          <p:cNvPr id="30" name="TextBox 29"/>
           <p:cNvSpPr txBox="1"/>
           <p:nvPr/>
         </p:nvSpPr>
         <p:spPr>
           <a:xfrm>
-            <a:off x="5120640" y="1527048"/>
-            <a:ext cx="6263640" cy="1167384"/>
-          </a:xfrm>
-          <a:prstGeom prst="rect">
-            <a:avLst/>
-          </a:prstGeom>
-          <a:noFill/>
-        </p:spPr>
-        <p:txBody>
-          <a:bodyPr wrap="square" anchor="ctr" lIns="0" rIns="0" tIns="0" bIns="0">
-            <a:spAutoFit/>
-          </a:bodyPr>
-          <a:lstStyle/>
-          <a:p>
-            <a:pPr algn="l">
-              <a:lnSpc>
-                <a:spcPct val="108000"/>
-              </a:lnSpc>
-              <a:spcBef>
-                <a:spcPts val="0"/>
-              </a:spcBef>
-              <a:spcAft>
-                <a:spcPts val="300"/>
-              </a:spcAft>
-            </a:pPr>
-            <a:r>
-              <a:rPr sz="1250" b="1" i="0">
-                <a:solidFill>
-                  <a:srgbClr val="3854CC"/>
-                </a:solidFill>
-                <a:latin typeface="Montserrat"/>
-              </a:rPr>
-              <a:t>Atención primaria</a:t>
-            </a:r>
-          </a:p>
-          <a:p>
-            <a:pPr algn="l">
-              <a:lnSpc>
-                <a:spcPct val="110000"/>
-              </a:lnSpc>
-              <a:spcBef>
-                <a:spcPts val="0"/>
-              </a:spcBef>
-              <a:spcAft>
-                <a:spcPts val="300"/>
-              </a:spcAft>
-            </a:pPr>
-            <a:r>
-              <a:rPr sz="1100" b="0" i="0">
-                <a:solidFill>
-                  <a:srgbClr val="2B2C4A"/>
-                </a:solidFill>
-                <a:latin typeface="Montserrat"/>
-              </a:rPr>
-              <a:t>Investigar cólico biliar, litiasis y episodios previos; solicitar ecografía según sospecha y coordinar derivación.</a:t>
-            </a:r>
-          </a:p>
-        </p:txBody>
-      </p:sp>
-      <p:sp>
-        <p:nvSpPr>
-          <p:cNvPr id="16" name="Rounded Rectangle 15"/>
-          <p:cNvSpPr/>
-          <p:nvPr/>
-        </p:nvSpPr>
-        <p:spPr>
-          <a:xfrm>
-            <a:off x="4892040" y="2987040"/>
-            <a:ext cx="6675120" cy="1386840"/>
-          </a:xfrm>
-          <a:prstGeom prst="roundRect">
-            <a:avLst>
-              <a:gd name="adj" fmla="val 4000"/>
-            </a:avLst>
-          </a:prstGeom>
-          <a:solidFill>
-            <a:srgbClr val="FFFFFF"/>
-          </a:solidFill>
-          <a:ln w="7620">
-            <a:solidFill>
-              <a:srgbClr val="D9DDF2"/>
-            </a:solidFill>
-          </a:ln>
-          <a:effectLst/>
-        </p:spPr>
-        <p:style>
-          <a:lnRef idx="1">
-            <a:schemeClr val="accent1"/>
-          </a:lnRef>
-          <a:fillRef idx="3">
-            <a:schemeClr val="accent1"/>
-          </a:fillRef>
-          <a:effectRef idx="2">
-            <a:schemeClr val="accent1"/>
-          </a:effectRef>
-          <a:fontRef idx="minor">
-            <a:schemeClr val="lt1"/>
-          </a:fontRef>
-        </p:style>
-        <p:txBody>
-          <a:bodyPr rtlCol="0" anchor="ctr"/>
-          <a:lstStyle/>
-          <a:p>
-            <a:pPr algn="ctr"/>
-          </a:p>
-        </p:txBody>
-      </p:sp>
-      <p:sp>
-        <p:nvSpPr>
-          <p:cNvPr id="17" name="Rectangle 16"/>
-          <p:cNvSpPr/>
-          <p:nvPr/>
-        </p:nvSpPr>
-        <p:spPr>
-          <a:xfrm>
-            <a:off x="4892040" y="2987040"/>
-            <a:ext cx="54864" cy="1386840"/>
-          </a:xfrm>
-          <a:prstGeom prst="rect">
-            <a:avLst/>
-          </a:prstGeom>
-          <a:solidFill>
-            <a:srgbClr val="D92A2B"/>
-          </a:solidFill>
-          <a:ln>
-            <a:noFill/>
-          </a:ln>
-          <a:effectLst/>
-        </p:spPr>
-        <p:style>
-          <a:lnRef idx="1">
-            <a:schemeClr val="accent1"/>
-          </a:lnRef>
-          <a:fillRef idx="3">
-            <a:schemeClr val="accent1"/>
-          </a:fillRef>
-          <a:effectRef idx="2">
-            <a:schemeClr val="accent1"/>
-          </a:effectRef>
-          <a:fontRef idx="minor">
-            <a:schemeClr val="lt1"/>
-          </a:fontRef>
-        </p:style>
-        <p:txBody>
-          <a:bodyPr rtlCol="0" anchor="ctr"/>
-          <a:lstStyle/>
-          <a:p>
-            <a:pPr algn="ctr"/>
-          </a:p>
-        </p:txBody>
-      </p:sp>
-      <p:sp>
-        <p:nvSpPr>
-          <p:cNvPr id="18" name="TextBox 17"/>
-          <p:cNvSpPr txBox="1"/>
-          <p:nvPr/>
-        </p:nvSpPr>
-        <p:spPr>
-          <a:xfrm>
-            <a:off x="5120640" y="3096768"/>
-            <a:ext cx="6263640" cy="1167384"/>
-          </a:xfrm>
-          <a:prstGeom prst="rect">
-            <a:avLst/>
-          </a:prstGeom>
-          <a:noFill/>
-        </p:spPr>
-        <p:txBody>
-          <a:bodyPr wrap="square" anchor="ctr" lIns="0" rIns="0" tIns="0" bIns="0">
-            <a:spAutoFit/>
-          </a:bodyPr>
-          <a:lstStyle/>
-          <a:p>
-            <a:pPr algn="l">
-              <a:lnSpc>
-                <a:spcPct val="108000"/>
-              </a:lnSpc>
-              <a:spcBef>
-                <a:spcPts val="0"/>
-              </a:spcBef>
-              <a:spcAft>
-                <a:spcPts val="300"/>
-              </a:spcAft>
-            </a:pPr>
-            <a:r>
-              <a:rPr sz="1250" b="1" i="0">
-                <a:solidFill>
-                  <a:srgbClr val="3854CC"/>
-                </a:solidFill>
-                <a:latin typeface="Montserrat"/>
-              </a:rPr>
-              <a:t>Colecistectomía</a:t>
-            </a:r>
-          </a:p>
-          <a:p>
-            <a:pPr algn="l">
-              <a:lnSpc>
-                <a:spcPct val="110000"/>
-              </a:lnSpc>
-              <a:spcBef>
-                <a:spcPts val="0"/>
-              </a:spcBef>
-              <a:spcAft>
-                <a:spcPts val="300"/>
-              </a:spcAft>
-            </a:pPr>
-            <a:r>
-              <a:rPr sz="1100" b="0" i="0">
-                <a:solidFill>
-                  <a:srgbClr val="2B2C4A"/>
-                </a:solidFill>
-                <a:latin typeface="Montserrat"/>
-              </a:rPr>
-              <a:t>En pancreatitis biliar leve y paciente apto, realizar durante el mismo ingreso; necrosis/colecciones requieren individualizar y diferir.</a:t>
-            </a:r>
-          </a:p>
-        </p:txBody>
-      </p:sp>
-      <p:sp>
-        <p:nvSpPr>
-          <p:cNvPr id="19" name="Rounded Rectangle 18"/>
-          <p:cNvSpPr/>
-          <p:nvPr/>
-        </p:nvSpPr>
-        <p:spPr>
-          <a:xfrm>
-            <a:off x="4892040" y="4556760"/>
-            <a:ext cx="6675120" cy="1386840"/>
-          </a:xfrm>
-          <a:prstGeom prst="roundRect">
-            <a:avLst>
-              <a:gd name="adj" fmla="val 4000"/>
-            </a:avLst>
-          </a:prstGeom>
-          <a:solidFill>
-            <a:srgbClr val="FFFFFF"/>
-          </a:solidFill>
-          <a:ln w="7620">
-            <a:solidFill>
-              <a:srgbClr val="D9DDF2"/>
-            </a:solidFill>
-          </a:ln>
-          <a:effectLst/>
-        </p:spPr>
-        <p:style>
-          <a:lnRef idx="1">
-            <a:schemeClr val="accent1"/>
-          </a:lnRef>
-          <a:fillRef idx="3">
-            <a:schemeClr val="accent1"/>
-          </a:fillRef>
-          <a:effectRef idx="2">
-            <a:schemeClr val="accent1"/>
-          </a:effectRef>
-          <a:fontRef idx="minor">
-            <a:schemeClr val="lt1"/>
-          </a:fontRef>
-        </p:style>
-        <p:txBody>
-          <a:bodyPr rtlCol="0" anchor="ctr"/>
-          <a:lstStyle/>
-          <a:p>
-            <a:pPr algn="ctr"/>
-          </a:p>
-        </p:txBody>
-      </p:sp>
-      <p:sp>
-        <p:nvSpPr>
-          <p:cNvPr id="20" name="Rectangle 19"/>
-          <p:cNvSpPr/>
-          <p:nvPr/>
-        </p:nvSpPr>
-        <p:spPr>
-          <a:xfrm>
-            <a:off x="4892040" y="4556760"/>
-            <a:ext cx="54864" cy="1386840"/>
-          </a:xfrm>
-          <a:prstGeom prst="rect">
-            <a:avLst/>
-          </a:prstGeom>
-          <a:solidFill>
-            <a:srgbClr val="D92A2B"/>
-          </a:solidFill>
-          <a:ln>
-            <a:noFill/>
-          </a:ln>
-          <a:effectLst/>
-        </p:spPr>
-        <p:style>
-          <a:lnRef idx="1">
-            <a:schemeClr val="accent1"/>
-          </a:lnRef>
-          <a:fillRef idx="3">
-            <a:schemeClr val="accent1"/>
-          </a:fillRef>
-          <a:effectRef idx="2">
-            <a:schemeClr val="accent1"/>
-          </a:effectRef>
-          <a:fontRef idx="minor">
-            <a:schemeClr val="lt1"/>
-          </a:fontRef>
-        </p:style>
-        <p:txBody>
-          <a:bodyPr rtlCol="0" anchor="ctr"/>
-          <a:lstStyle/>
-          <a:p>
-            <a:pPr algn="ctr"/>
-          </a:p>
-        </p:txBody>
-      </p:sp>
-      <p:sp>
-        <p:nvSpPr>
-          <p:cNvPr id="21" name="TextBox 20"/>
-          <p:cNvSpPr txBox="1"/>
-          <p:nvPr/>
-        </p:nvSpPr>
-        <p:spPr>
-          <a:xfrm>
-            <a:off x="5120640" y="4666488"/>
-            <a:ext cx="6263640" cy="1167384"/>
-          </a:xfrm>
-          <a:prstGeom prst="rect">
-            <a:avLst/>
-          </a:prstGeom>
-          <a:noFill/>
-        </p:spPr>
-        <p:txBody>
-          <a:bodyPr wrap="square" anchor="ctr" lIns="0" rIns="0" tIns="0" bIns="0">
-            <a:spAutoFit/>
-          </a:bodyPr>
-          <a:lstStyle/>
-          <a:p>
-            <a:pPr algn="l">
-              <a:lnSpc>
-                <a:spcPct val="108000"/>
-              </a:lnSpc>
-              <a:spcBef>
-                <a:spcPts val="0"/>
-              </a:spcBef>
-              <a:spcAft>
-                <a:spcPts val="300"/>
-              </a:spcAft>
-            </a:pPr>
-            <a:r>
-              <a:rPr sz="1250" b="1" i="0">
-                <a:solidFill>
-                  <a:srgbClr val="3854CC"/>
-                </a:solidFill>
-                <a:latin typeface="Montserrat"/>
-              </a:rPr>
-              <a:t>Control a 4–6 semanas</a:t>
-            </a:r>
-          </a:p>
-          <a:p>
-            <a:pPr algn="l">
-              <a:lnSpc>
-                <a:spcPct val="110000"/>
-              </a:lnSpc>
-              <a:spcBef>
-                <a:spcPts val="0"/>
-              </a:spcBef>
-              <a:spcAft>
-                <a:spcPts val="300"/>
-              </a:spcAft>
-            </a:pPr>
-            <a:r>
-              <a:rPr sz="1100" b="0" i="0">
-                <a:solidFill>
-                  <a:srgbClr val="2B2C4A"/>
-                </a:solidFill>
-                <a:latin typeface="Montserrat"/>
-              </a:rPr>
-              <a:t>Revisar síntomas persistentes. Tras 4 semanas: pseudoquiste sin detritos; necrosis encapsulada si contiene detritos.</a:t>
-            </a:r>
-          </a:p>
-        </p:txBody>
-      </p:sp>
-      <p:sp>
-        <p:nvSpPr>
-          <p:cNvPr id="22" name="TextBox 21"/>
-          <p:cNvSpPr txBox="1"/>
-          <p:nvPr/>
-        </p:nvSpPr>
-        <p:spPr>
-          <a:xfrm>
-            <a:off x="594360" y="6053328"/>
-            <a:ext cx="10972800" cy="256032"/>
+            <a:off x="7680960" y="4297680"/>
+            <a:ext cx="3657600" cy="256032"/>
           </a:xfrm>
           <a:prstGeom prst="rect">
             <a:avLst/>
@@ -8162,13 +8337,97 @@
               </a:spcAft>
             </a:pPr>
             <a:r>
+              <a:rPr sz="900" b="1" i="0">
+                <a:solidFill>
+                  <a:srgbClr val="B91C1C"/>
+                </a:solidFill>
+                <a:latin typeface="Montserrat"/>
+              </a:rPr>
+              <a:t>LIMITACIÓN</a:t>
+            </a:r>
+          </a:p>
+        </p:txBody>
+      </p:sp>
+      <p:sp>
+        <p:nvSpPr>
+          <p:cNvPr id="31" name="TextBox 30"/>
+          <p:cNvSpPr txBox="1"/>
+          <p:nvPr/>
+        </p:nvSpPr>
+        <p:spPr>
+          <a:xfrm>
+            <a:off x="7680960" y="4572000"/>
+            <a:ext cx="3657600" cy="1188720"/>
+          </a:xfrm>
+          <a:prstGeom prst="rect">
+            <a:avLst/>
+          </a:prstGeom>
+          <a:noFill/>
+        </p:spPr>
+        <p:txBody>
+          <a:bodyPr wrap="square" anchor="t" lIns="0" rIns="0" tIns="0" bIns="0">
+            <a:spAutoFit/>
+          </a:bodyPr>
+          <a:lstStyle/>
+          <a:p>
+            <a:pPr algn="l">
+              <a:lnSpc>
+                <a:spcPct val="110000"/>
+              </a:lnSpc>
+              <a:spcAft>
+                <a:spcPts val="300"/>
+              </a:spcAft>
+            </a:pPr>
+            <a:r>
+              <a:rPr sz="1050" b="0" i="0">
+                <a:solidFill>
+                  <a:srgbClr val="2B2C4A"/>
+                </a:solidFill>
+                <a:latin typeface="Montserrat"/>
+              </a:rPr>
+              <a:t>No extrapolar a etiología no confirmada ni a necrosis/colecciones; en esos casos, individualizar la cirugía.</a:t>
+            </a:r>
+          </a:p>
+        </p:txBody>
+      </p:sp>
+      <p:sp>
+        <p:nvSpPr>
+          <p:cNvPr id="32" name="TextBox 31"/>
+          <p:cNvSpPr txBox="1"/>
+          <p:nvPr/>
+        </p:nvSpPr>
+        <p:spPr>
+          <a:xfrm>
+            <a:off x="594360" y="6035040"/>
+            <a:ext cx="10972800" cy="256032"/>
+          </a:xfrm>
+          <a:prstGeom prst="rect">
+            <a:avLst/>
+          </a:prstGeom>
+          <a:noFill/>
+        </p:spPr>
+        <p:txBody>
+          <a:bodyPr wrap="square" anchor="t" lIns="0" rIns="0" tIns="0" bIns="0">
+            <a:spAutoFit/>
+          </a:bodyPr>
+          <a:lstStyle/>
+          <a:p>
+            <a:pPr algn="l">
+              <a:lnSpc>
+                <a:spcPct val="108000"/>
+              </a:lnSpc>
+              <a:spcAft>
+                <a:spcPts val="300"/>
+              </a:spcAft>
+            </a:pPr>
+            <a:r>
               <a:rPr sz="900" b="0" i="1">
                 <a:solidFill>
                   <a:srgbClr val="606383"/>
                 </a:solidFill>
                 <a:latin typeface="Montserrat"/>
               </a:rPr>
-              <a:t>PONCHO: 17 % con cirugía diferida vs 5 % en el mismo ingreso. No afirmar «30 % en 3 meses» sin fuente.</a:t>
+              <a:t>APS: confirmar etiología y derivar. Cirugía en ingreso si cuadro leve; diferir ante necrosis/colecciones. Control clínico a 4–6 semanas.  •  Crédito: da Costa DW, et al. Lancet. 2015;386:1261–1268. doi:10.1016/S0140-6736(15)00274-3.</a:t>
             </a:r>
           </a:p>
         </p:txBody>
@@ -10899,18 +11158,62 @@
       </p:sp>
       <p:sp>
         <p:nvSpPr>
-          <p:cNvPr id="8" name="Rounded Rectangle 7"/>
+          <p:cNvPr id="8" name="Rectangle 7"/>
           <p:cNvSpPr/>
           <p:nvPr/>
         </p:nvSpPr>
         <p:spPr>
           <a:xfrm>
-            <a:off x="594360" y="1417320"/>
-            <a:ext cx="3108960" cy="788212"/>
+            <a:off x="914400" y="3657600"/>
+            <a:ext cx="10378440" cy="32004"/>
+          </a:xfrm>
+          <a:prstGeom prst="rect">
+            <a:avLst/>
+          </a:prstGeom>
+          <a:solidFill>
+            <a:srgbClr val="D92A2B"/>
+          </a:solidFill>
+          <a:ln>
+            <a:noFill/>
+          </a:ln>
+          <a:effectLst/>
+        </p:spPr>
+        <p:style>
+          <a:lnRef idx="1">
+            <a:schemeClr val="accent1"/>
+          </a:lnRef>
+          <a:fillRef idx="3">
+            <a:schemeClr val="accent1"/>
+          </a:fillRef>
+          <a:effectRef idx="2">
+            <a:schemeClr val="accent1"/>
+          </a:effectRef>
+          <a:fontRef idx="minor">
+            <a:schemeClr val="lt1"/>
+          </a:fontRef>
+        </p:style>
+        <p:txBody>
+          <a:bodyPr rtlCol="0" anchor="ctr"/>
+          <a:lstStyle/>
+          <a:p>
+            <a:pPr algn="ctr"/>
+          </a:p>
+        </p:txBody>
+      </p:sp>
+      <p:sp>
+        <p:nvSpPr>
+          <p:cNvPr id="9" name="Rounded Rectangle 8"/>
+          <p:cNvSpPr/>
+          <p:nvPr/>
+        </p:nvSpPr>
+        <p:spPr>
+          <a:xfrm>
+            <a:off x="1869948" y="3589020"/>
+            <a:ext cx="164592" cy="164592"/>
           </a:xfrm>
           <a:prstGeom prst="roundRect">
             <a:avLst>
-              <a:gd name="adj" fmla="val 4000"/>
+              <a:gd name="adj" fmla="val 50000"/>
             </a:avLst>
           </a:prstGeom>
           <a:solidFill>
@@ -10945,56 +11248,102 @@
       </p:sp>
       <p:sp>
         <p:nvSpPr>
-          <p:cNvPr id="9" name="TextBox 8"/>
-          <p:cNvSpPr txBox="1"/>
-          <p:nvPr/>
-        </p:nvSpPr>
-        <p:spPr>
-          <a:xfrm>
-            <a:off x="777240" y="1417320"/>
-            <a:ext cx="2743200" cy="788212"/>
-          </a:xfrm>
-          <a:prstGeom prst="rect">
+          <p:cNvPr id="10" name="Oval 9"/>
+          <p:cNvSpPr/>
+          <p:nvPr/>
+        </p:nvSpPr>
+        <p:spPr>
+          <a:xfrm>
+            <a:off x="1833372" y="3534156"/>
+            <a:ext cx="237744" cy="237744"/>
+          </a:xfrm>
+          <a:prstGeom prst="ellipse">
             <a:avLst/>
           </a:prstGeom>
           <a:noFill/>
-        </p:spPr>
-        <p:txBody>
-          <a:bodyPr wrap="square" anchor="ctr" lIns="0" rIns="0" tIns="0" bIns="0">
-            <a:spAutoFit/>
-          </a:bodyPr>
-          <a:lstStyle/>
-          <a:p>
-            <a:pPr algn="l">
-              <a:lnSpc>
-                <a:spcPct val="108000"/>
-              </a:lnSpc>
-              <a:spcAft>
-                <a:spcPts val="300"/>
-              </a:spcAft>
-            </a:pPr>
-            <a:r>
-              <a:rPr sz="1100" b="1" i="0">
-                <a:solidFill>
-                  <a:srgbClr val="FFFFFF"/>
-                </a:solidFill>
-                <a:latin typeface="Montserrat"/>
-              </a:rPr>
-              <a:t>ANTECEDENTE</a:t>
-            </a:r>
-          </a:p>
-        </p:txBody>
-      </p:sp>
-      <p:sp>
-        <p:nvSpPr>
-          <p:cNvPr id="10" name="Rounded Rectangle 9"/>
+          <a:ln w="19050">
+            <a:solidFill>
+              <a:srgbClr val="D92A2B"/>
+            </a:solidFill>
+          </a:ln>
+          <a:effectLst/>
+        </p:spPr>
+        <p:style>
+          <a:lnRef idx="1">
+            <a:schemeClr val="accent1"/>
+          </a:lnRef>
+          <a:fillRef idx="3">
+            <a:schemeClr val="accent1"/>
+          </a:fillRef>
+          <a:effectRef idx="2">
+            <a:schemeClr val="accent1"/>
+          </a:effectRef>
+          <a:fontRef idx="minor">
+            <a:schemeClr val="lt1"/>
+          </a:fontRef>
+        </p:style>
+        <p:txBody>
+          <a:bodyPr rtlCol="0" anchor="ctr"/>
+          <a:lstStyle/>
+          <a:p>
+            <a:pPr algn="ctr"/>
+          </a:p>
+        </p:txBody>
+      </p:sp>
+      <p:sp>
+        <p:nvSpPr>
+          <p:cNvPr id="11" name="Rectangle 10"/>
           <p:cNvSpPr/>
           <p:nvPr/>
         </p:nvSpPr>
         <p:spPr>
           <a:xfrm>
-            <a:off x="3794760" y="1417320"/>
-            <a:ext cx="7772400" cy="788212"/>
+            <a:off x="1943100" y="3429000"/>
+            <a:ext cx="18288" cy="146304"/>
+          </a:xfrm>
+          <a:prstGeom prst="rect">
+            <a:avLst/>
+          </a:prstGeom>
+          <a:solidFill>
+            <a:srgbClr val="D9DDF2"/>
+          </a:solidFill>
+          <a:ln>
+            <a:noFill/>
+          </a:ln>
+          <a:effectLst/>
+        </p:spPr>
+        <p:style>
+          <a:lnRef idx="1">
+            <a:schemeClr val="accent1"/>
+          </a:lnRef>
+          <a:fillRef idx="3">
+            <a:schemeClr val="accent1"/>
+          </a:fillRef>
+          <a:effectRef idx="2">
+            <a:schemeClr val="accent1"/>
+          </a:effectRef>
+          <a:fontRef idx="minor">
+            <a:schemeClr val="lt1"/>
+          </a:fontRef>
+        </p:style>
+        <p:txBody>
+          <a:bodyPr rtlCol="0" anchor="ctr"/>
+          <a:lstStyle/>
+          <a:p>
+            <a:pPr algn="ctr"/>
+          </a:p>
+        </p:txBody>
+      </p:sp>
+      <p:sp>
+        <p:nvSpPr>
+          <p:cNvPr id="12" name="Rounded Rectangle 11"/>
+          <p:cNvSpPr/>
+          <p:nvPr/>
+        </p:nvSpPr>
+        <p:spPr>
+          <a:xfrm>
+            <a:off x="1051560" y="1554480"/>
+            <a:ext cx="1801368" cy="1874519"/>
           </a:xfrm>
           <a:prstGeom prst="roundRect">
             <a:avLst>
@@ -11035,14 +11384,58 @@
       </p:sp>
       <p:sp>
         <p:nvSpPr>
-          <p:cNvPr id="11" name="TextBox 10"/>
+          <p:cNvPr id="13" name="Rectangle 12"/>
+          <p:cNvSpPr/>
+          <p:nvPr/>
+        </p:nvSpPr>
+        <p:spPr>
+          <a:xfrm>
+            <a:off x="1051560" y="1554480"/>
+            <a:ext cx="1801368" cy="45720"/>
+          </a:xfrm>
+          <a:prstGeom prst="rect">
+            <a:avLst/>
+          </a:prstGeom>
+          <a:solidFill>
+            <a:srgbClr val="D92A2B"/>
+          </a:solidFill>
+          <a:ln>
+            <a:noFill/>
+          </a:ln>
+          <a:effectLst/>
+        </p:spPr>
+        <p:style>
+          <a:lnRef idx="1">
+            <a:schemeClr val="accent1"/>
+          </a:lnRef>
+          <a:fillRef idx="3">
+            <a:schemeClr val="accent1"/>
+          </a:fillRef>
+          <a:effectRef idx="2">
+            <a:schemeClr val="accent1"/>
+          </a:effectRef>
+          <a:fontRef idx="minor">
+            <a:schemeClr val="lt1"/>
+          </a:fontRef>
+        </p:style>
+        <p:txBody>
+          <a:bodyPr rtlCol="0" anchor="ctr"/>
+          <a:lstStyle/>
+          <a:p>
+            <a:pPr algn="ctr"/>
+          </a:p>
+        </p:txBody>
+      </p:sp>
+      <p:sp>
+        <p:nvSpPr>
+          <p:cNvPr id="14" name="TextBox 13"/>
           <p:cNvSpPr txBox="1"/>
           <p:nvPr/>
         </p:nvSpPr>
         <p:spPr>
           <a:xfrm>
-            <a:off x="3977639" y="1417320"/>
-            <a:ext cx="7406640" cy="788212"/>
+            <a:off x="1188719" y="1691640"/>
+            <a:ext cx="1527048" cy="1600199"/>
           </a:xfrm>
           <a:prstGeom prst="rect">
             <a:avLst/>
@@ -11050,45 +11443,92 @@
           <a:noFill/>
         </p:spPr>
         <p:txBody>
-          <a:bodyPr wrap="square" anchor="ctr" lIns="0" rIns="0" tIns="0" bIns="0">
+          <a:bodyPr wrap="square" anchor="t" lIns="0" rIns="0" tIns="0" bIns="0">
             <a:spAutoFit/>
           </a:bodyPr>
           <a:lstStyle/>
           <a:p>
             <a:pPr algn="l">
               <a:lnSpc>
-                <a:spcPct val="110000"/>
-              </a:lnSpc>
+                <a:spcPct val="108000"/>
+              </a:lnSpc>
+              <a:spcBef>
+                <a:spcPts val="0"/>
+              </a:spcBef>
+              <a:spcAft>
+                <a:spcPts val="200"/>
+              </a:spcAft>
+            </a:pPr>
+            <a:r>
+              <a:rPr sz="950" b="1" i="0">
+                <a:solidFill>
+                  <a:srgbClr val="CA2728"/>
+                </a:solidFill>
+                <a:latin typeface="Montserrat"/>
+              </a:rPr>
+              <a:t>Antecedente</a:t>
+            </a:r>
+          </a:p>
+          <a:p>
+            <a:pPr algn="l">
+              <a:lnSpc>
+                <a:spcPct val="108000"/>
+              </a:lnSpc>
+              <a:spcBef>
+                <a:spcPts val="0"/>
+              </a:spcBef>
               <a:spcAft>
                 <a:spcPts val="300"/>
               </a:spcAft>
             </a:pPr>
             <a:r>
-              <a:rPr sz="1150" b="0" i="0">
+              <a:rPr sz="1200" b="1" i="0">
+                <a:solidFill>
+                  <a:srgbClr val="3854CC"/>
+                </a:solidFill>
+                <a:latin typeface="Montserrat"/>
+              </a:rPr>
+              <a:t>Enfermedad vesicular</a:t>
+            </a:r>
+          </a:p>
+          <a:p>
+            <a:pPr algn="l">
+              <a:lnSpc>
+                <a:spcPct val="105000"/>
+              </a:lnSpc>
+              <a:spcBef>
+                <a:spcPts val="0"/>
+              </a:spcBef>
+              <a:spcAft>
+                <a:spcPts val="300"/>
+              </a:spcAft>
+            </a:pPr>
+            <a:r>
+              <a:rPr sz="930" b="0" i="0">
                 <a:solidFill>
                   <a:srgbClr val="2B2C4A"/>
                 </a:solidFill>
                 <a:latin typeface="Montserrat"/>
               </a:rPr>
-              <a:t>Enfermedad vesicular de larga evolución.</a:t>
-            </a:r>
-          </a:p>
-        </p:txBody>
-      </p:sp>
-      <p:sp>
-        <p:nvSpPr>
-          <p:cNvPr id="12" name="Rounded Rectangle 11"/>
+              <a:t>Mujer de 38 años; enfermedad vesicular de larga evolución.</a:t>
+            </a:r>
+          </a:p>
+        </p:txBody>
+      </p:sp>
+      <p:sp>
+        <p:nvSpPr>
+          <p:cNvPr id="15" name="Rounded Rectangle 14"/>
           <p:cNvSpPr/>
           <p:nvPr/>
         </p:nvSpPr>
         <p:spPr>
           <a:xfrm>
-            <a:off x="594360" y="2351836"/>
-            <a:ext cx="3108960" cy="788212"/>
+            <a:off x="3945636" y="3589020"/>
+            <a:ext cx="164592" cy="164592"/>
           </a:xfrm>
           <a:prstGeom prst="roundRect">
             <a:avLst>
-              <a:gd name="adj" fmla="val 4000"/>
+              <a:gd name="adj" fmla="val 50000"/>
             </a:avLst>
           </a:prstGeom>
           <a:solidFill>
@@ -11123,56 +11563,58 @@
       </p:sp>
       <p:sp>
         <p:nvSpPr>
-          <p:cNvPr id="13" name="TextBox 12"/>
-          <p:cNvSpPr txBox="1"/>
-          <p:nvPr/>
-        </p:nvSpPr>
-        <p:spPr>
-          <a:xfrm>
-            <a:off x="777240" y="2351836"/>
-            <a:ext cx="2743200" cy="788212"/>
-          </a:xfrm>
-          <a:prstGeom prst="rect">
-            <a:avLst/>
-          </a:prstGeom>
-          <a:noFill/>
-        </p:spPr>
-        <p:txBody>
-          <a:bodyPr wrap="square" anchor="ctr" lIns="0" rIns="0" tIns="0" bIns="0">
-            <a:spAutoFit/>
-          </a:bodyPr>
-          <a:lstStyle/>
-          <a:p>
-            <a:pPr algn="l">
-              <a:lnSpc>
-                <a:spcPct val="108000"/>
-              </a:lnSpc>
-              <a:spcAft>
-                <a:spcPts val="300"/>
-              </a:spcAft>
-            </a:pPr>
-            <a:r>
-              <a:rPr sz="1100" b="1" i="0">
-                <a:solidFill>
-                  <a:srgbClr val="FFFFFF"/>
-                </a:solidFill>
-                <a:latin typeface="Montserrat"/>
-              </a:rPr>
-              <a:t>DOLOR Y EXAMEN</a:t>
-            </a:r>
-          </a:p>
-        </p:txBody>
-      </p:sp>
-      <p:sp>
-        <p:nvSpPr>
-          <p:cNvPr id="14" name="Rounded Rectangle 13"/>
+          <p:cNvPr id="16" name="Rectangle 15"/>
           <p:cNvSpPr/>
           <p:nvPr/>
         </p:nvSpPr>
         <p:spPr>
           <a:xfrm>
-            <a:off x="3794760" y="2351836"/>
-            <a:ext cx="7772400" cy="788212"/>
+            <a:off x="4018788" y="3758184"/>
+            <a:ext cx="18288" cy="128015"/>
+          </a:xfrm>
+          <a:prstGeom prst="rect">
+            <a:avLst/>
+          </a:prstGeom>
+          <a:solidFill>
+            <a:srgbClr val="D9DDF2"/>
+          </a:solidFill>
+          <a:ln>
+            <a:noFill/>
+          </a:ln>
+          <a:effectLst/>
+        </p:spPr>
+        <p:style>
+          <a:lnRef idx="1">
+            <a:schemeClr val="accent1"/>
+          </a:lnRef>
+          <a:fillRef idx="3">
+            <a:schemeClr val="accent1"/>
+          </a:fillRef>
+          <a:effectRef idx="2">
+            <a:schemeClr val="accent1"/>
+          </a:effectRef>
+          <a:fontRef idx="minor">
+            <a:schemeClr val="lt1"/>
+          </a:fontRef>
+        </p:style>
+        <p:txBody>
+          <a:bodyPr rtlCol="0" anchor="ctr"/>
+          <a:lstStyle/>
+          <a:p>
+            <a:pPr algn="ctr"/>
+          </a:p>
+        </p:txBody>
+      </p:sp>
+      <p:sp>
+        <p:nvSpPr>
+          <p:cNvPr id="17" name="Rounded Rectangle 16"/>
+          <p:cNvSpPr/>
+          <p:nvPr/>
+        </p:nvSpPr>
+        <p:spPr>
+          <a:xfrm>
+            <a:off x="3127248" y="3886200"/>
+            <a:ext cx="1801368" cy="1874519"/>
           </a:xfrm>
           <a:prstGeom prst="roundRect">
             <a:avLst>
@@ -11213,61 +11655,17 @@
       </p:sp>
       <p:sp>
         <p:nvSpPr>
-          <p:cNvPr id="15" name="TextBox 14"/>
-          <p:cNvSpPr txBox="1"/>
-          <p:nvPr/>
-        </p:nvSpPr>
-        <p:spPr>
-          <a:xfrm>
-            <a:off x="3977639" y="2351836"/>
-            <a:ext cx="7406640" cy="788212"/>
-          </a:xfrm>
-          <a:prstGeom prst="rect">
-            <a:avLst/>
-          </a:prstGeom>
-          <a:noFill/>
-        </p:spPr>
-        <p:txBody>
-          <a:bodyPr wrap="square" anchor="ctr" lIns="0" rIns="0" tIns="0" bIns="0">
-            <a:spAutoFit/>
-          </a:bodyPr>
-          <a:lstStyle/>
-          <a:p>
-            <a:pPr algn="l">
-              <a:lnSpc>
-                <a:spcPct val="110000"/>
-              </a:lnSpc>
-              <a:spcAft>
-                <a:spcPts val="300"/>
-              </a:spcAft>
-            </a:pPr>
-            <a:r>
-              <a:rPr sz="1150" b="0" i="0">
-                <a:solidFill>
-                  <a:srgbClr val="2B2C4A"/>
-                </a:solidFill>
-                <a:latin typeface="Montserrat"/>
-              </a:rPr>
-              <a:t>Dolor medio, súbito e intenso; hipersensibilidad superior y ruidos intestinales reducidos.</a:t>
-            </a:r>
-          </a:p>
-        </p:txBody>
-      </p:sp>
-      <p:sp>
-        <p:nvSpPr>
-          <p:cNvPr id="16" name="Rounded Rectangle 15"/>
+          <p:cNvPr id="18" name="Rectangle 17"/>
           <p:cNvSpPr/>
           <p:nvPr/>
         </p:nvSpPr>
         <p:spPr>
           <a:xfrm>
-            <a:off x="594360" y="3286353"/>
-            <a:ext cx="3108960" cy="788212"/>
-          </a:xfrm>
-          <a:prstGeom prst="roundRect">
-            <a:avLst>
-              <a:gd name="adj" fmla="val 4000"/>
-            </a:avLst>
+            <a:off x="3127248" y="3886200"/>
+            <a:ext cx="1801368" cy="45720"/>
+          </a:xfrm>
+          <a:prstGeom prst="rect">
+            <a:avLst/>
           </a:prstGeom>
           <a:solidFill>
             <a:srgbClr val="3854CC"/>
@@ -11301,14 +11699,14 @@
       </p:sp>
       <p:sp>
         <p:nvSpPr>
-          <p:cNvPr id="17" name="TextBox 16"/>
+          <p:cNvPr id="19" name="TextBox 18"/>
           <p:cNvSpPr txBox="1"/>
           <p:nvPr/>
         </p:nvSpPr>
         <p:spPr>
           <a:xfrm>
-            <a:off x="777240" y="3286353"/>
-            <a:ext cx="2743200" cy="788212"/>
+            <a:off x="3264408" y="4023360"/>
+            <a:ext cx="1527048" cy="1600199"/>
           </a:xfrm>
           <a:prstGeom prst="rect">
             <a:avLst/>
@@ -11316,7 +11714,7 @@
           <a:noFill/>
         </p:spPr>
         <p:txBody>
-          <a:bodyPr wrap="square" anchor="ctr" lIns="0" rIns="0" tIns="0" bIns="0">
+          <a:bodyPr wrap="square" anchor="t" lIns="0" rIns="0" tIns="0" bIns="0">
             <a:spAutoFit/>
           </a:bodyPr>
           <a:lstStyle/>
@@ -11325,32 +11723,169 @@
               <a:lnSpc>
                 <a:spcPct val="108000"/>
               </a:lnSpc>
+              <a:spcBef>
+                <a:spcPts val="0"/>
+              </a:spcBef>
+              <a:spcAft>
+                <a:spcPts val="200"/>
+              </a:spcAft>
+            </a:pPr>
+            <a:r>
+              <a:rPr sz="950" b="1" i="0">
+                <a:solidFill>
+                  <a:srgbClr val="CA2728"/>
+                </a:solidFill>
+                <a:latin typeface="Montserrat"/>
+              </a:rPr>
+              <a:t>Inicio</a:t>
+            </a:r>
+          </a:p>
+          <a:p>
+            <a:pPr algn="l">
+              <a:lnSpc>
+                <a:spcPct val="108000"/>
+              </a:lnSpc>
+              <a:spcBef>
+                <a:spcPts val="0"/>
+              </a:spcBef>
               <a:spcAft>
                 <a:spcPts val="300"/>
               </a:spcAft>
             </a:pPr>
             <a:r>
-              <a:rPr sz="1100" b="1" i="0">
-                <a:solidFill>
-                  <a:srgbClr val="FFFFFF"/>
-                </a:solidFill>
-                <a:latin typeface="Montserrat"/>
-              </a:rPr>
-              <a:t>RADIOGRAFÍA</a:t>
-            </a:r>
-          </a:p>
-        </p:txBody>
-      </p:sp>
-      <p:sp>
-        <p:nvSpPr>
-          <p:cNvPr id="18" name="Rounded Rectangle 17"/>
+              <a:rPr sz="1200" b="1" i="0">
+                <a:solidFill>
+                  <a:srgbClr val="3854CC"/>
+                </a:solidFill>
+                <a:latin typeface="Montserrat"/>
+              </a:rPr>
+              <a:t>Dolor abdominal</a:t>
+            </a:r>
+          </a:p>
+          <a:p>
+            <a:pPr algn="l">
+              <a:lnSpc>
+                <a:spcPct val="105000"/>
+              </a:lnSpc>
+              <a:spcBef>
+                <a:spcPts val="0"/>
+              </a:spcBef>
+              <a:spcAft>
+                <a:spcPts val="300"/>
+              </a:spcAft>
+            </a:pPr>
+            <a:r>
+              <a:rPr sz="930" b="0" i="0">
+                <a:solidFill>
+                  <a:srgbClr val="2B2C4A"/>
+                </a:solidFill>
+                <a:latin typeface="Montserrat"/>
+              </a:rPr>
+              <a:t>Súbito, intenso y en abdomen medio.</a:t>
+            </a:r>
+          </a:p>
+        </p:txBody>
+      </p:sp>
+      <p:sp>
+        <p:nvSpPr>
+          <p:cNvPr id="20" name="Rounded Rectangle 19"/>
           <p:cNvSpPr/>
           <p:nvPr/>
         </p:nvSpPr>
         <p:spPr>
           <a:xfrm>
-            <a:off x="3794760" y="3286353"/>
-            <a:ext cx="7772400" cy="788212"/>
+            <a:off x="6021324" y="3589020"/>
+            <a:ext cx="164592" cy="164592"/>
+          </a:xfrm>
+          <a:prstGeom prst="roundRect">
+            <a:avLst>
+              <a:gd name="adj" fmla="val 50000"/>
+            </a:avLst>
+          </a:prstGeom>
+          <a:solidFill>
+            <a:srgbClr val="3854CC"/>
+          </a:solidFill>
+          <a:ln>
+            <a:noFill/>
+          </a:ln>
+          <a:effectLst/>
+        </p:spPr>
+        <p:style>
+          <a:lnRef idx="1">
+            <a:schemeClr val="accent1"/>
+          </a:lnRef>
+          <a:fillRef idx="3">
+            <a:schemeClr val="accent1"/>
+          </a:fillRef>
+          <a:effectRef idx="2">
+            <a:schemeClr val="accent1"/>
+          </a:effectRef>
+          <a:fontRef idx="minor">
+            <a:schemeClr val="lt1"/>
+          </a:fontRef>
+        </p:style>
+        <p:txBody>
+          <a:bodyPr rtlCol="0" anchor="ctr"/>
+          <a:lstStyle/>
+          <a:p>
+            <a:pPr algn="ctr"/>
+          </a:p>
+        </p:txBody>
+      </p:sp>
+      <p:sp>
+        <p:nvSpPr>
+          <p:cNvPr id="21" name="Rectangle 20"/>
+          <p:cNvSpPr/>
+          <p:nvPr/>
+        </p:nvSpPr>
+        <p:spPr>
+          <a:xfrm>
+            <a:off x="6094476" y="3429000"/>
+            <a:ext cx="18288" cy="146304"/>
+          </a:xfrm>
+          <a:prstGeom prst="rect">
+            <a:avLst/>
+          </a:prstGeom>
+          <a:solidFill>
+            <a:srgbClr val="D9DDF2"/>
+          </a:solidFill>
+          <a:ln>
+            <a:noFill/>
+          </a:ln>
+          <a:effectLst/>
+        </p:spPr>
+        <p:style>
+          <a:lnRef idx="1">
+            <a:schemeClr val="accent1"/>
+          </a:lnRef>
+          <a:fillRef idx="3">
+            <a:schemeClr val="accent1"/>
+          </a:fillRef>
+          <a:effectRef idx="2">
+            <a:schemeClr val="accent1"/>
+          </a:effectRef>
+          <a:fontRef idx="minor">
+            <a:schemeClr val="lt1"/>
+          </a:fontRef>
+        </p:style>
+        <p:txBody>
+          <a:bodyPr rtlCol="0" anchor="ctr"/>
+          <a:lstStyle/>
+          <a:p>
+            <a:pPr algn="ctr"/>
+          </a:p>
+        </p:txBody>
+      </p:sp>
+      <p:sp>
+        <p:nvSpPr>
+          <p:cNvPr id="22" name="Rounded Rectangle 21"/>
+          <p:cNvSpPr/>
+          <p:nvPr/>
+        </p:nvSpPr>
+        <p:spPr>
+          <a:xfrm>
+            <a:off x="5202936" y="1554480"/>
+            <a:ext cx="1801368" cy="1874519"/>
           </a:xfrm>
           <a:prstGeom prst="roundRect">
             <a:avLst>
@@ -11391,14 +11926,58 @@
       </p:sp>
       <p:sp>
         <p:nvSpPr>
-          <p:cNvPr id="19" name="TextBox 18"/>
+          <p:cNvPr id="23" name="Rectangle 22"/>
+          <p:cNvSpPr/>
+          <p:nvPr/>
+        </p:nvSpPr>
+        <p:spPr>
+          <a:xfrm>
+            <a:off x="5202936" y="1554480"/>
+            <a:ext cx="1801368" cy="45720"/>
+          </a:xfrm>
+          <a:prstGeom prst="rect">
+            <a:avLst/>
+          </a:prstGeom>
+          <a:solidFill>
+            <a:srgbClr val="D92A2B"/>
+          </a:solidFill>
+          <a:ln>
+            <a:noFill/>
+          </a:ln>
+          <a:effectLst/>
+        </p:spPr>
+        <p:style>
+          <a:lnRef idx="1">
+            <a:schemeClr val="accent1"/>
+          </a:lnRef>
+          <a:fillRef idx="3">
+            <a:schemeClr val="accent1"/>
+          </a:fillRef>
+          <a:effectRef idx="2">
+            <a:schemeClr val="accent1"/>
+          </a:effectRef>
+          <a:fontRef idx="minor">
+            <a:schemeClr val="lt1"/>
+          </a:fontRef>
+        </p:style>
+        <p:txBody>
+          <a:bodyPr rtlCol="0" anchor="ctr"/>
+          <a:lstStyle/>
+          <a:p>
+            <a:pPr algn="ctr"/>
+          </a:p>
+        </p:txBody>
+      </p:sp>
+      <p:sp>
+        <p:nvSpPr>
+          <p:cNvPr id="24" name="TextBox 23"/>
           <p:cNvSpPr txBox="1"/>
           <p:nvPr/>
         </p:nvSpPr>
         <p:spPr>
           <a:xfrm>
-            <a:off x="3977639" y="3286353"/>
-            <a:ext cx="7406640" cy="788212"/>
+            <a:off x="5340096" y="1691640"/>
+            <a:ext cx="1527048" cy="1600199"/>
           </a:xfrm>
           <a:prstGeom prst="rect">
             <a:avLst/>
@@ -11406,45 +11985,92 @@
           <a:noFill/>
         </p:spPr>
         <p:txBody>
-          <a:bodyPr wrap="square" anchor="ctr" lIns="0" rIns="0" tIns="0" bIns="0">
+          <a:bodyPr wrap="square" anchor="t" lIns="0" rIns="0" tIns="0" bIns="0">
             <a:spAutoFit/>
           </a:bodyPr>
           <a:lstStyle/>
           <a:p>
             <a:pPr algn="l">
               <a:lnSpc>
-                <a:spcPct val="110000"/>
-              </a:lnSpc>
+                <a:spcPct val="108000"/>
+              </a:lnSpc>
+              <a:spcBef>
+                <a:spcPts val="0"/>
+              </a:spcBef>
+              <a:spcAft>
+                <a:spcPts val="200"/>
+              </a:spcAft>
+            </a:pPr>
+            <a:r>
+              <a:rPr sz="950" b="1" i="0">
+                <a:solidFill>
+                  <a:srgbClr val="CA2728"/>
+                </a:solidFill>
+                <a:latin typeface="Montserrat"/>
+              </a:rPr>
+              <a:t>Examen</a:t>
+            </a:r>
+          </a:p>
+          <a:p>
+            <a:pPr algn="l">
+              <a:lnSpc>
+                <a:spcPct val="108000"/>
+              </a:lnSpc>
+              <a:spcBef>
+                <a:spcPts val="0"/>
+              </a:spcBef>
               <a:spcAft>
                 <a:spcPts val="300"/>
               </a:spcAft>
             </a:pPr>
             <a:r>
-              <a:rPr sz="1150" b="0" i="0">
+              <a:rPr sz="1200" b="1" i="0">
+                <a:solidFill>
+                  <a:srgbClr val="3854CC"/>
+                </a:solidFill>
+                <a:latin typeface="Montserrat"/>
+              </a:rPr>
+              <a:t>Hipersensibilidad</a:t>
+            </a:r>
+          </a:p>
+          <a:p>
+            <a:pPr algn="l">
+              <a:lnSpc>
+                <a:spcPct val="105000"/>
+              </a:lnSpc>
+              <a:spcBef>
+                <a:spcPts val="0"/>
+              </a:spcBef>
+              <a:spcAft>
+                <a:spcPts val="300"/>
+              </a:spcAft>
+            </a:pPr>
+            <a:r>
+              <a:rPr sz="930" b="0" i="0">
                 <a:solidFill>
                   <a:srgbClr val="2B2C4A"/>
                 </a:solidFill>
                 <a:latin typeface="Montserrat"/>
               </a:rPr>
-              <a:t>Sin aire libre; edema marcado de tejidos blandos.</a:t>
-            </a:r>
-          </a:p>
-        </p:txBody>
-      </p:sp>
-      <p:sp>
-        <p:nvSpPr>
-          <p:cNvPr id="20" name="Rounded Rectangle 19"/>
+              <a:t>Marcada en abdomen superior; ruidos intestinales reducidos.</a:t>
+            </a:r>
+          </a:p>
+        </p:txBody>
+      </p:sp>
+      <p:sp>
+        <p:nvSpPr>
+          <p:cNvPr id="25" name="Rounded Rectangle 24"/>
           <p:cNvSpPr/>
           <p:nvPr/>
         </p:nvSpPr>
         <p:spPr>
           <a:xfrm>
-            <a:off x="594360" y="4220870"/>
-            <a:ext cx="3108960" cy="788212"/>
+            <a:off x="8097012" y="3589020"/>
+            <a:ext cx="164592" cy="164592"/>
           </a:xfrm>
           <a:prstGeom prst="roundRect">
             <a:avLst>
-              <a:gd name="adj" fmla="val 4000"/>
+              <a:gd name="adj" fmla="val 50000"/>
             </a:avLst>
           </a:prstGeom>
           <a:solidFill>
@@ -11479,56 +12105,58 @@
       </p:sp>
       <p:sp>
         <p:nvSpPr>
-          <p:cNvPr id="21" name="TextBox 20"/>
-          <p:cNvSpPr txBox="1"/>
-          <p:nvPr/>
-        </p:nvSpPr>
-        <p:spPr>
-          <a:xfrm>
-            <a:off x="777240" y="4220870"/>
-            <a:ext cx="2743200" cy="788212"/>
-          </a:xfrm>
-          <a:prstGeom prst="rect">
-            <a:avLst/>
-          </a:prstGeom>
-          <a:noFill/>
-        </p:spPr>
-        <p:txBody>
-          <a:bodyPr wrap="square" anchor="ctr" lIns="0" rIns="0" tIns="0" bIns="0">
-            <a:spAutoFit/>
-          </a:bodyPr>
-          <a:lstStyle/>
-          <a:p>
-            <a:pPr algn="l">
-              <a:lnSpc>
-                <a:spcPct val="108000"/>
-              </a:lnSpc>
-              <a:spcAft>
-                <a:spcPts val="300"/>
-              </a:spcAft>
-            </a:pPr>
-            <a:r>
-              <a:rPr sz="1100" b="1" i="0">
-                <a:solidFill>
-                  <a:srgbClr val="FFFFFF"/>
-                </a:solidFill>
-                <a:latin typeface="Montserrat"/>
-              </a:rPr>
-              <a:t>TC Y LIPASA</a:t>
-            </a:r>
-          </a:p>
-        </p:txBody>
-      </p:sp>
-      <p:sp>
-        <p:nvSpPr>
-          <p:cNvPr id="22" name="Rounded Rectangle 21"/>
+          <p:cNvPr id="26" name="Rectangle 25"/>
           <p:cNvSpPr/>
           <p:nvPr/>
         </p:nvSpPr>
         <p:spPr>
           <a:xfrm>
-            <a:off x="3794760" y="4220870"/>
-            <a:ext cx="7772400" cy="788212"/>
+            <a:off x="8170164" y="3758184"/>
+            <a:ext cx="18288" cy="128015"/>
+          </a:xfrm>
+          <a:prstGeom prst="rect">
+            <a:avLst/>
+          </a:prstGeom>
+          <a:solidFill>
+            <a:srgbClr val="D9DDF2"/>
+          </a:solidFill>
+          <a:ln>
+            <a:noFill/>
+          </a:ln>
+          <a:effectLst/>
+        </p:spPr>
+        <p:style>
+          <a:lnRef idx="1">
+            <a:schemeClr val="accent1"/>
+          </a:lnRef>
+          <a:fillRef idx="3">
+            <a:schemeClr val="accent1"/>
+          </a:fillRef>
+          <a:effectRef idx="2">
+            <a:schemeClr val="accent1"/>
+          </a:effectRef>
+          <a:fontRef idx="minor">
+            <a:schemeClr val="lt1"/>
+          </a:fontRef>
+        </p:style>
+        <p:txBody>
+          <a:bodyPr rtlCol="0" anchor="ctr"/>
+          <a:lstStyle/>
+          <a:p>
+            <a:pPr algn="ctr"/>
+          </a:p>
+        </p:txBody>
+      </p:sp>
+      <p:sp>
+        <p:nvSpPr>
+          <p:cNvPr id="27" name="Rounded Rectangle 26"/>
+          <p:cNvSpPr/>
+          <p:nvPr/>
+        </p:nvSpPr>
+        <p:spPr>
+          <a:xfrm>
+            <a:off x="7278624" y="3886200"/>
+            <a:ext cx="1801368" cy="1874519"/>
           </a:xfrm>
           <a:prstGeom prst="roundRect">
             <a:avLst>
@@ -11569,61 +12197,17 @@
       </p:sp>
       <p:sp>
         <p:nvSpPr>
-          <p:cNvPr id="23" name="TextBox 22"/>
-          <p:cNvSpPr txBox="1"/>
-          <p:nvPr/>
-        </p:nvSpPr>
-        <p:spPr>
-          <a:xfrm>
-            <a:off x="3977639" y="4220870"/>
-            <a:ext cx="7406640" cy="788212"/>
-          </a:xfrm>
-          <a:prstGeom prst="rect">
-            <a:avLst/>
-          </a:prstGeom>
-          <a:noFill/>
-        </p:spPr>
-        <p:txBody>
-          <a:bodyPr wrap="square" anchor="ctr" lIns="0" rIns="0" tIns="0" bIns="0">
-            <a:spAutoFit/>
-          </a:bodyPr>
-          <a:lstStyle/>
-          <a:p>
-            <a:pPr algn="l">
-              <a:lnSpc>
-                <a:spcPct val="110000"/>
-              </a:lnSpc>
-              <a:spcAft>
-                <a:spcPts val="300"/>
-              </a:spcAft>
-            </a:pPr>
-            <a:r>
-              <a:rPr sz="1150" b="0" i="0">
-                <a:solidFill>
-                  <a:srgbClr val="2B2C4A"/>
-                </a:solidFill>
-                <a:latin typeface="Montserrat"/>
-              </a:rPr>
-              <a:t>Menor atenuación y densidad líquida pancreática; lipasa elevada, sin valor informado.</a:t>
-            </a:r>
-          </a:p>
-        </p:txBody>
-      </p:sp>
-      <p:sp>
-        <p:nvSpPr>
-          <p:cNvPr id="24" name="Rounded Rectangle 23"/>
+          <p:cNvPr id="28" name="Rectangle 27"/>
           <p:cNvSpPr/>
           <p:nvPr/>
         </p:nvSpPr>
         <p:spPr>
           <a:xfrm>
-            <a:off x="594360" y="5155387"/>
-            <a:ext cx="3108960" cy="788212"/>
-          </a:xfrm>
-          <a:prstGeom prst="roundRect">
-            <a:avLst>
-              <a:gd name="adj" fmla="val 4000"/>
-            </a:avLst>
+            <a:off x="7278624" y="3886200"/>
+            <a:ext cx="1801368" cy="45720"/>
+          </a:xfrm>
+          <a:prstGeom prst="rect">
+            <a:avLst/>
           </a:prstGeom>
           <a:solidFill>
             <a:srgbClr val="3854CC"/>
@@ -11657,14 +12241,14 @@
       </p:sp>
       <p:sp>
         <p:nvSpPr>
-          <p:cNvPr id="25" name="TextBox 24"/>
+          <p:cNvPr id="29" name="TextBox 28"/>
           <p:cNvSpPr txBox="1"/>
           <p:nvPr/>
         </p:nvSpPr>
         <p:spPr>
           <a:xfrm>
-            <a:off x="777240" y="5155387"/>
-            <a:ext cx="2743200" cy="788212"/>
+            <a:off x="7415783" y="4023360"/>
+            <a:ext cx="1527048" cy="1600199"/>
           </a:xfrm>
           <a:prstGeom prst="rect">
             <a:avLst/>
@@ -11672,7 +12256,7 @@
           <a:noFill/>
         </p:spPr>
         <p:txBody>
-          <a:bodyPr wrap="square" anchor="ctr" lIns="0" rIns="0" tIns="0" bIns="0">
+          <a:bodyPr wrap="square" anchor="t" lIns="0" rIns="0" tIns="0" bIns="0">
             <a:spAutoFit/>
           </a:bodyPr>
           <a:lstStyle/>
@@ -11681,32 +12265,169 @@
               <a:lnSpc>
                 <a:spcPct val="108000"/>
               </a:lnSpc>
+              <a:spcBef>
+                <a:spcPts val="0"/>
+              </a:spcBef>
+              <a:spcAft>
+                <a:spcPts val="200"/>
+              </a:spcAft>
+            </a:pPr>
+            <a:r>
+              <a:rPr sz="950" b="1" i="0">
+                <a:solidFill>
+                  <a:srgbClr val="CA2728"/>
+                </a:solidFill>
+                <a:latin typeface="Montserrat"/>
+              </a:rPr>
+              <a:t>Rx / TC</a:t>
+            </a:r>
+          </a:p>
+          <a:p>
+            <a:pPr algn="l">
+              <a:lnSpc>
+                <a:spcPct val="108000"/>
+              </a:lnSpc>
+              <a:spcBef>
+                <a:spcPts val="0"/>
+              </a:spcBef>
               <a:spcAft>
                 <a:spcPts val="300"/>
               </a:spcAft>
             </a:pPr>
             <a:r>
-              <a:rPr sz="1100" b="1" i="0">
-                <a:solidFill>
-                  <a:srgbClr val="FFFFFF"/>
-                </a:solidFill>
-                <a:latin typeface="Montserrat"/>
-              </a:rPr>
-              <a:t>MANEJO Y EVOLUCIÓN</a:t>
-            </a:r>
-          </a:p>
-        </p:txBody>
-      </p:sp>
-      <p:sp>
-        <p:nvSpPr>
-          <p:cNvPr id="26" name="Rounded Rectangle 25"/>
+              <a:rPr sz="1200" b="1" i="0">
+                <a:solidFill>
+                  <a:srgbClr val="3854CC"/>
+                </a:solidFill>
+                <a:latin typeface="Montserrat"/>
+              </a:rPr>
+              <a:t>Edema marcado de tejidos blandos</a:t>
+            </a:r>
+          </a:p>
+          <a:p>
+            <a:pPr algn="l">
+              <a:lnSpc>
+                <a:spcPct val="105000"/>
+              </a:lnSpc>
+              <a:spcBef>
+                <a:spcPts val="0"/>
+              </a:spcBef>
+              <a:spcAft>
+                <a:spcPts val="300"/>
+              </a:spcAft>
+            </a:pPr>
+            <a:r>
+              <a:rPr sz="930" b="0" i="0">
+                <a:solidFill>
+                  <a:srgbClr val="2B2C4A"/>
+                </a:solidFill>
+                <a:latin typeface="Montserrat"/>
+              </a:rPr>
+              <a:t>Rx sin aire libre; TC: menor atenuación, densidad líquida pancreática.</a:t>
+            </a:r>
+          </a:p>
+        </p:txBody>
+      </p:sp>
+      <p:sp>
+        <p:nvSpPr>
+          <p:cNvPr id="30" name="Rounded Rectangle 29"/>
           <p:cNvSpPr/>
           <p:nvPr/>
         </p:nvSpPr>
         <p:spPr>
           <a:xfrm>
-            <a:off x="3794760" y="5155387"/>
-            <a:ext cx="7772400" cy="788212"/>
+            <a:off x="10172700" y="3589020"/>
+            <a:ext cx="164592" cy="164592"/>
+          </a:xfrm>
+          <a:prstGeom prst="roundRect">
+            <a:avLst>
+              <a:gd name="adj" fmla="val 50000"/>
+            </a:avLst>
+          </a:prstGeom>
+          <a:solidFill>
+            <a:srgbClr val="3854CC"/>
+          </a:solidFill>
+          <a:ln>
+            <a:noFill/>
+          </a:ln>
+          <a:effectLst/>
+        </p:spPr>
+        <p:style>
+          <a:lnRef idx="1">
+            <a:schemeClr val="accent1"/>
+          </a:lnRef>
+          <a:fillRef idx="3">
+            <a:schemeClr val="accent1"/>
+          </a:fillRef>
+          <a:effectRef idx="2">
+            <a:schemeClr val="accent1"/>
+          </a:effectRef>
+          <a:fontRef idx="minor">
+            <a:schemeClr val="lt1"/>
+          </a:fontRef>
+        </p:style>
+        <p:txBody>
+          <a:bodyPr rtlCol="0" anchor="ctr"/>
+          <a:lstStyle/>
+          <a:p>
+            <a:pPr algn="ctr"/>
+          </a:p>
+        </p:txBody>
+      </p:sp>
+      <p:sp>
+        <p:nvSpPr>
+          <p:cNvPr id="31" name="Rectangle 30"/>
+          <p:cNvSpPr/>
+          <p:nvPr/>
+        </p:nvSpPr>
+        <p:spPr>
+          <a:xfrm>
+            <a:off x="10245852" y="3429000"/>
+            <a:ext cx="18288" cy="146304"/>
+          </a:xfrm>
+          <a:prstGeom prst="rect">
+            <a:avLst/>
+          </a:prstGeom>
+          <a:solidFill>
+            <a:srgbClr val="D9DDF2"/>
+          </a:solidFill>
+          <a:ln>
+            <a:noFill/>
+          </a:ln>
+          <a:effectLst/>
+        </p:spPr>
+        <p:style>
+          <a:lnRef idx="1">
+            <a:schemeClr val="accent1"/>
+          </a:lnRef>
+          <a:fillRef idx="3">
+            <a:schemeClr val="accent1"/>
+          </a:fillRef>
+          <a:effectRef idx="2">
+            <a:schemeClr val="accent1"/>
+          </a:effectRef>
+          <a:fontRef idx="minor">
+            <a:schemeClr val="lt1"/>
+          </a:fontRef>
+        </p:style>
+        <p:txBody>
+          <a:bodyPr rtlCol="0" anchor="ctr"/>
+          <a:lstStyle/>
+          <a:p>
+            <a:pPr algn="ctr"/>
+          </a:p>
+        </p:txBody>
+      </p:sp>
+      <p:sp>
+        <p:nvSpPr>
+          <p:cNvPr id="32" name="Rounded Rectangle 31"/>
+          <p:cNvSpPr/>
+          <p:nvPr/>
+        </p:nvSpPr>
+        <p:spPr>
+          <a:xfrm>
+            <a:off x="9354312" y="1554480"/>
+            <a:ext cx="1801368" cy="1874519"/>
           </a:xfrm>
           <a:prstGeom prst="roundRect">
             <a:avLst>
@@ -11747,56 +12468,58 @@
       </p:sp>
       <p:sp>
         <p:nvSpPr>
-          <p:cNvPr id="27" name="TextBox 26"/>
+          <p:cNvPr id="33" name="Rectangle 32"/>
+          <p:cNvSpPr/>
+          <p:nvPr/>
+        </p:nvSpPr>
+        <p:spPr>
+          <a:xfrm>
+            <a:off x="9354312" y="1554480"/>
+            <a:ext cx="1801368" cy="45720"/>
+          </a:xfrm>
+          <a:prstGeom prst="rect">
+            <a:avLst/>
+          </a:prstGeom>
+          <a:solidFill>
+            <a:srgbClr val="D92A2B"/>
+          </a:solidFill>
+          <a:ln>
+            <a:noFill/>
+          </a:ln>
+          <a:effectLst/>
+        </p:spPr>
+        <p:style>
+          <a:lnRef idx="1">
+            <a:schemeClr val="accent1"/>
+          </a:lnRef>
+          <a:fillRef idx="3">
+            <a:schemeClr val="accent1"/>
+          </a:fillRef>
+          <a:effectRef idx="2">
+            <a:schemeClr val="accent1"/>
+          </a:effectRef>
+          <a:fontRef idx="minor">
+            <a:schemeClr val="lt1"/>
+          </a:fontRef>
+        </p:style>
+        <p:txBody>
+          <a:bodyPr rtlCol="0" anchor="ctr"/>
+          <a:lstStyle/>
+          <a:p>
+            <a:pPr algn="ctr"/>
+          </a:p>
+        </p:txBody>
+      </p:sp>
+      <p:sp>
+        <p:nvSpPr>
+          <p:cNvPr id="34" name="TextBox 33"/>
           <p:cNvSpPr txBox="1"/>
           <p:nvPr/>
         </p:nvSpPr>
         <p:spPr>
           <a:xfrm>
-            <a:off x="3977639" y="5155387"/>
-            <a:ext cx="7406640" cy="788212"/>
-          </a:xfrm>
-          <a:prstGeom prst="rect">
-            <a:avLst/>
-          </a:prstGeom>
-          <a:noFill/>
-        </p:spPr>
-        <p:txBody>
-          <a:bodyPr wrap="square" anchor="ctr" lIns="0" rIns="0" tIns="0" bIns="0">
-            <a:spAutoFit/>
-          </a:bodyPr>
-          <a:lstStyle/>
-          <a:p>
-            <a:pPr algn="l">
-              <a:lnSpc>
-                <a:spcPct val="110000"/>
-              </a:lnSpc>
-              <a:spcAft>
-                <a:spcPts val="300"/>
-              </a:spcAft>
-            </a:pPr>
-            <a:r>
-              <a:rPr sz="1150" b="0" i="0">
-                <a:solidFill>
-                  <a:srgbClr val="2B2C4A"/>
-                </a:solidFill>
-                <a:latin typeface="Montserrat"/>
-              </a:rPr>
-              <a:t>Líquidos IV y sonda nasogástrica; recuperación gradual.</a:t>
-            </a:r>
-          </a:p>
-        </p:txBody>
-      </p:sp>
-      <p:sp>
-        <p:nvSpPr>
-          <p:cNvPr id="28" name="TextBox 27"/>
-          <p:cNvSpPr txBox="1"/>
-          <p:nvPr/>
-        </p:nvSpPr>
-        <p:spPr>
-          <a:xfrm>
-            <a:off x="594360" y="6053328"/>
-            <a:ext cx="10972800" cy="256032"/>
+            <a:off x="9491472" y="1691640"/>
+            <a:ext cx="1527048" cy="1600199"/>
           </a:xfrm>
           <a:prstGeom prst="rect">
             <a:avLst/>
@@ -11813,18 +12536,107 @@
               <a:lnSpc>
                 <a:spcPct val="108000"/>
               </a:lnSpc>
+              <a:spcBef>
+                <a:spcPts val="0"/>
+              </a:spcBef>
+              <a:spcAft>
+                <a:spcPts val="200"/>
+              </a:spcAft>
+            </a:pPr>
+            <a:r>
+              <a:rPr sz="950" b="1" i="0">
+                <a:solidFill>
+                  <a:srgbClr val="CA2728"/>
+                </a:solidFill>
+                <a:latin typeface="Montserrat"/>
+              </a:rPr>
+              <a:t>Manejo</a:t>
+            </a:r>
+          </a:p>
+          <a:p>
+            <a:pPr algn="l">
+              <a:lnSpc>
+                <a:spcPct val="108000"/>
+              </a:lnSpc>
+              <a:spcBef>
+                <a:spcPts val="0"/>
+              </a:spcBef>
               <a:spcAft>
                 <a:spcPts val="300"/>
               </a:spcAft>
             </a:pPr>
             <a:r>
+              <a:rPr sz="1200" b="1" i="0">
+                <a:solidFill>
+                  <a:srgbClr val="3854CC"/>
+                </a:solidFill>
+                <a:latin typeface="Montserrat"/>
+              </a:rPr>
+              <a:t>Lipasa elevada; recuperación gradual</a:t>
+            </a:r>
+          </a:p>
+          <a:p>
+            <a:pPr algn="l">
+              <a:lnSpc>
+                <a:spcPct val="105000"/>
+              </a:lnSpc>
+              <a:spcBef>
+                <a:spcPts val="0"/>
+              </a:spcBef>
+              <a:spcAft>
+                <a:spcPts val="300"/>
+              </a:spcAft>
+            </a:pPr>
+            <a:r>
+              <a:rPr sz="930" b="0" i="0">
+                <a:solidFill>
+                  <a:srgbClr val="2B2C4A"/>
+                </a:solidFill>
+                <a:latin typeface="Montserrat"/>
+              </a:rPr>
+              <a:t>Recibió líquidos IV y sonda nasogástrica.</a:t>
+            </a:r>
+          </a:p>
+        </p:txBody>
+      </p:sp>
+      <p:sp>
+        <p:nvSpPr>
+          <p:cNvPr id="35" name="TextBox 34"/>
+          <p:cNvSpPr txBox="1"/>
+          <p:nvPr/>
+        </p:nvSpPr>
+        <p:spPr>
+          <a:xfrm>
+            <a:off x="594360" y="6053328"/>
+            <a:ext cx="10972800" cy="256032"/>
+          </a:xfrm>
+          <a:prstGeom prst="rect">
+            <a:avLst/>
+          </a:prstGeom>
+          <a:noFill/>
+        </p:spPr>
+        <p:txBody>
+          <a:bodyPr wrap="square" anchor="t" lIns="0" rIns="0" tIns="0" bIns="0">
+            <a:spAutoFit/>
+          </a:bodyPr>
+          <a:lstStyle/>
+          <a:p>
+            <a:pPr algn="l">
+              <a:lnSpc>
+                <a:spcPct val="108000"/>
+              </a:lnSpc>
+              <a:spcAft>
+                <a:spcPts val="300"/>
+              </a:spcAft>
+            </a:pPr>
+            <a:r>
               <a:rPr sz="900" b="0" i="1">
                 <a:solidFill>
                   <a:srgbClr val="606383"/>
                 </a:solidFill>
                 <a:latin typeface="Montserrat"/>
               </a:rPr>
-              <a:t>Relato transcrito; lipasa sin valor/LSN y TC sin informe completo. No añadir datos no consignados.</a:t>
+              <a:t>Lipasa sin valor/LSN; informe completo de TC no disponible. No inferir otros datos.</a:t>
             </a:r>
           </a:p>
         </p:txBody>
@@ -11926,7 +12738,7 @@
                 </a:solidFill>
                 <a:latin typeface="Montserrat"/>
               </a:rPr>
-              <a:t>El cuadro es compatible con pancreatitis aguda de posible origen biliar</a:t>
+              <a:t>El cuadro es compatible; la causa biliar no está confirmada</a:t>
             </a:r>
           </a:p>
         </p:txBody>
@@ -12112,7 +12924,7 @@
         <p:spPr>
           <a:xfrm>
             <a:off x="594360" y="1417320"/>
-            <a:ext cx="3108960" cy="788212"/>
+            <a:ext cx="5212080" cy="4526280"/>
           </a:xfrm>
           <a:prstGeom prst="roundRect">
             <a:avLst>
@@ -12157,8 +12969,8 @@
         </p:nvSpPr>
         <p:spPr>
           <a:xfrm>
-            <a:off x="777240" y="1417320"/>
-            <a:ext cx="2743200" cy="788212"/>
+            <a:off x="868680" y="1600200"/>
+            <a:ext cx="4663440" cy="274320"/>
           </a:xfrm>
           <a:prstGeom prst="rect">
             <a:avLst/>
@@ -12166,7 +12978,7 @@
           <a:noFill/>
         </p:spPr>
         <p:txBody>
-          <a:bodyPr wrap="square" anchor="ctr" lIns="0" rIns="0" tIns="0" bIns="0">
+          <a:bodyPr wrap="square" anchor="t" lIns="0" rIns="0" tIns="0" bIns="0">
             <a:spAutoFit/>
           </a:bodyPr>
           <a:lstStyle/>
@@ -12180,13 +12992,13 @@
               </a:spcAft>
             </a:pPr>
             <a:r>
-              <a:rPr sz="1100" b="1" i="0">
+              <a:rPr sz="1000" b="1" i="0">
                 <a:solidFill>
                   <a:srgbClr val="FFFFFF"/>
                 </a:solidFill>
                 <a:latin typeface="Montserrat"/>
               </a:rPr>
-              <a:t>CRITERIOS DE ATLANTA</a:t>
+              <a:t>EXAMEN ORAL</a:t>
             </a:r>
           </a:p>
         </p:txBody>
@@ -12199,8 +13011,138 @@
         </p:nvSpPr>
         <p:spPr>
           <a:xfrm>
-            <a:off x="3794760" y="1417320"/>
-            <a:ext cx="7772400" cy="788212"/>
+            <a:off x="868680" y="1947672"/>
+            <a:ext cx="1554480" cy="310896"/>
+          </a:xfrm>
+          <a:prstGeom prst="roundRect">
+            <a:avLst>
+              <a:gd name="adj" fmla="val 12000"/>
+            </a:avLst>
+          </a:prstGeom>
+          <a:solidFill>
+            <a:srgbClr val="D92A2B"/>
+          </a:solidFill>
+          <a:ln>
+            <a:noFill/>
+          </a:ln>
+          <a:effectLst/>
+        </p:spPr>
+        <p:style>
+          <a:lnRef idx="1">
+            <a:schemeClr val="accent1"/>
+          </a:lnRef>
+          <a:fillRef idx="3">
+            <a:schemeClr val="accent1"/>
+          </a:fillRef>
+          <a:effectRef idx="2">
+            <a:schemeClr val="accent1"/>
+          </a:effectRef>
+          <a:fontRef idx="minor">
+            <a:schemeClr val="lt1"/>
+          </a:fontRef>
+        </p:style>
+        <p:txBody>
+          <a:bodyPr rtlCol="0" anchor="ctr"/>
+          <a:lstStyle/>
+          <a:p>
+            <a:pPr algn="ctr"/>
+          </a:p>
+        </p:txBody>
+      </p:sp>
+      <p:sp>
+        <p:nvSpPr>
+          <p:cNvPr id="11" name="TextBox 10"/>
+          <p:cNvSpPr txBox="1"/>
+          <p:nvPr/>
+        </p:nvSpPr>
+        <p:spPr>
+          <a:xfrm>
+            <a:off x="868680" y="1947672"/>
+            <a:ext cx="1554480" cy="310896"/>
+          </a:xfrm>
+          <a:prstGeom prst="rect">
+            <a:avLst/>
+          </a:prstGeom>
+          <a:noFill/>
+        </p:spPr>
+        <p:txBody>
+          <a:bodyPr wrap="square" anchor="t" lIns="0" rIns="0" tIns="0" bIns="0">
+            <a:spAutoFit/>
+          </a:bodyPr>
+          <a:lstStyle/>
+          <a:p>
+            <a:pPr algn="ctr">
+              <a:lnSpc>
+                <a:spcPct val="108000"/>
+              </a:lnSpc>
+              <a:spcAft>
+                <a:spcPts val="300"/>
+              </a:spcAft>
+            </a:pPr>
+            <a:r>
+              <a:rPr sz="900" b="1" i="0">
+                <a:solidFill>
+                  <a:srgbClr val="FFFFFF"/>
+                </a:solidFill>
+                <a:latin typeface="Montserrat"/>
+              </a:rPr>
+              <a:t>INTERMEDIA</a:t>
+            </a:r>
+          </a:p>
+        </p:txBody>
+      </p:sp>
+      <p:sp>
+        <p:nvSpPr>
+          <p:cNvPr id="12" name="TextBox 11"/>
+          <p:cNvSpPr txBox="1"/>
+          <p:nvPr/>
+        </p:nvSpPr>
+        <p:spPr>
+          <a:xfrm>
+            <a:off x="868680" y="2423160"/>
+            <a:ext cx="4663440" cy="3291840"/>
+          </a:xfrm>
+          <a:prstGeom prst="rect">
+            <a:avLst/>
+          </a:prstGeom>
+          <a:noFill/>
+        </p:spPr>
+        <p:txBody>
+          <a:bodyPr wrap="square" anchor="t" lIns="0" rIns="0" tIns="0" bIns="0">
+            <a:spAutoFit/>
+          </a:bodyPr>
+          <a:lstStyle/>
+          <a:p>
+            <a:pPr algn="l">
+              <a:lnSpc>
+                <a:spcPct val="120000"/>
+              </a:lnSpc>
+              <a:spcAft>
+                <a:spcPts val="300"/>
+              </a:spcAft>
+            </a:pPr>
+            <a:r>
+              <a:rPr sz="1600" b="0" i="0">
+                <a:solidFill>
+                  <a:srgbClr val="FFFFFF"/>
+                </a:solidFill>
+                <a:latin typeface="Montserrat"/>
+              </a:rPr>
+              <a:t>¿Qué datos permiten plantear el diagnóstico y cuáles siguen pendientes?</a:t>
+            </a:r>
+          </a:p>
+        </p:txBody>
+      </p:sp>
+      <p:sp>
+        <p:nvSpPr>
+          <p:cNvPr id="13" name="Rounded Rectangle 12"/>
+          <p:cNvSpPr/>
+          <p:nvPr/>
+        </p:nvSpPr>
+        <p:spPr>
+          <a:xfrm>
+            <a:off x="5989320" y="1417320"/>
+            <a:ext cx="5577840" cy="2514600"/>
           </a:xfrm>
           <a:prstGeom prst="roundRect">
             <a:avLst>
@@ -12241,14 +13183,14 @@
       </p:sp>
       <p:sp>
         <p:nvSpPr>
-          <p:cNvPr id="11" name="TextBox 10"/>
+          <p:cNvPr id="14" name="TextBox 13"/>
           <p:cNvSpPr txBox="1"/>
           <p:nvPr/>
         </p:nvSpPr>
         <p:spPr>
           <a:xfrm>
-            <a:off x="3977639" y="1417320"/>
-            <a:ext cx="7406640" cy="788212"/>
+            <a:off x="6217920" y="1572768"/>
+            <a:ext cx="5120640" cy="274320"/>
           </a:xfrm>
           <a:prstGeom prst="rect">
             <a:avLst/>
@@ -12256,41 +13198,83 @@
           <a:noFill/>
         </p:spPr>
         <p:txBody>
-          <a:bodyPr wrap="square" anchor="ctr" lIns="0" rIns="0" tIns="0" bIns="0">
+          <a:bodyPr wrap="square" anchor="t" lIns="0" rIns="0" tIns="0" bIns="0">
             <a:spAutoFit/>
           </a:bodyPr>
           <a:lstStyle/>
           <a:p>
             <a:pPr algn="l">
               <a:lnSpc>
-                <a:spcPct val="110000"/>
+                <a:spcPct val="108000"/>
               </a:lnSpc>
               <a:spcAft>
                 <a:spcPts val="300"/>
               </a:spcAft>
             </a:pPr>
             <a:r>
+              <a:rPr sz="1000" b="1" i="0">
+                <a:solidFill>
+                  <a:srgbClr val="CA2728"/>
+                </a:solidFill>
+                <a:latin typeface="Montserrat"/>
+              </a:rPr>
+              <a:t>RESPUESTA MODELO</a:t>
+            </a:r>
+          </a:p>
+        </p:txBody>
+      </p:sp>
+      <p:sp>
+        <p:nvSpPr>
+          <p:cNvPr id="15" name="TextBox 14"/>
+          <p:cNvSpPr txBox="1"/>
+          <p:nvPr/>
+        </p:nvSpPr>
+        <p:spPr>
+          <a:xfrm>
+            <a:off x="6217920" y="1938528"/>
+            <a:ext cx="5120640" cy="1828800"/>
+          </a:xfrm>
+          <a:prstGeom prst="rect">
+            <a:avLst/>
+          </a:prstGeom>
+          <a:noFill/>
+        </p:spPr>
+        <p:txBody>
+          <a:bodyPr wrap="square" anchor="t" lIns="0" rIns="0" tIns="0" bIns="0">
+            <a:spAutoFit/>
+          </a:bodyPr>
+          <a:lstStyle/>
+          <a:p>
+            <a:pPr algn="l">
+              <a:lnSpc>
+                <a:spcPct val="112000"/>
+              </a:lnSpc>
+              <a:spcAft>
+                <a:spcPts val="300"/>
+              </a:spcAft>
+            </a:pPr>
+            <a:r>
               <a:rPr sz="1150" b="0" i="0">
                 <a:solidFill>
                   <a:srgbClr val="2B2C4A"/>
                 </a:solidFill>
                 <a:latin typeface="Montserrat"/>
               </a:rPr>
-              <a:t>Dolor compatible + TC con alteración pancreática descrita; la imagen debe confirmarse como característica. Lipasa elevada, sin cuantificación.</a:t>
-            </a:r>
-          </a:p>
-        </p:txBody>
-      </p:sp>
-      <p:sp>
-        <p:nvSpPr>
-          <p:cNvPr id="12" name="Rounded Rectangle 11"/>
+              <a:t>Atlanta exige 2 de 3 criterios: dolor compatible, enzimas ≥3 veces el límite superior normal o imagen característica. Aquí constan dolor y alteración pancreática descrita en TC; falta informe. Lipasa elevada, sin valor. Origen biliar posible, no confirmado.</a:t>
+            </a:r>
+          </a:p>
+        </p:txBody>
+      </p:sp>
+      <p:sp>
+        <p:nvSpPr>
+          <p:cNvPr id="16" name="Rounded Rectangle 15"/>
           <p:cNvSpPr/>
           <p:nvPr/>
         </p:nvSpPr>
         <p:spPr>
           <a:xfrm>
-            <a:off x="594360" y="2351836"/>
-            <a:ext cx="3108960" cy="788212"/>
+            <a:off x="5989320" y="4114800"/>
+            <a:ext cx="5577840" cy="1828800"/>
           </a:xfrm>
           <a:prstGeom prst="roundRect">
             <a:avLst>
@@ -12298,95 +13282,7 @@
             </a:avLst>
           </a:prstGeom>
           <a:solidFill>
-            <a:srgbClr val="3854CC"/>
-          </a:solidFill>
-          <a:ln>
-            <a:noFill/>
-          </a:ln>
-          <a:effectLst/>
-        </p:spPr>
-        <p:style>
-          <a:lnRef idx="1">
-            <a:schemeClr val="accent1"/>
-          </a:lnRef>
-          <a:fillRef idx="3">
-            <a:schemeClr val="accent1"/>
-          </a:fillRef>
-          <a:effectRef idx="2">
-            <a:schemeClr val="accent1"/>
-          </a:effectRef>
-          <a:fontRef idx="minor">
-            <a:schemeClr val="lt1"/>
-          </a:fontRef>
-        </p:style>
-        <p:txBody>
-          <a:bodyPr rtlCol="0" anchor="ctr"/>
-          <a:lstStyle/>
-          <a:p>
-            <a:pPr algn="ctr"/>
-          </a:p>
-        </p:txBody>
-      </p:sp>
-      <p:sp>
-        <p:nvSpPr>
-          <p:cNvPr id="13" name="TextBox 12"/>
-          <p:cNvSpPr txBox="1"/>
-          <p:nvPr/>
-        </p:nvSpPr>
-        <p:spPr>
-          <a:xfrm>
-            <a:off x="777240" y="2351836"/>
-            <a:ext cx="2743200" cy="788212"/>
-          </a:xfrm>
-          <a:prstGeom prst="rect">
-            <a:avLst/>
-          </a:prstGeom>
-          <a:noFill/>
-        </p:spPr>
-        <p:txBody>
-          <a:bodyPr wrap="square" anchor="ctr" lIns="0" rIns="0" tIns="0" bIns="0">
-            <a:spAutoFit/>
-          </a:bodyPr>
-          <a:lstStyle/>
-          <a:p>
-            <a:pPr algn="l">
-              <a:lnSpc>
-                <a:spcPct val="108000"/>
-              </a:lnSpc>
-              <a:spcAft>
-                <a:spcPts val="300"/>
-              </a:spcAft>
-            </a:pPr>
-            <a:r>
-              <a:rPr sz="1100" b="1" i="0">
-                <a:solidFill>
-                  <a:srgbClr val="FFFFFF"/>
-                </a:solidFill>
-                <a:latin typeface="Montserrat"/>
-              </a:rPr>
-              <a:t>DIAGNÓSTICO</a:t>
-            </a:r>
-          </a:p>
-        </p:txBody>
-      </p:sp>
-      <p:sp>
-        <p:nvSpPr>
-          <p:cNvPr id="14" name="Rounded Rectangle 13"/>
-          <p:cNvSpPr/>
-          <p:nvPr/>
-        </p:nvSpPr>
-        <p:spPr>
-          <a:xfrm>
-            <a:off x="3794760" y="2351836"/>
-            <a:ext cx="7772400" cy="788212"/>
-          </a:xfrm>
-          <a:prstGeom prst="roundRect">
-            <a:avLst>
-              <a:gd name="adj" fmla="val 4000"/>
-            </a:avLst>
-          </a:prstGeom>
-          <a:solidFill>
-            <a:srgbClr val="FFFFFF"/>
+            <a:srgbClr val="EEF0FF"/>
           </a:solidFill>
           <a:ln w="7620">
             <a:solidFill>
@@ -12419,64 +13315,20 @@
       </p:sp>
       <p:sp>
         <p:nvSpPr>
-          <p:cNvPr id="15" name="TextBox 14"/>
-          <p:cNvSpPr txBox="1"/>
-          <p:nvPr/>
-        </p:nvSpPr>
-        <p:spPr>
-          <a:xfrm>
-            <a:off x="3977639" y="2351836"/>
-            <a:ext cx="7406640" cy="788212"/>
-          </a:xfrm>
-          <a:prstGeom prst="rect">
-            <a:avLst/>
-          </a:prstGeom>
-          <a:noFill/>
-        </p:spPr>
-        <p:txBody>
-          <a:bodyPr wrap="square" anchor="ctr" lIns="0" rIns="0" tIns="0" bIns="0">
-            <a:spAutoFit/>
-          </a:bodyPr>
-          <a:lstStyle/>
-          <a:p>
-            <a:pPr algn="l">
-              <a:lnSpc>
-                <a:spcPct val="110000"/>
-              </a:lnSpc>
-              <a:spcAft>
-                <a:spcPts val="300"/>
-              </a:spcAft>
-            </a:pPr>
-            <a:r>
-              <a:rPr sz="1150" b="0" i="0">
-                <a:solidFill>
-                  <a:srgbClr val="2B2C4A"/>
-                </a:solidFill>
-                <a:latin typeface="Montserrat"/>
-              </a:rPr>
-              <a:t>Pancreatitis aguda probable; dolor e imagen pueden aportar 2 de los 3 criterios diagnósticos.</a:t>
-            </a:r>
-          </a:p>
-        </p:txBody>
-      </p:sp>
-      <p:sp>
-        <p:nvSpPr>
-          <p:cNvPr id="16" name="Rounded Rectangle 15"/>
+          <p:cNvPr id="17" name="Rectangle 16"/>
           <p:cNvSpPr/>
           <p:nvPr/>
         </p:nvSpPr>
         <p:spPr>
           <a:xfrm>
-            <a:off x="594360" y="3286353"/>
-            <a:ext cx="3108960" cy="788212"/>
-          </a:xfrm>
-          <a:prstGeom prst="roundRect">
-            <a:avLst>
-              <a:gd name="adj" fmla="val 4000"/>
-            </a:avLst>
+            <a:off x="5989320" y="4114800"/>
+            <a:ext cx="54864" cy="1828800"/>
+          </a:xfrm>
+          <a:prstGeom prst="rect">
+            <a:avLst/>
           </a:prstGeom>
           <a:solidFill>
-            <a:srgbClr val="3854CC"/>
+            <a:srgbClr val="B91C1C"/>
           </a:solidFill>
           <a:ln>
             <a:noFill/>
@@ -12507,502 +13359,14 @@
       </p:sp>
       <p:sp>
         <p:nvSpPr>
-          <p:cNvPr id="17" name="TextBox 16"/>
+          <p:cNvPr id="18" name="TextBox 17"/>
           <p:cNvSpPr txBox="1"/>
           <p:nvPr/>
         </p:nvSpPr>
         <p:spPr>
           <a:xfrm>
-            <a:off x="777240" y="3286353"/>
-            <a:ext cx="2743200" cy="788212"/>
-          </a:xfrm>
-          <a:prstGeom prst="rect">
-            <a:avLst/>
-          </a:prstGeom>
-          <a:noFill/>
-        </p:spPr>
-        <p:txBody>
-          <a:bodyPr wrap="square" anchor="ctr" lIns="0" rIns="0" tIns="0" bIns="0">
-            <a:spAutoFit/>
-          </a:bodyPr>
-          <a:lstStyle/>
-          <a:p>
-            <a:pPr algn="l">
-              <a:lnSpc>
-                <a:spcPct val="108000"/>
-              </a:lnSpc>
-              <a:spcAft>
-                <a:spcPts val="300"/>
-              </a:spcAft>
-            </a:pPr>
-            <a:r>
-              <a:rPr sz="1100" b="1" i="0">
-                <a:solidFill>
-                  <a:srgbClr val="FFFFFF"/>
-                </a:solidFill>
-                <a:latin typeface="Montserrat"/>
-              </a:rPr>
-              <a:t>ETIOLOGÍA</a:t>
-            </a:r>
-          </a:p>
-        </p:txBody>
-      </p:sp>
-      <p:sp>
-        <p:nvSpPr>
-          <p:cNvPr id="18" name="Rounded Rectangle 17"/>
-          <p:cNvSpPr/>
-          <p:nvPr/>
-        </p:nvSpPr>
-        <p:spPr>
-          <a:xfrm>
-            <a:off x="3794760" y="3286353"/>
-            <a:ext cx="7772400" cy="788212"/>
-          </a:xfrm>
-          <a:prstGeom prst="roundRect">
-            <a:avLst>
-              <a:gd name="adj" fmla="val 4000"/>
-            </a:avLst>
-          </a:prstGeom>
-          <a:solidFill>
-            <a:srgbClr val="FFFFFF"/>
-          </a:solidFill>
-          <a:ln w="7620">
-            <a:solidFill>
-              <a:srgbClr val="D9DDF2"/>
-            </a:solidFill>
-          </a:ln>
-          <a:effectLst/>
-        </p:spPr>
-        <p:style>
-          <a:lnRef idx="1">
-            <a:schemeClr val="accent1"/>
-          </a:lnRef>
-          <a:fillRef idx="3">
-            <a:schemeClr val="accent1"/>
-          </a:fillRef>
-          <a:effectRef idx="2">
-            <a:schemeClr val="accent1"/>
-          </a:effectRef>
-          <a:fontRef idx="minor">
-            <a:schemeClr val="lt1"/>
-          </a:fontRef>
-        </p:style>
-        <p:txBody>
-          <a:bodyPr rtlCol="0" anchor="ctr"/>
-          <a:lstStyle/>
-          <a:p>
-            <a:pPr algn="ctr"/>
-          </a:p>
-        </p:txBody>
-      </p:sp>
-      <p:sp>
-        <p:nvSpPr>
-          <p:cNvPr id="19" name="TextBox 18"/>
-          <p:cNvSpPr txBox="1"/>
-          <p:nvPr/>
-        </p:nvSpPr>
-        <p:spPr>
-          <a:xfrm>
-            <a:off x="3977639" y="3286353"/>
-            <a:ext cx="7406640" cy="788212"/>
-          </a:xfrm>
-          <a:prstGeom prst="rect">
-            <a:avLst/>
-          </a:prstGeom>
-          <a:noFill/>
-        </p:spPr>
-        <p:txBody>
-          <a:bodyPr wrap="square" anchor="ctr" lIns="0" rIns="0" tIns="0" bIns="0">
-            <a:spAutoFit/>
-          </a:bodyPr>
-          <a:lstStyle/>
-          <a:p>
-            <a:pPr algn="l">
-              <a:lnSpc>
-                <a:spcPct val="110000"/>
-              </a:lnSpc>
-              <a:spcAft>
-                <a:spcPts val="300"/>
-              </a:spcAft>
-            </a:pPr>
-            <a:r>
-              <a:rPr sz="1150" b="0" i="0">
-                <a:solidFill>
-                  <a:srgbClr val="2B2C4A"/>
-                </a:solidFill>
-                <a:latin typeface="Montserrat"/>
-              </a:rPr>
-              <a:t>Origen biliar posible por enfermedad vesicular de larga evolución; no confirmado sin ecografía o datos bioquímicos.</a:t>
-            </a:r>
-          </a:p>
-        </p:txBody>
-      </p:sp>
-      <p:sp>
-        <p:nvSpPr>
-          <p:cNvPr id="20" name="Rounded Rectangle 19"/>
-          <p:cNvSpPr/>
-          <p:nvPr/>
-        </p:nvSpPr>
-        <p:spPr>
-          <a:xfrm>
-            <a:off x="594360" y="4220870"/>
-            <a:ext cx="3108960" cy="788212"/>
-          </a:xfrm>
-          <a:prstGeom prst="roundRect">
-            <a:avLst>
-              <a:gd name="adj" fmla="val 4000"/>
-            </a:avLst>
-          </a:prstGeom>
-          <a:solidFill>
-            <a:srgbClr val="3854CC"/>
-          </a:solidFill>
-          <a:ln>
-            <a:noFill/>
-          </a:ln>
-          <a:effectLst/>
-        </p:spPr>
-        <p:style>
-          <a:lnRef idx="1">
-            <a:schemeClr val="accent1"/>
-          </a:lnRef>
-          <a:fillRef idx="3">
-            <a:schemeClr val="accent1"/>
-          </a:fillRef>
-          <a:effectRef idx="2">
-            <a:schemeClr val="accent1"/>
-          </a:effectRef>
-          <a:fontRef idx="minor">
-            <a:schemeClr val="lt1"/>
-          </a:fontRef>
-        </p:style>
-        <p:txBody>
-          <a:bodyPr rtlCol="0" anchor="ctr"/>
-          <a:lstStyle/>
-          <a:p>
-            <a:pPr algn="ctr"/>
-          </a:p>
-        </p:txBody>
-      </p:sp>
-      <p:sp>
-        <p:nvSpPr>
-          <p:cNvPr id="21" name="TextBox 20"/>
-          <p:cNvSpPr txBox="1"/>
-          <p:nvPr/>
-        </p:nvSpPr>
-        <p:spPr>
-          <a:xfrm>
-            <a:off x="777240" y="4220870"/>
-            <a:ext cx="2743200" cy="788212"/>
-          </a:xfrm>
-          <a:prstGeom prst="rect">
-            <a:avLst/>
-          </a:prstGeom>
-          <a:noFill/>
-        </p:spPr>
-        <p:txBody>
-          <a:bodyPr wrap="square" anchor="ctr" lIns="0" rIns="0" tIns="0" bIns="0">
-            <a:spAutoFit/>
-          </a:bodyPr>
-          <a:lstStyle/>
-          <a:p>
-            <a:pPr algn="l">
-              <a:lnSpc>
-                <a:spcPct val="108000"/>
-              </a:lnSpc>
-              <a:spcAft>
-                <a:spcPts val="300"/>
-              </a:spcAft>
-            </a:pPr>
-            <a:r>
-              <a:rPr sz="1100" b="1" i="0">
-                <a:solidFill>
-                  <a:srgbClr val="FFFFFF"/>
-                </a:solidFill>
-                <a:latin typeface="Montserrat"/>
-              </a:rPr>
-              <a:t>GRAVEDAD</a:t>
-            </a:r>
-          </a:p>
-        </p:txBody>
-      </p:sp>
-      <p:sp>
-        <p:nvSpPr>
-          <p:cNvPr id="22" name="Rounded Rectangle 21"/>
-          <p:cNvSpPr/>
-          <p:nvPr/>
-        </p:nvSpPr>
-        <p:spPr>
-          <a:xfrm>
-            <a:off x="3794760" y="4220870"/>
-            <a:ext cx="7772400" cy="788212"/>
-          </a:xfrm>
-          <a:prstGeom prst="roundRect">
-            <a:avLst>
-              <a:gd name="adj" fmla="val 4000"/>
-            </a:avLst>
-          </a:prstGeom>
-          <a:solidFill>
-            <a:srgbClr val="FFFFFF"/>
-          </a:solidFill>
-          <a:ln w="7620">
-            <a:solidFill>
-              <a:srgbClr val="D9DDF2"/>
-            </a:solidFill>
-          </a:ln>
-          <a:effectLst/>
-        </p:spPr>
-        <p:style>
-          <a:lnRef idx="1">
-            <a:schemeClr val="accent1"/>
-          </a:lnRef>
-          <a:fillRef idx="3">
-            <a:schemeClr val="accent1"/>
-          </a:fillRef>
-          <a:effectRef idx="2">
-            <a:schemeClr val="accent1"/>
-          </a:effectRef>
-          <a:fontRef idx="minor">
-            <a:schemeClr val="lt1"/>
-          </a:fontRef>
-        </p:style>
-        <p:txBody>
-          <a:bodyPr rtlCol="0" anchor="ctr"/>
-          <a:lstStyle/>
-          <a:p>
-            <a:pPr algn="ctr"/>
-          </a:p>
-        </p:txBody>
-      </p:sp>
-      <p:sp>
-        <p:nvSpPr>
-          <p:cNvPr id="23" name="TextBox 22"/>
-          <p:cNvSpPr txBox="1"/>
-          <p:nvPr/>
-        </p:nvSpPr>
-        <p:spPr>
-          <a:xfrm>
-            <a:off x="3977639" y="4220870"/>
-            <a:ext cx="7406640" cy="788212"/>
-          </a:xfrm>
-          <a:prstGeom prst="rect">
-            <a:avLst/>
-          </a:prstGeom>
-          <a:noFill/>
-        </p:spPr>
-        <p:txBody>
-          <a:bodyPr wrap="square" anchor="ctr" lIns="0" rIns="0" tIns="0" bIns="0">
-            <a:spAutoFit/>
-          </a:bodyPr>
-          <a:lstStyle/>
-          <a:p>
-            <a:pPr algn="l">
-              <a:lnSpc>
-                <a:spcPct val="110000"/>
-              </a:lnSpc>
-              <a:spcAft>
-                <a:spcPts val="300"/>
-              </a:spcAft>
-            </a:pPr>
-            <a:r>
-              <a:rPr sz="1150" b="0" i="0">
-                <a:solidFill>
-                  <a:srgbClr val="2B2C4A"/>
-                </a:solidFill>
-                <a:latin typeface="Montserrat"/>
-              </a:rPr>
-              <a:t>Recuperación gradual; faltan datos para clasificar fallo orgánico y gravedad según Atlanta.</a:t>
-            </a:r>
-          </a:p>
-        </p:txBody>
-      </p:sp>
-      <p:sp>
-        <p:nvSpPr>
-          <p:cNvPr id="24" name="Rounded Rectangle 23"/>
-          <p:cNvSpPr/>
-          <p:nvPr/>
-        </p:nvSpPr>
-        <p:spPr>
-          <a:xfrm>
-            <a:off x="594360" y="5155387"/>
-            <a:ext cx="3108960" cy="788212"/>
-          </a:xfrm>
-          <a:prstGeom prst="roundRect">
-            <a:avLst>
-              <a:gd name="adj" fmla="val 4000"/>
-            </a:avLst>
-          </a:prstGeom>
-          <a:solidFill>
-            <a:srgbClr val="3854CC"/>
-          </a:solidFill>
-          <a:ln>
-            <a:noFill/>
-          </a:ln>
-          <a:effectLst/>
-        </p:spPr>
-        <p:style>
-          <a:lnRef idx="1">
-            <a:schemeClr val="accent1"/>
-          </a:lnRef>
-          <a:fillRef idx="3">
-            <a:schemeClr val="accent1"/>
-          </a:fillRef>
-          <a:effectRef idx="2">
-            <a:schemeClr val="accent1"/>
-          </a:effectRef>
-          <a:fontRef idx="minor">
-            <a:schemeClr val="lt1"/>
-          </a:fontRef>
-        </p:style>
-        <p:txBody>
-          <a:bodyPr rtlCol="0" anchor="ctr"/>
-          <a:lstStyle/>
-          <a:p>
-            <a:pPr algn="ctr"/>
-          </a:p>
-        </p:txBody>
-      </p:sp>
-      <p:sp>
-        <p:nvSpPr>
-          <p:cNvPr id="25" name="TextBox 24"/>
-          <p:cNvSpPr txBox="1"/>
-          <p:nvPr/>
-        </p:nvSpPr>
-        <p:spPr>
-          <a:xfrm>
-            <a:off x="777240" y="5155387"/>
-            <a:ext cx="2743200" cy="788212"/>
-          </a:xfrm>
-          <a:prstGeom prst="rect">
-            <a:avLst/>
-          </a:prstGeom>
-          <a:noFill/>
-        </p:spPr>
-        <p:txBody>
-          <a:bodyPr wrap="square" anchor="ctr" lIns="0" rIns="0" tIns="0" bIns="0">
-            <a:spAutoFit/>
-          </a:bodyPr>
-          <a:lstStyle/>
-          <a:p>
-            <a:pPr algn="l">
-              <a:lnSpc>
-                <a:spcPct val="108000"/>
-              </a:lnSpc>
-              <a:spcAft>
-                <a:spcPts val="300"/>
-              </a:spcAft>
-            </a:pPr>
-            <a:r>
-              <a:rPr sz="1100" b="1" i="0">
-                <a:solidFill>
-                  <a:srgbClr val="FFFFFF"/>
-                </a:solidFill>
-                <a:latin typeface="Montserrat"/>
-              </a:rPr>
-              <a:t>DIAGNÓSTICOS DIFERENCIALES</a:t>
-            </a:r>
-          </a:p>
-        </p:txBody>
-      </p:sp>
-      <p:sp>
-        <p:nvSpPr>
-          <p:cNvPr id="26" name="Rounded Rectangle 25"/>
-          <p:cNvSpPr/>
-          <p:nvPr/>
-        </p:nvSpPr>
-        <p:spPr>
-          <a:xfrm>
-            <a:off x="3794760" y="5155387"/>
-            <a:ext cx="7772400" cy="788212"/>
-          </a:xfrm>
-          <a:prstGeom prst="roundRect">
-            <a:avLst>
-              <a:gd name="adj" fmla="val 4000"/>
-            </a:avLst>
-          </a:prstGeom>
-          <a:solidFill>
-            <a:srgbClr val="FFFFFF"/>
-          </a:solidFill>
-          <a:ln w="7620">
-            <a:solidFill>
-              <a:srgbClr val="D9DDF2"/>
-            </a:solidFill>
-          </a:ln>
-          <a:effectLst/>
-        </p:spPr>
-        <p:style>
-          <a:lnRef idx="1">
-            <a:schemeClr val="accent1"/>
-          </a:lnRef>
-          <a:fillRef idx="3">
-            <a:schemeClr val="accent1"/>
-          </a:fillRef>
-          <a:effectRef idx="2">
-            <a:schemeClr val="accent1"/>
-          </a:effectRef>
-          <a:fontRef idx="minor">
-            <a:schemeClr val="lt1"/>
-          </a:fontRef>
-        </p:style>
-        <p:txBody>
-          <a:bodyPr rtlCol="0" anchor="ctr"/>
-          <a:lstStyle/>
-          <a:p>
-            <a:pPr algn="ctr"/>
-          </a:p>
-        </p:txBody>
-      </p:sp>
-      <p:sp>
-        <p:nvSpPr>
-          <p:cNvPr id="27" name="TextBox 26"/>
-          <p:cNvSpPr txBox="1"/>
-          <p:nvPr/>
-        </p:nvSpPr>
-        <p:spPr>
-          <a:xfrm>
-            <a:off x="3977639" y="5155387"/>
-            <a:ext cx="7406640" cy="788212"/>
-          </a:xfrm>
-          <a:prstGeom prst="rect">
-            <a:avLst/>
-          </a:prstGeom>
-          <a:noFill/>
-        </p:spPr>
-        <p:txBody>
-          <a:bodyPr wrap="square" anchor="ctr" lIns="0" rIns="0" tIns="0" bIns="0">
-            <a:spAutoFit/>
-          </a:bodyPr>
-          <a:lstStyle/>
-          <a:p>
-            <a:pPr algn="l">
-              <a:lnSpc>
-                <a:spcPct val="110000"/>
-              </a:lnSpc>
-              <a:spcAft>
-                <a:spcPts val="300"/>
-              </a:spcAft>
-            </a:pPr>
-            <a:r>
-              <a:rPr sz="1150" b="0" i="0">
-                <a:solidFill>
-                  <a:srgbClr val="2B2C4A"/>
-                </a:solidFill>
-                <a:latin typeface="Montserrat"/>
-              </a:rPr>
-              <a:t>Perforación, obstrucción, colecistitis/colangitis y otras causas de abdomen agudo; Rx sin aire libre no excluye por sí sola perforación.</a:t>
-            </a:r>
-          </a:p>
-        </p:txBody>
-      </p:sp>
-      <p:sp>
-        <p:nvSpPr>
-          <p:cNvPr id="28" name="TextBox 27"/>
-          <p:cNvSpPr txBox="1"/>
-          <p:nvPr/>
-        </p:nvSpPr>
-        <p:spPr>
-          <a:xfrm>
-            <a:off x="594360" y="6053328"/>
-            <a:ext cx="10972800" cy="256032"/>
+            <a:off x="6217920" y="4251960"/>
+            <a:ext cx="5120640" cy="274320"/>
           </a:xfrm>
           <a:prstGeom prst="rect">
             <a:avLst/>
@@ -13024,13 +13388,97 @@
               </a:spcAft>
             </a:pPr>
             <a:r>
+              <a:rPr sz="1000" b="1" i="0">
+                <a:solidFill>
+                  <a:srgbClr val="B91C1C"/>
+                </a:solidFill>
+                <a:latin typeface="Montserrat"/>
+              </a:rPr>
+              <a:t>NOTA DEL EXAMINADOR</a:t>
+            </a:r>
+          </a:p>
+        </p:txBody>
+      </p:sp>
+      <p:sp>
+        <p:nvSpPr>
+          <p:cNvPr id="19" name="TextBox 18"/>
+          <p:cNvSpPr txBox="1"/>
+          <p:nvPr/>
+        </p:nvSpPr>
+        <p:spPr>
+          <a:xfrm>
+            <a:off x="6217920" y="4590288"/>
+            <a:ext cx="5120640" cy="1234440"/>
+          </a:xfrm>
+          <a:prstGeom prst="rect">
+            <a:avLst/>
+          </a:prstGeom>
+          <a:noFill/>
+        </p:spPr>
+        <p:txBody>
+          <a:bodyPr wrap="square" anchor="t" lIns="0" rIns="0" tIns="0" bIns="0">
+            <a:spAutoFit/>
+          </a:bodyPr>
+          <a:lstStyle/>
+          <a:p>
+            <a:pPr algn="l">
+              <a:lnSpc>
+                <a:spcPct val="110000"/>
+              </a:lnSpc>
+              <a:spcAft>
+                <a:spcPts val="300"/>
+              </a:spcAft>
+            </a:pPr>
+            <a:r>
+              <a:rPr sz="1080" b="0" i="0">
+                <a:solidFill>
+                  <a:srgbClr val="2B2C4A"/>
+                </a:solidFill>
+                <a:latin typeface="Montserrat"/>
+              </a:rPr>
+              <a:t>Verificar si la TC cumple criterio de imagen característica. No asignar gravedad sin datos de fallo orgánico persistente ni duración.</a:t>
+            </a:r>
+          </a:p>
+        </p:txBody>
+      </p:sp>
+      <p:sp>
+        <p:nvSpPr>
+          <p:cNvPr id="20" name="TextBox 19"/>
+          <p:cNvSpPr txBox="1"/>
+          <p:nvPr/>
+        </p:nvSpPr>
+        <p:spPr>
+          <a:xfrm>
+            <a:off x="594360" y="6053328"/>
+            <a:ext cx="10972800" cy="256032"/>
+          </a:xfrm>
+          <a:prstGeom prst="rect">
+            <a:avLst/>
+          </a:prstGeom>
+          <a:noFill/>
+        </p:spPr>
+        <p:txBody>
+          <a:bodyPr wrap="square" anchor="t" lIns="0" rIns="0" tIns="0" bIns="0">
+            <a:spAutoFit/>
+          </a:bodyPr>
+          <a:lstStyle/>
+          <a:p>
+            <a:pPr algn="l">
+              <a:lnSpc>
+                <a:spcPct val="108000"/>
+              </a:lnSpc>
+              <a:spcAft>
+                <a:spcPts val="300"/>
+              </a:spcAft>
+            </a:pPr>
+            <a:r>
               <a:rPr sz="900" b="0" i="1">
                 <a:solidFill>
                   <a:srgbClr val="606383"/>
                 </a:solidFill>
                 <a:latin typeface="Montserrat"/>
               </a:rPr>
-              <a:t>La lipasa no está expresada como múltiplo del límite superior normal (LSN).</a:t>
+              <a:t>Atlanta revisada [1]; el valor de lipasa y el informe radiológico completo no están disponibles.</a:t>
             </a:r>
           </a:p>
         </p:txBody>
@@ -14482,7 +14930,7 @@
                 </a:solidFill>
                 <a:latin typeface="Montserrat"/>
               </a:rPr>
-              <a:t>El examen muestra dolor superior y ruidos intestinales reducidos</a:t>
+              <a:t>Los hallazgos orientan; los signos clásicos no descartan el cuadro</a:t>
             </a:r>
           </a:p>
         </p:txBody>
@@ -14659,20 +15107,195 @@
           </a:p>
         </p:txBody>
       </p:sp>
-      <p:sp>
-        <p:nvSpPr>
-          <p:cNvPr id="8" name="Rounded Rectangle 7"/>
+      <p:cxnSp>
+        <p:nvCxnSpPr>
+          <p:cNvPr id="8" name="Connector 7"/>
+          <p:cNvCxnSpPr/>
+          <p:nvPr/>
+        </p:nvCxnSpPr>
+        <p:spPr>
+          <a:xfrm flipV="1">
+            <a:off x="6095390" y="1874519"/>
+            <a:ext cx="0" cy="594360"/>
+          </a:xfrm>
+          <a:prstGeom prst="line">
+            <a:avLst/>
+          </a:prstGeom>
+          <a:ln w="19050">
+            <a:solidFill>
+              <a:srgbClr val="D9DDF2"/>
+            </a:solidFill>
+          </a:ln>
+        </p:spPr>
+        <p:style>
+          <a:lnRef idx="2">
+            <a:schemeClr val="accent1"/>
+          </a:lnRef>
+          <a:fillRef idx="0">
+            <a:schemeClr val="accent1"/>
+          </a:fillRef>
+          <a:effectRef idx="1">
+            <a:schemeClr val="accent1"/>
+          </a:effectRef>
+          <a:fontRef idx="minor">
+            <a:schemeClr val="tx1"/>
+          </a:fontRef>
+        </p:style>
+      </p:cxnSp>
+      <p:cxnSp>
+        <p:nvCxnSpPr>
+          <p:cNvPr id="9" name="Connector 8"/>
+          <p:cNvCxnSpPr/>
+          <p:nvPr/>
+        </p:nvCxnSpPr>
+        <p:spPr>
+          <a:xfrm flipV="1">
+            <a:off x="7313042" y="3138189"/>
+            <a:ext cx="2173968" cy="362239"/>
+          </a:xfrm>
+          <a:prstGeom prst="line">
+            <a:avLst/>
+          </a:prstGeom>
+          <a:ln w="19050">
+            <a:solidFill>
+              <a:srgbClr val="D9DDF2"/>
+            </a:solidFill>
+          </a:ln>
+        </p:spPr>
+        <p:style>
+          <a:lnRef idx="2">
+            <a:schemeClr val="accent1"/>
+          </a:lnRef>
+          <a:fillRef idx="0">
+            <a:schemeClr val="accent1"/>
+          </a:fillRef>
+          <a:effectRef idx="1">
+            <a:schemeClr val="accent1"/>
+          </a:effectRef>
+          <a:fontRef idx="minor">
+            <a:schemeClr val="tx1"/>
+          </a:fontRef>
+        </p:style>
+      </p:cxnSp>
+      <p:cxnSp>
+        <p:nvCxnSpPr>
+          <p:cNvPr id="10" name="Connector 9"/>
+          <p:cNvCxnSpPr/>
+          <p:nvPr/>
+        </p:nvCxnSpPr>
+        <p:spPr>
+          <a:xfrm>
+            <a:off x="7103909" y="4415170"/>
+            <a:ext cx="1087617" cy="767680"/>
+          </a:xfrm>
+          <a:prstGeom prst="line">
+            <a:avLst/>
+          </a:prstGeom>
+          <a:ln w="19050">
+            <a:solidFill>
+              <a:srgbClr val="D9DDF2"/>
+            </a:solidFill>
+          </a:ln>
+        </p:spPr>
+        <p:style>
+          <a:lnRef idx="2">
+            <a:schemeClr val="accent1"/>
+          </a:lnRef>
+          <a:fillRef idx="0">
+            <a:schemeClr val="accent1"/>
+          </a:fillRef>
+          <a:effectRef idx="1">
+            <a:schemeClr val="accent1"/>
+          </a:effectRef>
+          <a:fontRef idx="minor">
+            <a:schemeClr val="tx1"/>
+          </a:fontRef>
+        </p:style>
+      </p:cxnSp>
+      <p:cxnSp>
+        <p:nvCxnSpPr>
+          <p:cNvPr id="11" name="Connector 10"/>
+          <p:cNvCxnSpPr/>
+          <p:nvPr/>
+        </p:nvCxnSpPr>
+        <p:spPr>
+          <a:xfrm flipH="1">
+            <a:off x="3999254" y="4415170"/>
+            <a:ext cx="1087616" cy="767680"/>
+          </a:xfrm>
+          <a:prstGeom prst="line">
+            <a:avLst/>
+          </a:prstGeom>
+          <a:ln w="19050">
+            <a:solidFill>
+              <a:srgbClr val="D9DDF2"/>
+            </a:solidFill>
+          </a:ln>
+        </p:spPr>
+        <p:style>
+          <a:lnRef idx="2">
+            <a:schemeClr val="accent1"/>
+          </a:lnRef>
+          <a:fillRef idx="0">
+            <a:schemeClr val="accent1"/>
+          </a:fillRef>
+          <a:effectRef idx="1">
+            <a:schemeClr val="accent1"/>
+          </a:effectRef>
+          <a:fontRef idx="minor">
+            <a:schemeClr val="tx1"/>
+          </a:fontRef>
+        </p:style>
+      </p:cxnSp>
+      <p:cxnSp>
+        <p:nvCxnSpPr>
+          <p:cNvPr id="12" name="Connector 11"/>
+          <p:cNvCxnSpPr/>
+          <p:nvPr/>
+        </p:nvCxnSpPr>
+        <p:spPr>
+          <a:xfrm flipH="1" flipV="1">
+            <a:off x="2703770" y="3138189"/>
+            <a:ext cx="2173968" cy="362239"/>
+          </a:xfrm>
+          <a:prstGeom prst="line">
+            <a:avLst/>
+          </a:prstGeom>
+          <a:ln w="19050">
+            <a:solidFill>
+              <a:srgbClr val="D9DDF2"/>
+            </a:solidFill>
+          </a:ln>
+        </p:spPr>
+        <p:style>
+          <a:lnRef idx="2">
+            <a:schemeClr val="accent1"/>
+          </a:lnRef>
+          <a:fillRef idx="0">
+            <a:schemeClr val="accent1"/>
+          </a:fillRef>
+          <a:effectRef idx="1">
+            <a:schemeClr val="accent1"/>
+          </a:effectRef>
+          <a:fontRef idx="minor">
+            <a:schemeClr val="tx1"/>
+          </a:fontRef>
+        </p:style>
+      </p:cxnSp>
+      <p:sp>
+        <p:nvSpPr>
+          <p:cNvPr id="13" name="Rounded Rectangle 12"/>
           <p:cNvSpPr/>
           <p:nvPr/>
         </p:nvSpPr>
         <p:spPr>
           <a:xfrm>
-            <a:off x="594360" y="1417320"/>
-            <a:ext cx="3108960" cy="788212"/>
+            <a:off x="4952390" y="3246120"/>
+            <a:ext cx="2286000" cy="914400"/>
           </a:xfrm>
           <a:prstGeom prst="roundRect">
             <a:avLst>
-              <a:gd name="adj" fmla="val 4000"/>
+              <a:gd name="adj" fmla="val 12000"/>
             </a:avLst>
           </a:prstGeom>
           <a:solidFill>
@@ -14707,14 +15330,14 @@
       </p:sp>
       <p:sp>
         <p:nvSpPr>
-          <p:cNvPr id="9" name="TextBox 8"/>
+          <p:cNvPr id="14" name="TextBox 13"/>
           <p:cNvSpPr txBox="1"/>
           <p:nvPr/>
         </p:nvSpPr>
         <p:spPr>
           <a:xfrm>
-            <a:off x="777240" y="1417320"/>
-            <a:ext cx="2743200" cy="788212"/>
+            <a:off x="5043830" y="3246120"/>
+            <a:ext cx="2103120" cy="914400"/>
           </a:xfrm>
           <a:prstGeom prst="rect">
             <a:avLst/>
@@ -14727,7 +15350,7 @@
           </a:bodyPr>
           <a:lstStyle/>
           <a:p>
-            <a:pPr algn="l">
+            <a:pPr algn="ctr">
               <a:lnSpc>
                 <a:spcPct val="108000"/>
               </a:lnSpc>
@@ -14736,27 +15359,27 @@
               </a:spcAft>
             </a:pPr>
             <a:r>
-              <a:rPr sz="1100" b="1" i="0">
+              <a:rPr sz="1300" b="1" i="0">
                 <a:solidFill>
                   <a:srgbClr val="FFFFFF"/>
                 </a:solidFill>
                 <a:latin typeface="Montserrat"/>
               </a:rPr>
-              <a:t>DOLOR REFERIDO</a:t>
-            </a:r>
-          </a:p>
-        </p:txBody>
-      </p:sp>
-      <p:sp>
-        <p:nvSpPr>
-          <p:cNvPr id="10" name="Rounded Rectangle 9"/>
+              <a:t>Manifestaciones clínicas</a:t>
+            </a:r>
+          </a:p>
+        </p:txBody>
+      </p:sp>
+      <p:sp>
+        <p:nvSpPr>
+          <p:cNvPr id="15" name="Rounded Rectangle 14"/>
           <p:cNvSpPr/>
           <p:nvPr/>
         </p:nvSpPr>
         <p:spPr>
           <a:xfrm>
-            <a:off x="3794760" y="1417320"/>
-            <a:ext cx="7772400" cy="788212"/>
+            <a:off x="4952390" y="1394460"/>
+            <a:ext cx="2286000" cy="960120"/>
           </a:xfrm>
           <a:prstGeom prst="roundRect">
             <a:avLst>
@@ -14797,14 +15420,14 @@
       </p:sp>
       <p:sp>
         <p:nvSpPr>
-          <p:cNvPr id="11" name="TextBox 10"/>
+          <p:cNvPr id="16" name="TextBox 15"/>
           <p:cNvSpPr txBox="1"/>
           <p:nvPr/>
         </p:nvSpPr>
         <p:spPr>
           <a:xfrm>
-            <a:off x="3977639" y="1417320"/>
-            <a:ext cx="7406640" cy="788212"/>
+            <a:off x="5089550" y="1467612"/>
+            <a:ext cx="2011680" cy="813816"/>
           </a:xfrm>
           <a:prstGeom prst="rect">
             <a:avLst/>
@@ -14817,124 +15440,61 @@
           </a:bodyPr>
           <a:lstStyle/>
           <a:p>
-            <a:pPr algn="l">
-              <a:lnSpc>
-                <a:spcPct val="110000"/>
-              </a:lnSpc>
+            <a:pPr algn="ctr">
+              <a:lnSpc>
+                <a:spcPct val="108000"/>
+              </a:lnSpc>
+              <a:spcBef>
+                <a:spcPts val="0"/>
+              </a:spcBef>
+              <a:spcAft>
+                <a:spcPts val="200"/>
+              </a:spcAft>
+            </a:pPr>
+            <a:r>
+              <a:rPr sz="1150" b="1" i="0">
+                <a:solidFill>
+                  <a:srgbClr val="3854CC"/>
+                </a:solidFill>
+                <a:latin typeface="Montserrat"/>
+              </a:rPr>
+              <a:t>Dolor visceral</a:t>
+            </a:r>
+          </a:p>
+          <a:p>
+            <a:pPr algn="ctr">
+              <a:lnSpc>
+                <a:spcPct val="105000"/>
+              </a:lnSpc>
+              <a:spcBef>
+                <a:spcPts val="0"/>
+              </a:spcBef>
               <a:spcAft>
                 <a:spcPts val="300"/>
               </a:spcAft>
             </a:pPr>
             <a:r>
-              <a:rPr sz="1150" b="0" i="0">
+              <a:rPr sz="950" b="0" i="0">
                 <a:solidFill>
                   <a:srgbClr val="2B2C4A"/>
                 </a:solidFill>
                 <a:latin typeface="Montserrat"/>
               </a:rPr>
-              <a:t>Aferencias esplácnicas y plexo celíaco; la convergencia torácica T5–T9 puede referir dolor al dorso.</a:t>
-            </a:r>
-          </a:p>
-        </p:txBody>
-      </p:sp>
-      <p:sp>
-        <p:nvSpPr>
-          <p:cNvPr id="12" name="Rounded Rectangle 11"/>
+              <a:t>Plexo celíaco/esplácnicos; posible referencia dorsal (T5–T9).</a:t>
+            </a:r>
+          </a:p>
+        </p:txBody>
+      </p:sp>
+      <p:sp>
+        <p:nvSpPr>
+          <p:cNvPr id="17" name="Rounded Rectangle 16"/>
           <p:cNvSpPr/>
           <p:nvPr/>
         </p:nvSpPr>
         <p:spPr>
           <a:xfrm>
-            <a:off x="594360" y="2351836"/>
-            <a:ext cx="3108960" cy="788212"/>
-          </a:xfrm>
-          <a:prstGeom prst="roundRect">
-            <a:avLst>
-              <a:gd name="adj" fmla="val 4000"/>
-            </a:avLst>
-          </a:prstGeom>
-          <a:solidFill>
-            <a:srgbClr val="3854CC"/>
-          </a:solidFill>
-          <a:ln>
-            <a:noFill/>
-          </a:ln>
-          <a:effectLst/>
-        </p:spPr>
-        <p:style>
-          <a:lnRef idx="1">
-            <a:schemeClr val="accent1"/>
-          </a:lnRef>
-          <a:fillRef idx="3">
-            <a:schemeClr val="accent1"/>
-          </a:fillRef>
-          <a:effectRef idx="2">
-            <a:schemeClr val="accent1"/>
-          </a:effectRef>
-          <a:fontRef idx="minor">
-            <a:schemeClr val="lt1"/>
-          </a:fontRef>
-        </p:style>
-        <p:txBody>
-          <a:bodyPr rtlCol="0" anchor="ctr"/>
-          <a:lstStyle/>
-          <a:p>
-            <a:pPr algn="ctr"/>
-          </a:p>
-        </p:txBody>
-      </p:sp>
-      <p:sp>
-        <p:nvSpPr>
-          <p:cNvPr id="13" name="TextBox 12"/>
-          <p:cNvSpPr txBox="1"/>
-          <p:nvPr/>
-        </p:nvSpPr>
-        <p:spPr>
-          <a:xfrm>
-            <a:off x="777240" y="2351836"/>
-            <a:ext cx="2743200" cy="788212"/>
-          </a:xfrm>
-          <a:prstGeom prst="rect">
-            <a:avLst/>
-          </a:prstGeom>
-          <a:noFill/>
-        </p:spPr>
-        <p:txBody>
-          <a:bodyPr wrap="square" anchor="ctr" lIns="0" rIns="0" tIns="0" bIns="0">
-            <a:spAutoFit/>
-          </a:bodyPr>
-          <a:lstStyle/>
-          <a:p>
-            <a:pPr algn="l">
-              <a:lnSpc>
-                <a:spcPct val="108000"/>
-              </a:lnSpc>
-              <a:spcAft>
-                <a:spcPts val="300"/>
-              </a:spcAft>
-            </a:pPr>
-            <a:r>
-              <a:rPr sz="1100" b="1" i="0">
-                <a:solidFill>
-                  <a:srgbClr val="FFFFFF"/>
-                </a:solidFill>
-                <a:latin typeface="Montserrat"/>
-              </a:rPr>
-              <a:t>CELSO Y GALENO</a:t>
-            </a:r>
-          </a:p>
-        </p:txBody>
-      </p:sp>
-      <p:sp>
-        <p:nvSpPr>
-          <p:cNvPr id="14" name="Rounded Rectangle 13"/>
-          <p:cNvSpPr/>
-          <p:nvPr/>
-        </p:nvSpPr>
-        <p:spPr>
-          <a:xfrm>
-            <a:off x="3794760" y="2351836"/>
-            <a:ext cx="7772400" cy="788212"/>
+            <a:off x="8344010" y="2658129"/>
+            <a:ext cx="2286000" cy="960120"/>
           </a:xfrm>
           <a:prstGeom prst="roundRect">
             <a:avLst>
@@ -14975,14 +15535,14 @@
       </p:sp>
       <p:sp>
         <p:nvSpPr>
-          <p:cNvPr id="15" name="TextBox 14"/>
+          <p:cNvPr id="18" name="TextBox 17"/>
           <p:cNvSpPr txBox="1"/>
           <p:nvPr/>
         </p:nvSpPr>
         <p:spPr>
           <a:xfrm>
-            <a:off x="3977639" y="2351836"/>
-            <a:ext cx="7406640" cy="788212"/>
+            <a:off x="8481170" y="2731281"/>
+            <a:ext cx="2011680" cy="813816"/>
           </a:xfrm>
           <a:prstGeom prst="rect">
             <a:avLst/>
@@ -14995,124 +15555,61 @@
           </a:bodyPr>
           <a:lstStyle/>
           <a:p>
-            <a:pPr algn="l">
-              <a:lnSpc>
-                <a:spcPct val="110000"/>
-              </a:lnSpc>
+            <a:pPr algn="ctr">
+              <a:lnSpc>
+                <a:spcPct val="108000"/>
+              </a:lnSpc>
+              <a:spcBef>
+                <a:spcPts val="0"/>
+              </a:spcBef>
+              <a:spcAft>
+                <a:spcPts val="200"/>
+              </a:spcAft>
+            </a:pPr>
+            <a:r>
+              <a:rPr sz="1150" b="1" i="0">
+                <a:solidFill>
+                  <a:srgbClr val="3854CC"/>
+                </a:solidFill>
+                <a:latin typeface="Montserrat"/>
+              </a:rPr>
+              <a:t>Hallazgos del caso</a:t>
+            </a:r>
+          </a:p>
+          <a:p>
+            <a:pPr algn="ctr">
+              <a:lnSpc>
+                <a:spcPct val="105000"/>
+              </a:lnSpc>
+              <a:spcBef>
+                <a:spcPts val="0"/>
+              </a:spcBef>
               <a:spcAft>
                 <a:spcPts val="300"/>
               </a:spcAft>
             </a:pPr>
             <a:r>
-              <a:rPr sz="1150" b="0" i="0">
+              <a:rPr sz="950" b="0" i="0">
                 <a:solidFill>
                   <a:srgbClr val="2B2C4A"/>
                 </a:solidFill>
                 <a:latin typeface="Montserrat"/>
               </a:rPr>
-              <a:t>Tétrada de Celso: rubor, calor, tumor y dolor. Galeno añade functio laesa (pérdida de función).</a:t>
-            </a:r>
-          </a:p>
-        </p:txBody>
-      </p:sp>
-      <p:sp>
-        <p:nvSpPr>
-          <p:cNvPr id="16" name="Rounded Rectangle 15"/>
+              <a:t>Hipersensibilidad superior y ruidos intestinales reducidos.</a:t>
+            </a:r>
+          </a:p>
+        </p:txBody>
+      </p:sp>
+      <p:sp>
+        <p:nvSpPr>
+          <p:cNvPr id="19" name="Rounded Rectangle 18"/>
           <p:cNvSpPr/>
           <p:nvPr/>
         </p:nvSpPr>
         <p:spPr>
           <a:xfrm>
-            <a:off x="594360" y="3286353"/>
-            <a:ext cx="3108960" cy="788212"/>
-          </a:xfrm>
-          <a:prstGeom prst="roundRect">
-            <a:avLst>
-              <a:gd name="adj" fmla="val 4000"/>
-            </a:avLst>
-          </a:prstGeom>
-          <a:solidFill>
-            <a:srgbClr val="3854CC"/>
-          </a:solidFill>
-          <a:ln>
-            <a:noFill/>
-          </a:ln>
-          <a:effectLst/>
-        </p:spPr>
-        <p:style>
-          <a:lnRef idx="1">
-            <a:schemeClr val="accent1"/>
-          </a:lnRef>
-          <a:fillRef idx="3">
-            <a:schemeClr val="accent1"/>
-          </a:fillRef>
-          <a:effectRef idx="2">
-            <a:schemeClr val="accent1"/>
-          </a:effectRef>
-          <a:fontRef idx="minor">
-            <a:schemeClr val="lt1"/>
-          </a:fontRef>
-        </p:style>
-        <p:txBody>
-          <a:bodyPr rtlCol="0" anchor="ctr"/>
-          <a:lstStyle/>
-          <a:p>
-            <a:pPr algn="ctr"/>
-          </a:p>
-        </p:txBody>
-      </p:sp>
-      <p:sp>
-        <p:nvSpPr>
-          <p:cNvPr id="17" name="TextBox 16"/>
-          <p:cNvSpPr txBox="1"/>
-          <p:nvPr/>
-        </p:nvSpPr>
-        <p:spPr>
-          <a:xfrm>
-            <a:off x="777240" y="3286353"/>
-            <a:ext cx="2743200" cy="788212"/>
-          </a:xfrm>
-          <a:prstGeom prst="rect">
-            <a:avLst/>
-          </a:prstGeom>
-          <a:noFill/>
-        </p:spPr>
-        <p:txBody>
-          <a:bodyPr wrap="square" anchor="ctr" lIns="0" rIns="0" tIns="0" bIns="0">
-            <a:spAutoFit/>
-          </a:bodyPr>
-          <a:lstStyle/>
-          <a:p>
-            <a:pPr algn="l">
-              <a:lnSpc>
-                <a:spcPct val="108000"/>
-              </a:lnSpc>
-              <a:spcAft>
-                <a:spcPts val="300"/>
-              </a:spcAft>
-            </a:pPr>
-            <a:r>
-              <a:rPr sz="1100" b="1" i="0">
-                <a:solidFill>
-                  <a:srgbClr val="FFFFFF"/>
-                </a:solidFill>
-                <a:latin typeface="Montserrat"/>
-              </a:rPr>
-              <a:t>RUIDOS INTESTINALES</a:t>
-            </a:r>
-          </a:p>
-        </p:txBody>
-      </p:sp>
-      <p:sp>
-        <p:nvSpPr>
-          <p:cNvPr id="18" name="Rounded Rectangle 17"/>
-          <p:cNvSpPr/>
-          <p:nvPr/>
-        </p:nvSpPr>
-        <p:spPr>
-          <a:xfrm>
-            <a:off x="3794760" y="3286353"/>
-            <a:ext cx="7772400" cy="788212"/>
+            <a:off x="7048526" y="4702790"/>
+            <a:ext cx="2286000" cy="960120"/>
           </a:xfrm>
           <a:prstGeom prst="roundRect">
             <a:avLst>
@@ -15153,14 +15650,14 @@
       </p:sp>
       <p:sp>
         <p:nvSpPr>
-          <p:cNvPr id="19" name="TextBox 18"/>
+          <p:cNvPr id="20" name="TextBox 19"/>
           <p:cNvSpPr txBox="1"/>
           <p:nvPr/>
         </p:nvSpPr>
         <p:spPr>
           <a:xfrm>
-            <a:off x="3977639" y="3286353"/>
-            <a:ext cx="7406640" cy="788212"/>
+            <a:off x="7185686" y="4775942"/>
+            <a:ext cx="2011680" cy="813816"/>
           </a:xfrm>
           <a:prstGeom prst="rect">
             <a:avLst/>
@@ -15173,124 +15670,61 @@
           </a:bodyPr>
           <a:lstStyle/>
           <a:p>
-            <a:pPr algn="l">
-              <a:lnSpc>
-                <a:spcPct val="110000"/>
-              </a:lnSpc>
+            <a:pPr algn="ctr">
+              <a:lnSpc>
+                <a:spcPct val="108000"/>
+              </a:lnSpc>
+              <a:spcBef>
+                <a:spcPts val="0"/>
+              </a:spcBef>
+              <a:spcAft>
+                <a:spcPts val="200"/>
+              </a:spcAft>
+            </a:pPr>
+            <a:r>
+              <a:rPr sz="1150" b="1" i="0">
+                <a:solidFill>
+                  <a:srgbClr val="3854CC"/>
+                </a:solidFill>
+                <a:latin typeface="Montserrat"/>
+              </a:rPr>
+              <a:t>Celso / Galeno</a:t>
+            </a:r>
+          </a:p>
+          <a:p>
+            <a:pPr algn="ctr">
+              <a:lnSpc>
+                <a:spcPct val="105000"/>
+              </a:lnSpc>
+              <a:spcBef>
+                <a:spcPts val="0"/>
+              </a:spcBef>
               <a:spcAft>
                 <a:spcPts val="300"/>
               </a:spcAft>
             </a:pPr>
             <a:r>
-              <a:rPr sz="1150" b="0" i="0">
+              <a:rPr sz="950" b="0" i="0">
                 <a:solidFill>
                   <a:srgbClr val="2B2C4A"/>
                 </a:solidFill>
                 <a:latin typeface="Montserrat"/>
               </a:rPr>
-              <a:t>En el caso están reducidos; pueden acompañar íleo, pero este dato aislado no lo confirma.</a:t>
-            </a:r>
-          </a:p>
-        </p:txBody>
-      </p:sp>
-      <p:sp>
-        <p:nvSpPr>
-          <p:cNvPr id="20" name="Rounded Rectangle 19"/>
+              <a:t>Rubor, calor, tumor y dolor; Galeno añade pérdida de función.</a:t>
+            </a:r>
+          </a:p>
+        </p:txBody>
+      </p:sp>
+      <p:sp>
+        <p:nvSpPr>
+          <p:cNvPr id="21" name="Rounded Rectangle 20"/>
           <p:cNvSpPr/>
           <p:nvPr/>
         </p:nvSpPr>
         <p:spPr>
           <a:xfrm>
-            <a:off x="594360" y="4220870"/>
-            <a:ext cx="3108960" cy="788212"/>
-          </a:xfrm>
-          <a:prstGeom prst="roundRect">
-            <a:avLst>
-              <a:gd name="adj" fmla="val 4000"/>
-            </a:avLst>
-          </a:prstGeom>
-          <a:solidFill>
-            <a:srgbClr val="3854CC"/>
-          </a:solidFill>
-          <a:ln>
-            <a:noFill/>
-          </a:ln>
-          <a:effectLst/>
-        </p:spPr>
-        <p:style>
-          <a:lnRef idx="1">
-            <a:schemeClr val="accent1"/>
-          </a:lnRef>
-          <a:fillRef idx="3">
-            <a:schemeClr val="accent1"/>
-          </a:fillRef>
-          <a:effectRef idx="2">
-            <a:schemeClr val="accent1"/>
-          </a:effectRef>
-          <a:fontRef idx="minor">
-            <a:schemeClr val="lt1"/>
-          </a:fontRef>
-        </p:style>
-        <p:txBody>
-          <a:bodyPr rtlCol="0" anchor="ctr"/>
-          <a:lstStyle/>
-          <a:p>
-            <a:pPr algn="ctr"/>
-          </a:p>
-        </p:txBody>
-      </p:sp>
-      <p:sp>
-        <p:nvSpPr>
-          <p:cNvPr id="21" name="TextBox 20"/>
-          <p:cNvSpPr txBox="1"/>
-          <p:nvPr/>
-        </p:nvSpPr>
-        <p:spPr>
-          <a:xfrm>
-            <a:off x="777240" y="4220870"/>
-            <a:ext cx="2743200" cy="788212"/>
-          </a:xfrm>
-          <a:prstGeom prst="rect">
-            <a:avLst/>
-          </a:prstGeom>
-          <a:noFill/>
-        </p:spPr>
-        <p:txBody>
-          <a:bodyPr wrap="square" anchor="ctr" lIns="0" rIns="0" tIns="0" bIns="0">
-            <a:spAutoFit/>
-          </a:bodyPr>
-          <a:lstStyle/>
-          <a:p>
-            <a:pPr algn="l">
-              <a:lnSpc>
-                <a:spcPct val="108000"/>
-              </a:lnSpc>
-              <a:spcAft>
-                <a:spcPts val="300"/>
-              </a:spcAft>
-            </a:pPr>
-            <a:r>
-              <a:rPr sz="1100" b="1" i="0">
-                <a:solidFill>
-                  <a:srgbClr val="FFFFFF"/>
-                </a:solidFill>
-                <a:latin typeface="Montserrat"/>
-              </a:rPr>
-              <a:t>CULLEN</a:t>
-            </a:r>
-          </a:p>
-        </p:txBody>
-      </p:sp>
-      <p:sp>
-        <p:nvSpPr>
-          <p:cNvPr id="22" name="Rounded Rectangle 21"/>
-          <p:cNvSpPr/>
-          <p:nvPr/>
-        </p:nvSpPr>
-        <p:spPr>
-          <a:xfrm>
-            <a:off x="3794760" y="4220870"/>
-            <a:ext cx="7772400" cy="788212"/>
+            <a:off x="2856254" y="4702790"/>
+            <a:ext cx="2286000" cy="960120"/>
           </a:xfrm>
           <a:prstGeom prst="roundRect">
             <a:avLst>
@@ -15331,14 +15765,14 @@
       </p:sp>
       <p:sp>
         <p:nvSpPr>
-          <p:cNvPr id="23" name="TextBox 22"/>
+          <p:cNvPr id="22" name="TextBox 21"/>
           <p:cNvSpPr txBox="1"/>
           <p:nvPr/>
         </p:nvSpPr>
         <p:spPr>
           <a:xfrm>
-            <a:off x="3977639" y="4220870"/>
-            <a:ext cx="7406640" cy="788212"/>
+            <a:off x="2993414" y="4775942"/>
+            <a:ext cx="2011680" cy="813816"/>
           </a:xfrm>
           <a:prstGeom prst="rect">
             <a:avLst/>
@@ -15351,124 +15785,61 @@
           </a:bodyPr>
           <a:lstStyle/>
           <a:p>
-            <a:pPr algn="l">
-              <a:lnSpc>
-                <a:spcPct val="110000"/>
-              </a:lnSpc>
+            <a:pPr algn="ctr">
+              <a:lnSpc>
+                <a:spcPct val="108000"/>
+              </a:lnSpc>
+              <a:spcBef>
+                <a:spcPts val="0"/>
+              </a:spcBef>
+              <a:spcAft>
+                <a:spcPts val="200"/>
+              </a:spcAft>
+            </a:pPr>
+            <a:r>
+              <a:rPr sz="1150" b="1" i="0">
+                <a:solidFill>
+                  <a:srgbClr val="3854CC"/>
+                </a:solidFill>
+                <a:latin typeface="Montserrat"/>
+              </a:rPr>
+              <a:t>Signo de Cullen</a:t>
+            </a:r>
+          </a:p>
+          <a:p>
+            <a:pPr algn="ctr">
+              <a:lnSpc>
+                <a:spcPct val="105000"/>
+              </a:lnSpc>
+              <a:spcBef>
+                <a:spcPts val="0"/>
+              </a:spcBef>
               <a:spcAft>
                 <a:spcPts val="300"/>
               </a:spcAft>
             </a:pPr>
             <a:r>
-              <a:rPr sz="1150" b="0" i="0">
+              <a:rPr sz="950" b="0" i="0">
                 <a:solidFill>
                   <a:srgbClr val="2B2C4A"/>
                 </a:solidFill>
                 <a:latin typeface="Montserrat"/>
               </a:rPr>
-              <a:t>Equimosis periumbilical tardía e infrecuente; el texto no informa si estaba presente.</a:t>
-            </a:r>
-          </a:p>
-        </p:txBody>
-      </p:sp>
-      <p:sp>
-        <p:nvSpPr>
-          <p:cNvPr id="24" name="Rounded Rectangle 23"/>
+              <a:t>Equimosis periumbilical tardía e infrecuente; no informada.</a:t>
+            </a:r>
+          </a:p>
+        </p:txBody>
+      </p:sp>
+      <p:sp>
+        <p:nvSpPr>
+          <p:cNvPr id="23" name="Rounded Rectangle 22"/>
           <p:cNvSpPr/>
           <p:nvPr/>
         </p:nvSpPr>
         <p:spPr>
           <a:xfrm>
-            <a:off x="594360" y="5155387"/>
-            <a:ext cx="3108960" cy="788212"/>
-          </a:xfrm>
-          <a:prstGeom prst="roundRect">
-            <a:avLst>
-              <a:gd name="adj" fmla="val 4000"/>
-            </a:avLst>
-          </a:prstGeom>
-          <a:solidFill>
-            <a:srgbClr val="3854CC"/>
-          </a:solidFill>
-          <a:ln>
-            <a:noFill/>
-          </a:ln>
-          <a:effectLst/>
-        </p:spPr>
-        <p:style>
-          <a:lnRef idx="1">
-            <a:schemeClr val="accent1"/>
-          </a:lnRef>
-          <a:fillRef idx="3">
-            <a:schemeClr val="accent1"/>
-          </a:fillRef>
-          <a:effectRef idx="2">
-            <a:schemeClr val="accent1"/>
-          </a:effectRef>
-          <a:fontRef idx="minor">
-            <a:schemeClr val="lt1"/>
-          </a:fontRef>
-        </p:style>
-        <p:txBody>
-          <a:bodyPr rtlCol="0" anchor="ctr"/>
-          <a:lstStyle/>
-          <a:p>
-            <a:pPr algn="ctr"/>
-          </a:p>
-        </p:txBody>
-      </p:sp>
-      <p:sp>
-        <p:nvSpPr>
-          <p:cNvPr id="25" name="TextBox 24"/>
-          <p:cNvSpPr txBox="1"/>
-          <p:nvPr/>
-        </p:nvSpPr>
-        <p:spPr>
-          <a:xfrm>
-            <a:off x="777240" y="5155387"/>
-            <a:ext cx="2743200" cy="788212"/>
-          </a:xfrm>
-          <a:prstGeom prst="rect">
-            <a:avLst/>
-          </a:prstGeom>
-          <a:noFill/>
-        </p:spPr>
-        <p:txBody>
-          <a:bodyPr wrap="square" anchor="ctr" lIns="0" rIns="0" tIns="0" bIns="0">
-            <a:spAutoFit/>
-          </a:bodyPr>
-          <a:lstStyle/>
-          <a:p>
-            <a:pPr algn="l">
-              <a:lnSpc>
-                <a:spcPct val="108000"/>
-              </a:lnSpc>
-              <a:spcAft>
-                <a:spcPts val="300"/>
-              </a:spcAft>
-            </a:pPr>
-            <a:r>
-              <a:rPr sz="1100" b="1" i="0">
-                <a:solidFill>
-                  <a:srgbClr val="FFFFFF"/>
-                </a:solidFill>
-                <a:latin typeface="Montserrat"/>
-              </a:rPr>
-              <a:t>GREY TURNER</a:t>
-            </a:r>
-          </a:p>
-        </p:txBody>
-      </p:sp>
-      <p:sp>
-        <p:nvSpPr>
-          <p:cNvPr id="26" name="Rounded Rectangle 25"/>
-          <p:cNvSpPr/>
-          <p:nvPr/>
-        </p:nvSpPr>
-        <p:spPr>
-          <a:xfrm>
-            <a:off x="3794760" y="5155387"/>
-            <a:ext cx="7772400" cy="788212"/>
+            <a:off x="1560770" y="2658129"/>
+            <a:ext cx="2286000" cy="960120"/>
           </a:xfrm>
           <a:prstGeom prst="roundRect">
             <a:avLst>
@@ -15509,14 +15880,14 @@
       </p:sp>
       <p:sp>
         <p:nvSpPr>
-          <p:cNvPr id="27" name="TextBox 26"/>
+          <p:cNvPr id="24" name="TextBox 23"/>
           <p:cNvSpPr txBox="1"/>
           <p:nvPr/>
         </p:nvSpPr>
         <p:spPr>
           <a:xfrm>
-            <a:off x="3977639" y="5155387"/>
-            <a:ext cx="7406640" cy="788212"/>
+            <a:off x="1697930" y="2731281"/>
+            <a:ext cx="2011680" cy="813816"/>
           </a:xfrm>
           <a:prstGeom prst="rect">
             <a:avLst/>
@@ -15529,29 +15900,54 @@
           </a:bodyPr>
           <a:lstStyle/>
           <a:p>
-            <a:pPr algn="l">
-              <a:lnSpc>
-                <a:spcPct val="110000"/>
-              </a:lnSpc>
+            <a:pPr algn="ctr">
+              <a:lnSpc>
+                <a:spcPct val="108000"/>
+              </a:lnSpc>
+              <a:spcBef>
+                <a:spcPts val="0"/>
+              </a:spcBef>
+              <a:spcAft>
+                <a:spcPts val="200"/>
+              </a:spcAft>
+            </a:pPr>
+            <a:r>
+              <a:rPr sz="1150" b="1" i="0">
+                <a:solidFill>
+                  <a:srgbClr val="3854CC"/>
+                </a:solidFill>
+                <a:latin typeface="Montserrat"/>
+              </a:rPr>
+              <a:t>Signo de Grey Turner</a:t>
+            </a:r>
+          </a:p>
+          <a:p>
+            <a:pPr algn="ctr">
+              <a:lnSpc>
+                <a:spcPct val="105000"/>
+              </a:lnSpc>
+              <a:spcBef>
+                <a:spcPts val="0"/>
+              </a:spcBef>
               <a:spcAft>
                 <a:spcPts val="300"/>
               </a:spcAft>
             </a:pPr>
             <a:r>
-              <a:rPr sz="1150" b="0" i="0">
+              <a:rPr sz="950" b="0" i="0">
                 <a:solidFill>
                   <a:srgbClr val="2B2C4A"/>
                 </a:solidFill>
                 <a:latin typeface="Montserrat"/>
               </a:rPr>
-              <a:t>Equimosis en flancos tardía e infrecuente; el texto no informa si estaba presente.</a:t>
-            </a:r>
-          </a:p>
-        </p:txBody>
-      </p:sp>
-      <p:sp>
-        <p:nvSpPr>
-          <p:cNvPr id="28" name="TextBox 27"/>
+              <a:t>Equimosis de flancos, tardía e infrecuente; no informada.</a:t>
+            </a:r>
+          </a:p>
+        </p:txBody>
+      </p:sp>
+      <p:sp>
+        <p:nvSpPr>
+          <p:cNvPr id="25" name="TextBox 24"/>
           <p:cNvSpPr txBox="1"/>
           <p:nvPr/>
         </p:nvSpPr>
@@ -15586,7 +15982,7 @@
                 </a:solidFill>
                 <a:latin typeface="Montserrat"/>
               </a:rPr>
-              <a:t>No se describen equimosis; dato no informado no equivale a examen negativo.</a:t>
+              <a:t>Cullen y Grey Turner tienen baja sensibilidad; su ausencia no descarta pancreatitis [9].</a:t>
             </a:r>
           </a:p>
         </p:txBody>
